--- a/backend/docs/defense/VioNER_Defense_Slides.pptx
+++ b/backend/docs/defense/VioNER_Defense_Slides.pptx
@@ -5,29 +5,30 @@
     <p:sldMasterId id="2147483648" r:id="rId1"/>
   </p:sldMasterIdLst>
   <p:notesMasterIdLst>
-    <p:notesMasterId r:id="rId22"/>
+    <p:notesMasterId r:id="rId23"/>
   </p:notesMasterIdLst>
   <p:sldIdLst>
     <p:sldId id="394" r:id="rId2"/>
     <p:sldId id="388" r:id="rId3"/>
-    <p:sldId id="367" r:id="rId4"/>
-    <p:sldId id="368" r:id="rId5"/>
-    <p:sldId id="395" r:id="rId6"/>
-    <p:sldId id="405" r:id="rId7"/>
-    <p:sldId id="396" r:id="rId8"/>
-    <p:sldId id="397" r:id="rId9"/>
-    <p:sldId id="373" r:id="rId10"/>
-    <p:sldId id="399" r:id="rId11"/>
-    <p:sldId id="375" r:id="rId12"/>
-    <p:sldId id="376" r:id="rId13"/>
-    <p:sldId id="377" r:id="rId14"/>
-    <p:sldId id="400" r:id="rId15"/>
-    <p:sldId id="401" r:id="rId16"/>
-    <p:sldId id="410" r:id="rId17"/>
-    <p:sldId id="381" r:id="rId18"/>
-    <p:sldId id="385" r:id="rId19"/>
-    <p:sldId id="386" r:id="rId20"/>
-    <p:sldId id="413" r:id="rId21"/>
+    <p:sldId id="417" r:id="rId4"/>
+    <p:sldId id="367" r:id="rId5"/>
+    <p:sldId id="368" r:id="rId6"/>
+    <p:sldId id="395" r:id="rId7"/>
+    <p:sldId id="405" r:id="rId8"/>
+    <p:sldId id="396" r:id="rId9"/>
+    <p:sldId id="397" r:id="rId10"/>
+    <p:sldId id="373" r:id="rId11"/>
+    <p:sldId id="399" r:id="rId12"/>
+    <p:sldId id="375" r:id="rId13"/>
+    <p:sldId id="376" r:id="rId14"/>
+    <p:sldId id="377" r:id="rId15"/>
+    <p:sldId id="400" r:id="rId16"/>
+    <p:sldId id="401" r:id="rId17"/>
+    <p:sldId id="410" r:id="rId18"/>
+    <p:sldId id="381" r:id="rId19"/>
+    <p:sldId id="385" r:id="rId20"/>
+    <p:sldId id="386" r:id="rId21"/>
+    <p:sldId id="413" r:id="rId22"/>
   </p:sldIdLst>
   <p:sldSz cx="12192000" cy="6858000"/>
   <p:notesSz cx="6858000" cy="12192000"/>
@@ -1557,6 +1558,1101 @@
 
 <file path=ppt/slides/slide10.xml><?xml version="1.0" encoding="utf-8"?>
 <p:sld xmlns:a="http://schemas.openxmlformats.org/drawingml/2006/main" xmlns:r="http://schemas.openxmlformats.org/officeDocument/2006/relationships" xmlns:p="http://schemas.openxmlformats.org/presentationml/2006/main">
+  <p:cSld name="Slide 9">
+    <p:bg>
+      <p:bgPr>
+        <a:solidFill>
+          <a:srgbClr val="FFFFFF"/>
+        </a:solidFill>
+        <a:effectLst/>
+      </p:bgPr>
+    </p:bg>
+    <p:spTree>
+      <p:nvGrpSpPr>
+        <p:cNvPr id="1" name=""/>
+        <p:cNvGrpSpPr/>
+        <p:nvPr/>
+      </p:nvGrpSpPr>
+      <p:grpSpPr>
+        <a:xfrm>
+          <a:off x="0" y="0"/>
+          <a:ext cx="0" cy="0"/>
+          <a:chOff x="0" y="0"/>
+          <a:chExt cx="0" cy="0"/>
+        </a:xfrm>
+      </p:grpSpPr>
+      <p:sp>
+        <p:nvSpPr>
+          <p:cNvPr id="2" name="Text 0"/>
+          <p:cNvSpPr/>
+          <p:nvPr/>
+        </p:nvSpPr>
+        <p:spPr>
+          <a:xfrm>
+            <a:off x="548640" y="6473952"/>
+            <a:ext cx="7315200" cy="274320"/>
+          </a:xfrm>
+          <a:prstGeom prst="rect">
+            <a:avLst/>
+          </a:prstGeom>
+          <a:noFill/>
+          <a:ln/>
+        </p:spPr>
+        <p:txBody>
+          <a:bodyPr wrap="square" lIns="0" tIns="0" rIns="0" bIns="0" rtlCol="0" anchor="ctr"/>
+          <a:lstStyle/>
+          <a:p>
+            <a:pPr marL="0" indent="0">
+              <a:buNone/>
+            </a:pPr>
+            <a:r>
+              <a:rPr lang="en-US" sz="900" dirty="0">
+                <a:solidFill>
+                  <a:srgbClr val="5A6675"/>
+                </a:solidFill>
+                <a:latin typeface="Calibri" pitchFamily="34" charset="0"/>
+                <a:ea typeface="Calibri" pitchFamily="34" charset="-122"/>
+                <a:cs typeface="Calibri" pitchFamily="34" charset="-120"/>
+              </a:rPr>
+              <a:t>VioNER · Extraction of Violent Events</a:t>
+            </a:r>
+            <a:endParaRPr lang="en-US" sz="900" dirty="0"/>
+          </a:p>
+        </p:txBody>
+      </p:sp>
+      <p:sp>
+        <p:nvSpPr>
+          <p:cNvPr id="3" name="Text 1"/>
+          <p:cNvSpPr/>
+          <p:nvPr/>
+        </p:nvSpPr>
+        <p:spPr>
+          <a:xfrm>
+            <a:off x="11185855" y="6473952"/>
+            <a:ext cx="502920" cy="274320"/>
+          </a:xfrm>
+          <a:prstGeom prst="rect">
+            <a:avLst/>
+          </a:prstGeom>
+          <a:noFill/>
+          <a:ln/>
+        </p:spPr>
+        <p:txBody>
+          <a:bodyPr wrap="square" lIns="0" tIns="0" rIns="0" bIns="0" rtlCol="0" anchor="ctr"/>
+          <a:lstStyle/>
+          <a:p>
+            <a:pPr marL="0" indent="0" algn="r">
+              <a:buNone/>
+            </a:pPr>
+            <a:r>
+              <a:rPr lang="en-US" sz="900" dirty="0">
+                <a:solidFill>
+                  <a:srgbClr val="5A6675"/>
+                </a:solidFill>
+                <a:latin typeface="Calibri" pitchFamily="34" charset="0"/>
+                <a:ea typeface="Calibri" pitchFamily="34" charset="-122"/>
+                <a:cs typeface="Calibri" pitchFamily="34" charset="-120"/>
+              </a:rPr>
+              <a:t>9</a:t>
+            </a:r>
+            <a:endParaRPr lang="en-US" sz="900" dirty="0"/>
+          </a:p>
+        </p:txBody>
+      </p:sp>
+      <p:sp>
+        <p:nvSpPr>
+          <p:cNvPr id="4" name="Text 2"/>
+          <p:cNvSpPr/>
+          <p:nvPr/>
+        </p:nvSpPr>
+        <p:spPr>
+          <a:xfrm>
+            <a:off x="548640" y="384048"/>
+            <a:ext cx="10972800" cy="274320"/>
+          </a:xfrm>
+          <a:prstGeom prst="rect">
+            <a:avLst/>
+          </a:prstGeom>
+          <a:noFill/>
+          <a:ln/>
+        </p:spPr>
+        <p:txBody>
+          <a:bodyPr wrap="square" lIns="0" tIns="0" rIns="0" bIns="0" rtlCol="0" anchor="ctr"/>
+          <a:lstStyle/>
+          <a:p>
+            <a:pPr marL="0" indent="0">
+              <a:buNone/>
+            </a:pPr>
+            <a:r>
+              <a:rPr lang="en-US" sz="1200" b="1" kern="0" spc="300" dirty="0">
+                <a:solidFill>
+                  <a:srgbClr val="E9C46A"/>
+                </a:solidFill>
+                <a:latin typeface="Calibri" pitchFamily="34" charset="0"/>
+                <a:ea typeface="Calibri" pitchFamily="34" charset="-122"/>
+                <a:cs typeface="Calibri" pitchFamily="34" charset="-120"/>
+              </a:rPr>
+              <a:t>ACT 2 · THE SOLUTION</a:t>
+            </a:r>
+            <a:endParaRPr lang="en-US" sz="1200" dirty="0"/>
+          </a:p>
+        </p:txBody>
+      </p:sp>
+      <p:sp>
+        <p:nvSpPr>
+          <p:cNvPr id="5" name="Text 3"/>
+          <p:cNvSpPr/>
+          <p:nvPr/>
+        </p:nvSpPr>
+        <p:spPr>
+          <a:xfrm>
+            <a:off x="548640" y="658368"/>
+            <a:ext cx="11109960" cy="731520"/>
+          </a:xfrm>
+          <a:prstGeom prst="rect">
+            <a:avLst/>
+          </a:prstGeom>
+          <a:noFill/>
+          <a:ln/>
+        </p:spPr>
+        <p:txBody>
+          <a:bodyPr wrap="square" lIns="0" tIns="0" rIns="0" bIns="0" rtlCol="0" anchor="ctr"/>
+          <a:lstStyle/>
+          <a:p>
+            <a:pPr marL="0" indent="0">
+              <a:buNone/>
+            </a:pPr>
+            <a:r>
+              <a:rPr lang="en-US" sz="2900" b="1" dirty="0">
+                <a:solidFill>
+                  <a:srgbClr val="16314E"/>
+                </a:solidFill>
+                <a:latin typeface="Georgia" pitchFamily="34" charset="0"/>
+                <a:ea typeface="Georgia" pitchFamily="34" charset="-122"/>
+                <a:cs typeface="Georgia" pitchFamily="34" charset="-120"/>
+              </a:rPr>
+              <a:t>Methodology: design science — build, evaluate, learn, refine</a:t>
+            </a:r>
+            <a:endParaRPr lang="en-US" sz="2900" dirty="0"/>
+          </a:p>
+        </p:txBody>
+      </p:sp>
+      <p:sp>
+        <p:nvSpPr>
+          <p:cNvPr id="6" name="Shape 4"/>
+          <p:cNvSpPr/>
+          <p:nvPr/>
+        </p:nvSpPr>
+        <p:spPr>
+          <a:xfrm>
+            <a:off x="1005840" y="2148840"/>
+            <a:ext cx="2468880" cy="2468880"/>
+          </a:xfrm>
+          <a:prstGeom prst="ellipse">
+            <a:avLst/>
+          </a:prstGeom>
+          <a:solidFill>
+            <a:srgbClr val="FFFFFF">
+              <a:alpha val="0"/>
+            </a:srgbClr>
+          </a:solidFill>
+          <a:ln w="31750">
+            <a:solidFill>
+              <a:srgbClr val="2A9D8F"/>
+            </a:solidFill>
+            <a:prstDash val="dash"/>
+          </a:ln>
+        </p:spPr>
+        <p:txBody>
+          <a:bodyPr/>
+          <a:lstStyle/>
+          <a:p>
+            <a:endParaRPr lang="en-ET"/>
+          </a:p>
+        </p:txBody>
+      </p:sp>
+      <p:sp>
+        <p:nvSpPr>
+          <p:cNvPr id="7" name="Shape 5"/>
+          <p:cNvSpPr/>
+          <p:nvPr/>
+        </p:nvSpPr>
+        <p:spPr>
+          <a:xfrm>
+            <a:off x="1673352" y="1819656"/>
+            <a:ext cx="1133856" cy="658368"/>
+          </a:xfrm>
+          <a:prstGeom prst="ellipse">
+            <a:avLst/>
+          </a:prstGeom>
+          <a:solidFill>
+            <a:srgbClr val="16314E"/>
+          </a:solidFill>
+          <a:ln/>
+          <a:effectLst>
+            <a:outerShdw blurRad="63500" dist="25400" dir="8100000" algn="bl" rotWithShape="0">
+              <a:srgbClr val="1B2A3A">
+                <a:alpha val="12000"/>
+              </a:srgbClr>
+            </a:outerShdw>
+          </a:effectLst>
+        </p:spPr>
+        <p:txBody>
+          <a:bodyPr/>
+          <a:lstStyle/>
+          <a:p>
+            <a:endParaRPr lang="en-ET"/>
+          </a:p>
+        </p:txBody>
+      </p:sp>
+      <p:sp>
+        <p:nvSpPr>
+          <p:cNvPr id="8" name="Text 6"/>
+          <p:cNvSpPr/>
+          <p:nvPr/>
+        </p:nvSpPr>
+        <p:spPr>
+          <a:xfrm>
+            <a:off x="1673352" y="1819656"/>
+            <a:ext cx="1133856" cy="658368"/>
+          </a:xfrm>
+          <a:prstGeom prst="rect">
+            <a:avLst/>
+          </a:prstGeom>
+          <a:noFill/>
+          <a:ln/>
+        </p:spPr>
+        <p:txBody>
+          <a:bodyPr wrap="square" lIns="0" tIns="0" rIns="0" bIns="0" rtlCol="0" anchor="ctr"/>
+          <a:lstStyle/>
+          <a:p>
+            <a:pPr marL="0" indent="0" algn="ctr">
+              <a:buNone/>
+            </a:pPr>
+            <a:r>
+              <a:rPr lang="en-US" sz="1150" b="1" dirty="0">
+                <a:solidFill>
+                  <a:srgbClr val="FFFFFF"/>
+                </a:solidFill>
+                <a:latin typeface="Calibri" pitchFamily="34" charset="0"/>
+                <a:ea typeface="Calibri" pitchFamily="34" charset="-122"/>
+                <a:cs typeface="Calibri" pitchFamily="34" charset="-120"/>
+              </a:rPr>
+              <a:t>BUILD</a:t>
+            </a:r>
+            <a:endParaRPr lang="en-US" sz="1150" dirty="0"/>
+          </a:p>
+        </p:txBody>
+      </p:sp>
+      <p:sp>
+        <p:nvSpPr>
+          <p:cNvPr id="9" name="Shape 7"/>
+          <p:cNvSpPr/>
+          <p:nvPr/>
+        </p:nvSpPr>
+        <p:spPr>
+          <a:xfrm>
+            <a:off x="2907792" y="3054096"/>
+            <a:ext cx="1133856" cy="658368"/>
+          </a:xfrm>
+          <a:prstGeom prst="ellipse">
+            <a:avLst/>
+          </a:prstGeom>
+          <a:solidFill>
+            <a:srgbClr val="16314E"/>
+          </a:solidFill>
+          <a:ln/>
+          <a:effectLst>
+            <a:outerShdw blurRad="63500" dist="25400" dir="8100000" algn="bl" rotWithShape="0">
+              <a:srgbClr val="1B2A3A">
+                <a:alpha val="12000"/>
+              </a:srgbClr>
+            </a:outerShdw>
+          </a:effectLst>
+        </p:spPr>
+        <p:txBody>
+          <a:bodyPr/>
+          <a:lstStyle/>
+          <a:p>
+            <a:endParaRPr lang="en-ET"/>
+          </a:p>
+        </p:txBody>
+      </p:sp>
+      <p:sp>
+        <p:nvSpPr>
+          <p:cNvPr id="10" name="Text 8"/>
+          <p:cNvSpPr/>
+          <p:nvPr/>
+        </p:nvSpPr>
+        <p:spPr>
+          <a:xfrm>
+            <a:off x="2907792" y="3054096"/>
+            <a:ext cx="1133856" cy="658368"/>
+          </a:xfrm>
+          <a:prstGeom prst="rect">
+            <a:avLst/>
+          </a:prstGeom>
+          <a:noFill/>
+          <a:ln/>
+        </p:spPr>
+        <p:txBody>
+          <a:bodyPr wrap="square" lIns="0" tIns="0" rIns="0" bIns="0" rtlCol="0" anchor="ctr"/>
+          <a:lstStyle/>
+          <a:p>
+            <a:pPr marL="0" indent="0" algn="ctr">
+              <a:buNone/>
+            </a:pPr>
+            <a:r>
+              <a:rPr lang="en-US" sz="1150" b="1" dirty="0">
+                <a:solidFill>
+                  <a:srgbClr val="FFFFFF"/>
+                </a:solidFill>
+                <a:latin typeface="Calibri" pitchFamily="34" charset="0"/>
+                <a:ea typeface="Calibri" pitchFamily="34" charset="-122"/>
+                <a:cs typeface="Calibri" pitchFamily="34" charset="-120"/>
+              </a:rPr>
+              <a:t>EVALUATE</a:t>
+            </a:r>
+            <a:endParaRPr lang="en-US" sz="1150" dirty="0"/>
+          </a:p>
+        </p:txBody>
+      </p:sp>
+      <p:sp>
+        <p:nvSpPr>
+          <p:cNvPr id="11" name="Shape 9"/>
+          <p:cNvSpPr/>
+          <p:nvPr/>
+        </p:nvSpPr>
+        <p:spPr>
+          <a:xfrm>
+            <a:off x="1673352" y="4288536"/>
+            <a:ext cx="1133856" cy="658368"/>
+          </a:xfrm>
+          <a:prstGeom prst="ellipse">
+            <a:avLst/>
+          </a:prstGeom>
+          <a:solidFill>
+            <a:srgbClr val="16314E"/>
+          </a:solidFill>
+          <a:ln/>
+          <a:effectLst>
+            <a:outerShdw blurRad="63500" dist="25400" dir="8100000" algn="bl" rotWithShape="0">
+              <a:srgbClr val="1B2A3A">
+                <a:alpha val="12000"/>
+              </a:srgbClr>
+            </a:outerShdw>
+          </a:effectLst>
+        </p:spPr>
+        <p:txBody>
+          <a:bodyPr/>
+          <a:lstStyle/>
+          <a:p>
+            <a:endParaRPr lang="en-ET"/>
+          </a:p>
+        </p:txBody>
+      </p:sp>
+      <p:sp>
+        <p:nvSpPr>
+          <p:cNvPr id="12" name="Text 10"/>
+          <p:cNvSpPr/>
+          <p:nvPr/>
+        </p:nvSpPr>
+        <p:spPr>
+          <a:xfrm>
+            <a:off x="1673352" y="4288536"/>
+            <a:ext cx="1133856" cy="658368"/>
+          </a:xfrm>
+          <a:prstGeom prst="rect">
+            <a:avLst/>
+          </a:prstGeom>
+          <a:noFill/>
+          <a:ln/>
+        </p:spPr>
+        <p:txBody>
+          <a:bodyPr wrap="square" lIns="0" tIns="0" rIns="0" bIns="0" rtlCol="0" anchor="ctr"/>
+          <a:lstStyle/>
+          <a:p>
+            <a:pPr marL="0" indent="0" algn="ctr">
+              <a:buNone/>
+            </a:pPr>
+            <a:r>
+              <a:rPr lang="en-US" sz="1150" b="1" dirty="0">
+                <a:solidFill>
+                  <a:srgbClr val="FFFFFF"/>
+                </a:solidFill>
+                <a:latin typeface="Calibri" pitchFamily="34" charset="0"/>
+                <a:ea typeface="Calibri" pitchFamily="34" charset="-122"/>
+                <a:cs typeface="Calibri" pitchFamily="34" charset="-120"/>
+              </a:rPr>
+              <a:t>LEARN</a:t>
+            </a:r>
+            <a:endParaRPr lang="en-US" sz="1150" dirty="0"/>
+          </a:p>
+        </p:txBody>
+      </p:sp>
+      <p:sp>
+        <p:nvSpPr>
+          <p:cNvPr id="13" name="Shape 11"/>
+          <p:cNvSpPr/>
+          <p:nvPr/>
+        </p:nvSpPr>
+        <p:spPr>
+          <a:xfrm>
+            <a:off x="438912" y="3054096"/>
+            <a:ext cx="1133856" cy="658368"/>
+          </a:xfrm>
+          <a:prstGeom prst="ellipse">
+            <a:avLst/>
+          </a:prstGeom>
+          <a:solidFill>
+            <a:srgbClr val="16314E"/>
+          </a:solidFill>
+          <a:ln/>
+          <a:effectLst>
+            <a:outerShdw blurRad="63500" dist="25400" dir="8100000" algn="bl" rotWithShape="0">
+              <a:srgbClr val="1B2A3A">
+                <a:alpha val="12000"/>
+              </a:srgbClr>
+            </a:outerShdw>
+          </a:effectLst>
+        </p:spPr>
+        <p:txBody>
+          <a:bodyPr/>
+          <a:lstStyle/>
+          <a:p>
+            <a:endParaRPr lang="en-ET"/>
+          </a:p>
+        </p:txBody>
+      </p:sp>
+      <p:sp>
+        <p:nvSpPr>
+          <p:cNvPr id="14" name="Text 12"/>
+          <p:cNvSpPr/>
+          <p:nvPr/>
+        </p:nvSpPr>
+        <p:spPr>
+          <a:xfrm>
+            <a:off x="438912" y="3054096"/>
+            <a:ext cx="1133856" cy="658368"/>
+          </a:xfrm>
+          <a:prstGeom prst="rect">
+            <a:avLst/>
+          </a:prstGeom>
+          <a:noFill/>
+          <a:ln/>
+        </p:spPr>
+        <p:txBody>
+          <a:bodyPr wrap="square" lIns="0" tIns="0" rIns="0" bIns="0" rtlCol="0" anchor="ctr"/>
+          <a:lstStyle/>
+          <a:p>
+            <a:pPr marL="0" indent="0" algn="ctr">
+              <a:buNone/>
+            </a:pPr>
+            <a:r>
+              <a:rPr lang="en-US" sz="1150" b="1" dirty="0">
+                <a:solidFill>
+                  <a:srgbClr val="FFFFFF"/>
+                </a:solidFill>
+                <a:latin typeface="Calibri" pitchFamily="34" charset="0"/>
+                <a:ea typeface="Calibri" pitchFamily="34" charset="-122"/>
+                <a:cs typeface="Calibri" pitchFamily="34" charset="-120"/>
+              </a:rPr>
+              <a:t>REFINE</a:t>
+            </a:r>
+            <a:endParaRPr lang="en-US" sz="1150" dirty="0"/>
+          </a:p>
+        </p:txBody>
+      </p:sp>
+      <p:sp>
+        <p:nvSpPr>
+          <p:cNvPr id="15" name="Text 13"/>
+          <p:cNvSpPr/>
+          <p:nvPr/>
+        </p:nvSpPr>
+        <p:spPr>
+          <a:xfrm>
+            <a:off x="548640" y="5349240"/>
+            <a:ext cx="3474720" cy="274320"/>
+          </a:xfrm>
+          <a:prstGeom prst="rect">
+            <a:avLst/>
+          </a:prstGeom>
+          <a:noFill/>
+          <a:ln/>
+        </p:spPr>
+        <p:txBody>
+          <a:bodyPr wrap="square" lIns="0" tIns="0" rIns="0" bIns="0" rtlCol="0" anchor="ctr"/>
+          <a:lstStyle/>
+          <a:p>
+            <a:pPr marL="0" indent="0" algn="ctr">
+              <a:buNone/>
+            </a:pPr>
+            <a:r>
+              <a:rPr lang="en-US" sz="1050" i="1" dirty="0">
+                <a:solidFill>
+                  <a:srgbClr val="5A6675"/>
+                </a:solidFill>
+                <a:latin typeface="Calibri" pitchFamily="34" charset="0"/>
+                <a:ea typeface="Calibri" pitchFamily="34" charset="-122"/>
+                <a:cs typeface="Calibri" pitchFamily="34" charset="-120"/>
+              </a:rPr>
+              <a:t>Hevner et al. 2004 · Peffers et al. 2007</a:t>
+            </a:r>
+            <a:endParaRPr lang="en-US" sz="1050" dirty="0"/>
+          </a:p>
+        </p:txBody>
+      </p:sp>
+      <p:sp>
+        <p:nvSpPr>
+          <p:cNvPr id="16" name="Text 14"/>
+          <p:cNvSpPr/>
+          <p:nvPr/>
+        </p:nvSpPr>
+        <p:spPr>
+          <a:xfrm>
+            <a:off x="548640" y="5669280"/>
+            <a:ext cx="3474720" cy="548640"/>
+          </a:xfrm>
+          <a:prstGeom prst="rect">
+            <a:avLst/>
+          </a:prstGeom>
+          <a:noFill/>
+          <a:ln/>
+        </p:spPr>
+        <p:txBody>
+          <a:bodyPr wrap="square" lIns="0" tIns="0" rIns="0" bIns="0" rtlCol="0" anchor="ctr"/>
+          <a:lstStyle/>
+          <a:p>
+            <a:pPr marL="0" indent="0" algn="ctr">
+              <a:buNone/>
+            </a:pPr>
+            <a:r>
+              <a:rPr lang="en-US" sz="1150" dirty="0">
+                <a:solidFill>
+                  <a:srgbClr val="1D242E"/>
+                </a:solidFill>
+                <a:latin typeface="Calibri" pitchFamily="34" charset="0"/>
+                <a:ea typeface="Calibri" pitchFamily="34" charset="-122"/>
+                <a:cs typeface="Calibri" pitchFamily="34" charset="-120"/>
+              </a:rPr>
+              <a:t>The contribution is an artefact —</a:t>
+            </a:r>
+            <a:endParaRPr lang="en-US" sz="1150" dirty="0"/>
+          </a:p>
+          <a:p>
+            <a:pPr marL="0" indent="0" algn="ctr">
+              <a:buNone/>
+            </a:pPr>
+            <a:r>
+              <a:rPr lang="en-US" sz="1150" dirty="0">
+                <a:solidFill>
+                  <a:srgbClr val="1D242E"/>
+                </a:solidFill>
+                <a:latin typeface="Calibri" pitchFamily="34" charset="0"/>
+                <a:ea typeface="Calibri" pitchFamily="34" charset="-122"/>
+                <a:cs typeface="Calibri" pitchFamily="34" charset="-120"/>
+              </a:rPr>
+              <a:t>evaluated empirically, iterated on evidence.</a:t>
+            </a:r>
+            <a:endParaRPr lang="en-US" sz="1150" dirty="0"/>
+          </a:p>
+        </p:txBody>
+      </p:sp>
+      <p:sp>
+        <p:nvSpPr>
+          <p:cNvPr id="17" name="Text 15"/>
+          <p:cNvSpPr/>
+          <p:nvPr/>
+        </p:nvSpPr>
+        <p:spPr>
+          <a:xfrm>
+            <a:off x="4434840" y="1627632"/>
+            <a:ext cx="7223760" cy="274320"/>
+          </a:xfrm>
+          <a:prstGeom prst="rect">
+            <a:avLst/>
+          </a:prstGeom>
+          <a:noFill/>
+          <a:ln/>
+        </p:spPr>
+        <p:txBody>
+          <a:bodyPr wrap="square" lIns="0" tIns="0" rIns="0" bIns="0" rtlCol="0" anchor="ctr"/>
+          <a:lstStyle/>
+          <a:p>
+            <a:pPr marL="0" indent="0">
+              <a:buNone/>
+            </a:pPr>
+            <a:r>
+              <a:rPr lang="en-US" sz="1100" b="1" kern="0" spc="150" dirty="0">
+                <a:solidFill>
+                  <a:srgbClr val="1F7A6F"/>
+                </a:solidFill>
+                <a:latin typeface="Calibri" pitchFamily="34" charset="0"/>
+                <a:ea typeface="Calibri" pitchFamily="34" charset="-122"/>
+                <a:cs typeface="Calibri" pitchFamily="34" charset="-120"/>
+              </a:rPr>
+              <a:t>THREE DOCUMENTED ITERATION LOOPS — EACH CLOSED BY MEASUREMENT, NOT PREFERENCE</a:t>
+            </a:r>
+            <a:endParaRPr lang="en-US" sz="1100" dirty="0"/>
+          </a:p>
+        </p:txBody>
+      </p:sp>
+      <p:sp>
+        <p:nvSpPr>
+          <p:cNvPr id="18" name="Shape 16"/>
+          <p:cNvSpPr/>
+          <p:nvPr/>
+        </p:nvSpPr>
+        <p:spPr>
+          <a:xfrm>
+            <a:off x="4434840" y="2011680"/>
+            <a:ext cx="7205472" cy="1298448"/>
+          </a:xfrm>
+          <a:prstGeom prst="rect">
+            <a:avLst/>
+          </a:prstGeom>
+          <a:solidFill>
+            <a:srgbClr val="FFFFFF"/>
+          </a:solidFill>
+          <a:ln w="12700">
+            <a:solidFill>
+              <a:srgbClr val="C9D3DE"/>
+            </a:solidFill>
+            <a:prstDash val="solid"/>
+          </a:ln>
+          <a:effectLst>
+            <a:outerShdw blurRad="63500" dist="25400" dir="8100000" algn="bl" rotWithShape="0">
+              <a:srgbClr val="1B2A3A">
+                <a:alpha val="12000"/>
+              </a:srgbClr>
+            </a:outerShdw>
+          </a:effectLst>
+        </p:spPr>
+        <p:txBody>
+          <a:bodyPr/>
+          <a:lstStyle/>
+          <a:p>
+            <a:endParaRPr lang="en-ET"/>
+          </a:p>
+        </p:txBody>
+      </p:sp>
+      <p:sp>
+        <p:nvSpPr>
+          <p:cNvPr id="19" name="Shape 17"/>
+          <p:cNvSpPr/>
+          <p:nvPr/>
+        </p:nvSpPr>
+        <p:spPr>
+          <a:xfrm>
+            <a:off x="4434840" y="2011680"/>
+            <a:ext cx="82296" cy="1298448"/>
+          </a:xfrm>
+          <a:prstGeom prst="rect">
+            <a:avLst/>
+          </a:prstGeom>
+          <a:solidFill>
+            <a:srgbClr val="16314E"/>
+          </a:solidFill>
+          <a:ln/>
+        </p:spPr>
+        <p:txBody>
+          <a:bodyPr/>
+          <a:lstStyle/>
+          <a:p>
+            <a:endParaRPr lang="en-ET"/>
+          </a:p>
+        </p:txBody>
+      </p:sp>
+      <p:sp>
+        <p:nvSpPr>
+          <p:cNvPr id="20" name="Text 18"/>
+          <p:cNvSpPr/>
+          <p:nvPr/>
+        </p:nvSpPr>
+        <p:spPr>
+          <a:xfrm>
+            <a:off x="4663440" y="2121408"/>
+            <a:ext cx="6766560" cy="310896"/>
+          </a:xfrm>
+          <a:prstGeom prst="rect">
+            <a:avLst/>
+          </a:prstGeom>
+          <a:noFill/>
+          <a:ln/>
+        </p:spPr>
+        <p:txBody>
+          <a:bodyPr wrap="square" lIns="0" tIns="0" rIns="0" bIns="0" rtlCol="0" anchor="ctr"/>
+          <a:lstStyle/>
+          <a:p>
+            <a:pPr marL="0" indent="0">
+              <a:buNone/>
+            </a:pPr>
+            <a:r>
+              <a:rPr lang="en-US" sz="1350" b="1" dirty="0">
+                <a:solidFill>
+                  <a:srgbClr val="16314E"/>
+                </a:solidFill>
+                <a:latin typeface="Calibri" pitchFamily="34" charset="0"/>
+                <a:ea typeface="Calibri" pitchFamily="34" charset="-122"/>
+                <a:cs typeface="Calibri" pitchFamily="34" charset="-120"/>
+              </a:rPr>
+              <a:t>Corpus loop</a:t>
+            </a:r>
+            <a:endParaRPr lang="en-US" sz="1350" dirty="0"/>
+          </a:p>
+        </p:txBody>
+      </p:sp>
+      <p:sp>
+        <p:nvSpPr>
+          <p:cNvPr id="21" name="Text 19"/>
+          <p:cNvSpPr/>
+          <p:nvPr/>
+        </p:nvSpPr>
+        <p:spPr>
+          <a:xfrm>
+            <a:off x="4663440" y="2450592"/>
+            <a:ext cx="6812280" cy="822960"/>
+          </a:xfrm>
+          <a:prstGeom prst="rect">
+            <a:avLst/>
+          </a:prstGeom>
+          <a:noFill/>
+          <a:ln/>
+        </p:spPr>
+        <p:txBody>
+          <a:bodyPr wrap="square" lIns="0" tIns="0" rIns="0" bIns="0" rtlCol="0" anchor="ctr"/>
+          <a:lstStyle/>
+          <a:p>
+            <a:pPr marL="0" indent="0">
+              <a:lnSpc>
+                <a:spcPct val="106000"/>
+              </a:lnSpc>
+              <a:buNone/>
+            </a:pPr>
+            <a:r>
+              <a:rPr lang="en-US" sz="1150" dirty="0">
+                <a:solidFill>
+                  <a:srgbClr val="5A6675"/>
+                </a:solidFill>
+                <a:latin typeface="Calibri" pitchFamily="34" charset="0"/>
+                <a:ea typeface="Calibri" pitchFamily="34" charset="-122"/>
+                <a:cs typeface="Calibri" pitchFamily="34" charset="-120"/>
+              </a:rPr>
+              <a:t>Refined the training corpus from a raw event dump into a curated, diversity-balanced subset — so the model learns from varied phrasing rather than a handful of over-represented common events.</a:t>
+            </a:r>
+            <a:endParaRPr lang="en-US" sz="1150" dirty="0"/>
+          </a:p>
+        </p:txBody>
+      </p:sp>
+      <p:sp>
+        <p:nvSpPr>
+          <p:cNvPr id="22" name="Shape 20"/>
+          <p:cNvSpPr/>
+          <p:nvPr/>
+        </p:nvSpPr>
+        <p:spPr>
+          <a:xfrm>
+            <a:off x="4434840" y="3438144"/>
+            <a:ext cx="7205472" cy="1298448"/>
+          </a:xfrm>
+          <a:prstGeom prst="rect">
+            <a:avLst/>
+          </a:prstGeom>
+          <a:solidFill>
+            <a:srgbClr val="FFFFFF"/>
+          </a:solidFill>
+          <a:ln w="12700">
+            <a:solidFill>
+              <a:srgbClr val="C9D3DE"/>
+            </a:solidFill>
+            <a:prstDash val="solid"/>
+          </a:ln>
+          <a:effectLst>
+            <a:outerShdw blurRad="63500" dist="25400" dir="8100000" algn="bl" rotWithShape="0">
+              <a:srgbClr val="1B2A3A">
+                <a:alpha val="12000"/>
+              </a:srgbClr>
+            </a:outerShdw>
+          </a:effectLst>
+        </p:spPr>
+        <p:txBody>
+          <a:bodyPr/>
+          <a:lstStyle/>
+          <a:p>
+            <a:endParaRPr lang="en-ET"/>
+          </a:p>
+        </p:txBody>
+      </p:sp>
+      <p:sp>
+        <p:nvSpPr>
+          <p:cNvPr id="23" name="Shape 21"/>
+          <p:cNvSpPr/>
+          <p:nvPr/>
+        </p:nvSpPr>
+        <p:spPr>
+          <a:xfrm>
+            <a:off x="4434840" y="3438144"/>
+            <a:ext cx="82296" cy="1298448"/>
+          </a:xfrm>
+          <a:prstGeom prst="rect">
+            <a:avLst/>
+          </a:prstGeom>
+          <a:solidFill>
+            <a:srgbClr val="2A9D8F"/>
+          </a:solidFill>
+          <a:ln/>
+        </p:spPr>
+        <p:txBody>
+          <a:bodyPr/>
+          <a:lstStyle/>
+          <a:p>
+            <a:endParaRPr lang="en-ET"/>
+          </a:p>
+        </p:txBody>
+      </p:sp>
+      <p:sp>
+        <p:nvSpPr>
+          <p:cNvPr id="24" name="Text 22"/>
+          <p:cNvSpPr/>
+          <p:nvPr/>
+        </p:nvSpPr>
+        <p:spPr>
+          <a:xfrm>
+            <a:off x="4663440" y="3547872"/>
+            <a:ext cx="6766560" cy="310896"/>
+          </a:xfrm>
+          <a:prstGeom prst="rect">
+            <a:avLst/>
+          </a:prstGeom>
+          <a:noFill/>
+          <a:ln/>
+        </p:spPr>
+        <p:txBody>
+          <a:bodyPr wrap="square" lIns="0" tIns="0" rIns="0" bIns="0" rtlCol="0" anchor="ctr"/>
+          <a:lstStyle/>
+          <a:p>
+            <a:pPr marL="0" indent="0">
+              <a:buNone/>
+            </a:pPr>
+            <a:r>
+              <a:rPr lang="en-US" sz="1350" b="1" dirty="0">
+                <a:solidFill>
+                  <a:srgbClr val="16314E"/>
+                </a:solidFill>
+                <a:latin typeface="Calibri" pitchFamily="34" charset="0"/>
+                <a:ea typeface="Calibri" pitchFamily="34" charset="-122"/>
+                <a:cs typeface="Calibri" pitchFamily="34" charset="-120"/>
+              </a:rPr>
+              <a:t>Schema loop</a:t>
+            </a:r>
+            <a:endParaRPr lang="en-US" sz="1350" dirty="0"/>
+          </a:p>
+        </p:txBody>
+      </p:sp>
+      <p:sp>
+        <p:nvSpPr>
+          <p:cNvPr id="25" name="Text 23"/>
+          <p:cNvSpPr/>
+          <p:nvPr/>
+        </p:nvSpPr>
+        <p:spPr>
+          <a:xfrm>
+            <a:off x="4663440" y="3877056"/>
+            <a:ext cx="6812280" cy="822960"/>
+          </a:xfrm>
+          <a:prstGeom prst="rect">
+            <a:avLst/>
+          </a:prstGeom>
+          <a:noFill/>
+          <a:ln/>
+        </p:spPr>
+        <p:txBody>
+          <a:bodyPr wrap="square" lIns="0" tIns="0" rIns="0" bIns="0" rtlCol="0" anchor="ctr"/>
+          <a:lstStyle/>
+          <a:p>
+            <a:pPr marL="0" indent="0">
+              <a:lnSpc>
+                <a:spcPct val="106000"/>
+              </a:lnSpc>
+              <a:buNone/>
+            </a:pPr>
+            <a:r>
+              <a:rPr lang="en-US" sz="1150" dirty="0">
+                <a:solidFill>
+                  <a:srgbClr val="5A6675"/>
+                </a:solidFill>
+                <a:latin typeface="Calibri" pitchFamily="34" charset="0"/>
+                <a:ea typeface="Calibri" pitchFamily="34" charset="-122"/>
+                <a:cs typeface="Calibri" pitchFamily="34" charset="-120"/>
+              </a:rPr>
+              <a:t>Narrowed the entity set to only those an annotator can locate word-for-word in the source text — giving the model clean, auditable labels and the analyst output they can trust.</a:t>
+            </a:r>
+            <a:endParaRPr lang="en-US" sz="1150" dirty="0"/>
+          </a:p>
+        </p:txBody>
+      </p:sp>
+      <p:sp>
+        <p:nvSpPr>
+          <p:cNvPr id="26" name="Shape 24"/>
+          <p:cNvSpPr/>
+          <p:nvPr/>
+        </p:nvSpPr>
+        <p:spPr>
+          <a:xfrm>
+            <a:off x="4434840" y="4864608"/>
+            <a:ext cx="7205472" cy="1298448"/>
+          </a:xfrm>
+          <a:prstGeom prst="rect">
+            <a:avLst/>
+          </a:prstGeom>
+          <a:solidFill>
+            <a:srgbClr val="FFFFFF"/>
+          </a:solidFill>
+          <a:ln w="12700">
+            <a:solidFill>
+              <a:srgbClr val="C9D3DE"/>
+            </a:solidFill>
+            <a:prstDash val="solid"/>
+          </a:ln>
+          <a:effectLst>
+            <a:outerShdw blurRad="63500" dist="25400" dir="8100000" algn="bl" rotWithShape="0">
+              <a:srgbClr val="1B2A3A">
+                <a:alpha val="12000"/>
+              </a:srgbClr>
+            </a:outerShdw>
+          </a:effectLst>
+        </p:spPr>
+        <p:txBody>
+          <a:bodyPr/>
+          <a:lstStyle/>
+          <a:p>
+            <a:endParaRPr lang="en-ET"/>
+          </a:p>
+        </p:txBody>
+      </p:sp>
+      <p:sp>
+        <p:nvSpPr>
+          <p:cNvPr id="27" name="Shape 25"/>
+          <p:cNvSpPr/>
+          <p:nvPr/>
+        </p:nvSpPr>
+        <p:spPr>
+          <a:xfrm>
+            <a:off x="4434840" y="4864608"/>
+            <a:ext cx="82296" cy="1298448"/>
+          </a:xfrm>
+          <a:prstGeom prst="rect">
+            <a:avLst/>
+          </a:prstGeom>
+          <a:solidFill>
+            <a:srgbClr val="E76F51"/>
+          </a:solidFill>
+          <a:ln/>
+        </p:spPr>
+        <p:txBody>
+          <a:bodyPr/>
+          <a:lstStyle/>
+          <a:p>
+            <a:endParaRPr lang="en-ET"/>
+          </a:p>
+        </p:txBody>
+      </p:sp>
+      <p:sp>
+        <p:nvSpPr>
+          <p:cNvPr id="28" name="Text 26"/>
+          <p:cNvSpPr/>
+          <p:nvPr/>
+        </p:nvSpPr>
+        <p:spPr>
+          <a:xfrm>
+            <a:off x="4663440" y="4974336"/>
+            <a:ext cx="6766560" cy="310896"/>
+          </a:xfrm>
+          <a:prstGeom prst="rect">
+            <a:avLst/>
+          </a:prstGeom>
+          <a:noFill/>
+          <a:ln/>
+        </p:spPr>
+        <p:txBody>
+          <a:bodyPr wrap="square" lIns="0" tIns="0" rIns="0" bIns="0" rtlCol="0" anchor="ctr"/>
+          <a:lstStyle/>
+          <a:p>
+            <a:pPr marL="0" indent="0">
+              <a:buNone/>
+            </a:pPr>
+            <a:r>
+              <a:rPr lang="en-US" sz="1350" b="1" dirty="0">
+                <a:solidFill>
+                  <a:srgbClr val="16314E"/>
+                </a:solidFill>
+                <a:latin typeface="Calibri" pitchFamily="34" charset="0"/>
+                <a:ea typeface="Calibri" pitchFamily="34" charset="-122"/>
+                <a:cs typeface="Calibri" pitchFamily="34" charset="-120"/>
+              </a:rPr>
+              <a:t>Loss loop</a:t>
+            </a:r>
+            <a:endParaRPr lang="en-US" sz="1350" dirty="0"/>
+          </a:p>
+        </p:txBody>
+      </p:sp>
+      <p:sp>
+        <p:nvSpPr>
+          <p:cNvPr id="29" name="Text 27"/>
+          <p:cNvSpPr/>
+          <p:nvPr/>
+        </p:nvSpPr>
+        <p:spPr>
+          <a:xfrm>
+            <a:off x="4663440" y="5303520"/>
+            <a:ext cx="6812280" cy="822960"/>
+          </a:xfrm>
+          <a:prstGeom prst="rect">
+            <a:avLst/>
+          </a:prstGeom>
+          <a:noFill/>
+          <a:ln/>
+        </p:spPr>
+        <p:txBody>
+          <a:bodyPr wrap="square" lIns="0" tIns="0" rIns="0" bIns="0" rtlCol="0" anchor="ctr"/>
+          <a:lstStyle/>
+          <a:p>
+            <a:pPr marL="0" indent="0">
+              <a:lnSpc>
+                <a:spcPct val="106000"/>
+              </a:lnSpc>
+              <a:buNone/>
+            </a:pPr>
+            <a:r>
+              <a:rPr lang="en-US" sz="1150" dirty="0">
+                <a:solidFill>
+                  <a:srgbClr val="5A6675"/>
+                </a:solidFill>
+                <a:latin typeface="Calibri" pitchFamily="34" charset="0"/>
+                <a:ea typeface="Calibri" pitchFamily="34" charset="-122"/>
+                <a:cs typeface="Calibri" pitchFamily="34" charset="-120"/>
+              </a:rPr>
+              <a:t>Reshaped the training objective to concentrate on the rare, operationally critical entities — victim, action, casualties — rather than the easy majority of non-entity tokens.</a:t>
+            </a:r>
+            <a:endParaRPr lang="en-US" sz="1150" dirty="0"/>
+          </a:p>
+        </p:txBody>
+      </p:sp>
+    </p:spTree>
+    <p:extLst>
+      <p:ext uri="{BB962C8B-B14F-4D97-AF65-F5344CB8AC3E}">
+        <p14:creationId xmlns:p14="http://schemas.microsoft.com/office/powerpoint/2010/main" val="1514232302"/>
+      </p:ext>
+    </p:extLst>
+  </p:cSld>
+  <p:clrMapOvr>
+    <a:masterClrMapping/>
+  </p:clrMapOvr>
+</p:sld>
+</file>
+
+<file path=ppt/slides/slide11.xml><?xml version="1.0" encoding="utf-8"?>
+<p:sld xmlns:a="http://schemas.openxmlformats.org/drawingml/2006/main" xmlns:r="http://schemas.openxmlformats.org/officeDocument/2006/relationships" xmlns:p="http://schemas.openxmlformats.org/presentationml/2006/main">
   <p:cSld name="Slide 10">
     <p:bg>
       <p:bgPr>
@@ -1730,7 +2826,7 @@
                 <a:ea typeface="Georgia" pitchFamily="34" charset="-122"/>
                 <a:cs typeface="Georgia" pitchFamily="34" charset="-120"/>
               </a:rPr>
-              <a:t>The grounding-validated 8-entity schema — trained only on what is verifiably on the page</a:t>
+              <a:t>The grounding 8-entity schema — trained only on what is verifiably on the page</a:t>
             </a:r>
             <a:endParaRPr lang="en-US" sz="2900" dirty="0"/>
           </a:p>
@@ -3321,7 +4417,7 @@
 </p:sld>
 </file>
 
-<file path=ppt/slides/slide11.xml><?xml version="1.0" encoding="utf-8"?>
+<file path=ppt/slides/slide12.xml><?xml version="1.0" encoding="utf-8"?>
 <p:sld xmlns:a="http://schemas.openxmlformats.org/drawingml/2006/main" xmlns:r="http://schemas.openxmlformats.org/officeDocument/2006/relationships" xmlns:p="http://schemas.openxmlformats.org/presentationml/2006/main">
   <p:cSld name="Slide 11">
     <p:bg>
@@ -3840,48 +4936,6 @@
       </p:sp>
       <p:sp>
         <p:nvSpPr>
-          <p:cNvPr id="14" name="Text 12"/>
-          <p:cNvSpPr/>
-          <p:nvPr/>
-        </p:nvSpPr>
-        <p:spPr>
-          <a:xfrm>
-            <a:off x="548640" y="5074920"/>
-            <a:ext cx="5486400" cy="1097280"/>
-          </a:xfrm>
-          <a:prstGeom prst="rect">
-            <a:avLst/>
-          </a:prstGeom>
-          <a:noFill/>
-          <a:ln/>
-        </p:spPr>
-        <p:txBody>
-          <a:bodyPr wrap="square" lIns="0" tIns="0" rIns="0" bIns="0" rtlCol="0" anchor="ctr"/>
-          <a:lstStyle/>
-          <a:p>
-            <a:pPr marL="0" indent="0">
-              <a:lnSpc>
-                <a:spcPct val="110000"/>
-              </a:lnSpc>
-              <a:buNone/>
-            </a:pPr>
-            <a:r>
-              <a:rPr lang="en-US" sz="1250" dirty="0">
-                <a:solidFill>
-                  <a:srgbClr val="1D242E"/>
-                </a:solidFill>
-                <a:latin typeface="Calibri" pitchFamily="34" charset="0"/>
-                <a:ea typeface="Calibri" pitchFamily="34" charset="-122"/>
-                <a:cs typeface="Calibri" pitchFamily="34" charset="-120"/>
-              </a:rPr>
-              <a:t>Synthesises ACLED, UCDP and PMVE — compatible at Level 1 for cross-database aggregation — and adds African-specific categories (pastoralist–farmer clashes, cattle raiding) no existing framework carves out.</a:t>
-            </a:r>
-            <a:endParaRPr lang="en-US" sz="1250" dirty="0"/>
-          </a:p>
-        </p:txBody>
-      </p:sp>
-      <p:sp>
-        <p:nvSpPr>
           <p:cNvPr id="15" name="Shape 13"/>
           <p:cNvSpPr/>
           <p:nvPr/>
@@ -3967,130 +5021,6 @@
           </a:graphicData>
         </a:graphic>
       </p:graphicFrame>
-      <p:sp>
-        <p:nvSpPr>
-          <p:cNvPr id="18" name="Text 15"/>
-          <p:cNvSpPr/>
-          <p:nvPr/>
-        </p:nvSpPr>
-        <p:spPr>
-          <a:xfrm>
-            <a:off x="6629400" y="3794760"/>
-            <a:ext cx="4800600" cy="2286000"/>
-          </a:xfrm>
-          <a:prstGeom prst="rect">
-            <a:avLst/>
-          </a:prstGeom>
-          <a:noFill/>
-          <a:ln/>
-        </p:spPr>
-        <p:txBody>
-          <a:bodyPr wrap="square" lIns="0" tIns="0" rIns="0" bIns="0" rtlCol="0" anchor="ctr"/>
-          <a:lstStyle/>
-          <a:p>
-            <a:pPr marL="0" indent="0">
-              <a:lnSpc>
-                <a:spcPct val="106000"/>
-              </a:lnSpc>
-              <a:spcAft>
-                <a:spcPts val="800"/>
-              </a:spcAft>
-              <a:buNone/>
-            </a:pPr>
-            <a:r>
-              <a:rPr lang="en-US" sz="1200" b="1" dirty="0">
-                <a:solidFill>
-                  <a:srgbClr val="16314E"/>
-                </a:solidFill>
-                <a:latin typeface="Calibri" pitchFamily="34" charset="0"/>
-                <a:ea typeface="Calibri" pitchFamily="34" charset="-122"/>
-                <a:cs typeface="Calibri" pitchFamily="34" charset="-120"/>
-              </a:rPr>
-              <a:t>Stratified diversity sampling </a:t>
-            </a:r>
-            <a:r>
-              <a:rPr lang="en-US" sz="1200" dirty="0">
-                <a:solidFill>
-                  <a:srgbClr val="5A6675"/>
-                </a:solidFill>
-                <a:latin typeface="Calibri" pitchFamily="34" charset="0"/>
-                <a:ea typeface="Calibri" pitchFamily="34" charset="-122"/>
-                <a:cs typeface="Calibri" pitchFamily="34" charset="-120"/>
-              </a:rPr>
-              <a:t>— oversample rare entity phrasings; naïve sampling from all 212k records lowered rare-entity F1.</a:t>
-            </a:r>
-            <a:endParaRPr lang="en-US" sz="1200" dirty="0"/>
-          </a:p>
-          <a:p>
-            <a:pPr marL="0" indent="0">
-              <a:lnSpc>
-                <a:spcPct val="106000"/>
-              </a:lnSpc>
-              <a:spcAft>
-                <a:spcPts val="800"/>
-              </a:spcAft>
-              <a:buNone/>
-            </a:pPr>
-            <a:r>
-              <a:rPr lang="en-US" sz="1200" b="1" dirty="0">
-                <a:solidFill>
-                  <a:srgbClr val="16314E"/>
-                </a:solidFill>
-                <a:latin typeface="Calibri" pitchFamily="34" charset="0"/>
-                <a:ea typeface="Calibri" pitchFamily="34" charset="-122"/>
-                <a:cs typeface="Calibri" pitchFamily="34" charset="-120"/>
-              </a:rPr>
-              <a:t>Leakage controls </a:t>
-            </a:r>
-            <a:r>
-              <a:rPr lang="en-US" sz="1200" dirty="0">
-                <a:solidFill>
-                  <a:srgbClr val="5A6675"/>
-                </a:solidFill>
-                <a:latin typeface="Calibri" pitchFamily="34" charset="0"/>
-                <a:ea typeface="Calibri" pitchFamily="34" charset="-122"/>
-                <a:cs typeface="Calibri" pitchFamily="34" charset="-120"/>
-              </a:rPr>
-              <a:t>— article-level 80/20 split, hash deduplication, partitioned augmentation template pools.</a:t>
-            </a:r>
-            <a:endParaRPr lang="en-US" sz="1200" dirty="0"/>
-          </a:p>
-          <a:p>
-            <a:pPr marL="0" indent="0">
-              <a:lnSpc>
-                <a:spcPct val="106000"/>
-              </a:lnSpc>
-              <a:spcAft>
-                <a:spcPts val="800"/>
-              </a:spcAft>
-              <a:buNone/>
-            </a:pPr>
-            <a:r>
-              <a:rPr lang="en-US" sz="1200" b="1" dirty="0">
-                <a:solidFill>
-                  <a:srgbClr val="16314E"/>
-                </a:solidFill>
-                <a:latin typeface="Calibri" pitchFamily="34" charset="0"/>
-                <a:ea typeface="Calibri" pitchFamily="34" charset="-122"/>
-                <a:cs typeface="Calibri" pitchFamily="34" charset="-120"/>
-              </a:rPr>
-              <a:t>The imbalance fact </a:t>
-            </a:r>
-            <a:r>
-              <a:rPr lang="en-US" sz="1200" dirty="0">
-                <a:solidFill>
-                  <a:srgbClr val="5A6675"/>
-                </a:solidFill>
-                <a:latin typeface="Calibri" pitchFamily="34" charset="0"/>
-                <a:ea typeface="Calibri" pitchFamily="34" charset="-122"/>
-                <a:cs typeface="Calibri" pitchFamily="34" charset="-120"/>
-              </a:rPr>
-              <a:t>— ~78% of tokens are O; VICTIM + ACTION + CASUALTIES share ~3%. The whole training methodology exists because of this row.</a:t>
-            </a:r>
-            <a:endParaRPr lang="en-US" sz="1200" dirty="0"/>
-          </a:p>
-        </p:txBody>
-      </p:sp>
     </p:spTree>
     <p:extLst>
       <p:ext uri="{BB962C8B-B14F-4D97-AF65-F5344CB8AC3E}">
@@ -4104,7 +5034,7 @@
 </p:sld>
 </file>
 
-<file path=ppt/slides/slide12.xml><?xml version="1.0" encoding="utf-8"?>
+<file path=ppt/slides/slide13.xml><?xml version="1.0" encoding="utf-8"?>
 <p:sld xmlns:a="http://schemas.openxmlformats.org/drawingml/2006/main" xmlns:r="http://schemas.openxmlformats.org/officeDocument/2006/relationships" xmlns:p="http://schemas.openxmlformats.org/presentationml/2006/main">
   <p:cSld name="Slide 12">
     <p:bg>
@@ -4279,7 +5209,7 @@
                 <a:ea typeface="Georgia" pitchFamily="34" charset="-122"/>
                 <a:cs typeface="Georgia" pitchFamily="34" charset="-120"/>
               </a:rPr>
-              <a:t>The training recipe: focal loss × class weights — two complementary rebalancers</a:t>
+              <a:t>The training recipe: focal loss × class weights</a:t>
             </a:r>
             <a:endParaRPr lang="en-US" sz="2900" dirty="0"/>
           </a:p>
@@ -4435,7 +5365,7 @@
                 <a:ea typeface="Calibri" pitchFamily="34" charset="-122"/>
                 <a:cs typeface="Calibri" pitchFamily="34" charset="-120"/>
               </a:rPr>
-              <a:t>Inverse-frequency class weights</a:t>
+              <a:t>Class weights</a:t>
             </a:r>
             <a:endParaRPr lang="en-US" sz="1350" dirty="0"/>
           </a:p>
@@ -4477,7 +5407,7 @@
                 <a:ea typeface="Calibri" pitchFamily="34" charset="-122"/>
                 <a:cs typeface="Calibri" pitchFamily="34" charset="-120"/>
               </a:rPr>
-              <a:t>Every token's loss × a per-class weight, clipped at 10. Rebalances ACROSS classes: a VICTIM token becomes ~130× more loss-impactful than an O token. Like giving the village of 5 voters the same voice as the city of 7,800.</a:t>
+              <a:t>Rebalances ACROSS classes</a:t>
             </a:r>
             <a:endParaRPr lang="en-US" sz="1080" dirty="0"/>
           </a:p>
@@ -4675,7 +5605,7 @@
                 <a:ea typeface="Calibri" pitchFamily="34" charset="-122"/>
                 <a:cs typeface="Calibri" pitchFamily="34" charset="-120"/>
               </a:rPr>
-              <a:t>Multiplies each token's loss by (1 − pᵧ)². Rebalances WITHIN classes by difficulty: a token the model already gets 99% right is dimmed to ~0.0001×; a 50% token keeps 0.25×. The optimiser spends its capacity on the strugglers.</a:t>
+              <a:t>Multiplies each token's loss by (1 − pᵧ)². Rebalances WITHIN classes by difficulty</a:t>
             </a:r>
             <a:endParaRPr lang="en-US" sz="1080" dirty="0"/>
           </a:p>
@@ -4873,7 +5803,7 @@
                 <a:ea typeface="Calibri" pitchFamily="34" charset="-122"/>
                 <a:cs typeface="Calibri" pitchFamily="34" charset="-120"/>
               </a:rPr>
-              <a:t>Weights alone: VICTIM 0.776. Focal alone: 0.792. Combined: 0.817 — more than either, and no entity is hurt. The two attack different aspects of the imbalance; the ablation (§6.6) is the evidence.</a:t>
+              <a:t>The two attack different aspects of the imbalance</a:t>
             </a:r>
             <a:endParaRPr lang="en-US" sz="1080" dirty="0"/>
           </a:p>
@@ -5015,48 +5945,6 @@
               <a:t>  </a:t>
             </a:r>
             <a:endParaRPr lang="en-US" sz="1500" dirty="0"/>
-          </a:p>
-        </p:txBody>
-      </p:sp>
-      <p:sp>
-        <p:nvSpPr>
-          <p:cNvPr id="27" name="Text 22"/>
-          <p:cNvSpPr/>
-          <p:nvPr/>
-        </p:nvSpPr>
-        <p:spPr>
-          <a:xfrm>
-            <a:off x="548640" y="5742432"/>
-            <a:ext cx="11091672" cy="777240"/>
-          </a:xfrm>
-          <a:prstGeom prst="rect">
-            <a:avLst/>
-          </a:prstGeom>
-          <a:noFill/>
-          <a:ln/>
-        </p:spPr>
-        <p:txBody>
-          <a:bodyPr wrap="square" lIns="0" tIns="0" rIns="0" bIns="0" rtlCol="0" anchor="ctr"/>
-          <a:lstStyle/>
-          <a:p>
-            <a:pPr marL="0" indent="0">
-              <a:lnSpc>
-                <a:spcPct val="108000"/>
-              </a:lnSpc>
-              <a:buNone/>
-            </a:pPr>
-            <a:r>
-              <a:rPr lang="en-US" sz="1150" dirty="0">
-                <a:solidFill>
-                  <a:srgbClr val="5A6675"/>
-                </a:solidFill>
-                <a:latin typeface="Calibri" pitchFamily="34" charset="0"/>
-                <a:ea typeface="Calibri" pitchFamily="34" charset="-122"/>
-                <a:cs typeface="Calibri" pitchFamily="34" charset="-120"/>
-              </a:rPr>
-              <a:t>bert-base-cased (110M) · AdamW, lr 5×10⁻⁵, weight decay 0.01 · warmup 0.1 · grad-clip 1.0 · batch 16 · max seq 128 · early stopping on val loss (best: epoch 2) · seeds 42 / 17 / 91 (±0.4 macro F1 run-to-run). Weight cap = 10 and γ = 2 are empirical: uncapped weights blew up early-epoch gradients; γ = 3 destabilised training.</a:t>
-            </a:r>
-            <a:endParaRPr lang="en-US" sz="1150" dirty="0"/>
           </a:p>
         </p:txBody>
       </p:sp>
@@ -5073,7 +5961,7 @@
 </p:sld>
 </file>
 
-<file path=ppt/slides/slide13.xml><?xml version="1.0" encoding="utf-8"?>
+<file path=ppt/slides/slide14.xml><?xml version="1.0" encoding="utf-8"?>
 <p:sld xmlns:a="http://schemas.openxmlformats.org/drawingml/2006/main" xmlns:r="http://schemas.openxmlformats.org/officeDocument/2006/relationships" xmlns:p="http://schemas.openxmlformats.org/presentationml/2006/main">
   <p:cSld name="Slide 13">
     <p:bg>
@@ -6271,7 +7159,7 @@
 </p:sld>
 </file>
 
-<file path=ppt/slides/slide14.xml><?xml version="1.0" encoding="utf-8"?>
+<file path=ppt/slides/slide15.xml><?xml version="1.0" encoding="utf-8"?>
 <p:sld xmlns:a="http://schemas.openxmlformats.org/drawingml/2006/main" xmlns:r="http://schemas.openxmlformats.org/officeDocument/2006/relationships" xmlns:p="http://schemas.openxmlformats.org/presentationml/2006/main">
   <p:cSld name="Slide 14">
     <p:bg>
@@ -6446,7 +7334,7 @@
                 <a:ea typeface="Georgia" pitchFamily="34" charset="-122"/>
                 <a:cs typeface="Georgia" pitchFamily="34" charset="-120"/>
               </a:rPr>
-              <a:t>The deployable platform — the rest of the car around the engine</a:t>
+              <a:t>The deployable platform</a:t>
             </a:r>
             <a:endParaRPr lang="en-US" sz="2900" dirty="0"/>
           </a:p>
@@ -7142,121 +8030,6 @@
               <a:t>Add a new armed group via KB admin when a theatre opens</a:t>
             </a:r>
             <a:endParaRPr lang="en-US" sz="1150" dirty="0"/>
-          </a:p>
-        </p:txBody>
-      </p:sp>
-      <p:sp>
-        <p:nvSpPr>
-          <p:cNvPr id="21" name="Shape 19"/>
-          <p:cNvSpPr/>
-          <p:nvPr/>
-        </p:nvSpPr>
-        <p:spPr>
-          <a:xfrm>
-            <a:off x="6812280" y="4800600"/>
-            <a:ext cx="4828032" cy="1325880"/>
-          </a:xfrm>
-          <a:prstGeom prst="rect">
-            <a:avLst/>
-          </a:prstGeom>
-          <a:solidFill>
-            <a:srgbClr val="16314E"/>
-          </a:solidFill>
-          <a:ln/>
-          <a:effectLst>
-            <a:outerShdw blurRad="88900" dist="38100" dir="8100000" algn="bl" rotWithShape="0">
-              <a:srgbClr val="1B2A3A">
-                <a:alpha val="16000"/>
-              </a:srgbClr>
-            </a:outerShdw>
-          </a:effectLst>
-        </p:spPr>
-        <p:txBody>
-          <a:bodyPr/>
-          <a:lstStyle/>
-          <a:p>
-            <a:endParaRPr lang="en-ET"/>
-          </a:p>
-        </p:txBody>
-      </p:sp>
-      <p:sp>
-        <p:nvSpPr>
-          <p:cNvPr id="22" name="Text 20"/>
-          <p:cNvSpPr/>
-          <p:nvPr/>
-        </p:nvSpPr>
-        <p:spPr>
-          <a:xfrm>
-            <a:off x="7040880" y="4956048"/>
-            <a:ext cx="4389120" cy="365760"/>
-          </a:xfrm>
-          <a:prstGeom prst="rect">
-            <a:avLst/>
-          </a:prstGeom>
-          <a:noFill/>
-          <a:ln/>
-        </p:spPr>
-        <p:txBody>
-          <a:bodyPr wrap="square" lIns="0" tIns="0" rIns="0" bIns="0" rtlCol="0" anchor="ctr"/>
-          <a:lstStyle/>
-          <a:p>
-            <a:pPr marL="0" indent="0">
-              <a:buNone/>
-            </a:pPr>
-            <a:r>
-              <a:rPr lang="en-US" sz="1600" b="1" dirty="0">
-                <a:solidFill>
-                  <a:srgbClr val="E9C46A"/>
-                </a:solidFill>
-                <a:latin typeface="Consolas" pitchFamily="34" charset="0"/>
-                <a:ea typeface="Consolas" pitchFamily="34" charset="-122"/>
-                <a:cs typeface="Consolas" pitchFamily="34" charset="-120"/>
-              </a:rPr>
-              <a:t>docker-compose up</a:t>
-            </a:r>
-            <a:endParaRPr lang="en-US" sz="1600" dirty="0"/>
-          </a:p>
-        </p:txBody>
-      </p:sp>
-      <p:sp>
-        <p:nvSpPr>
-          <p:cNvPr id="23" name="Text 21"/>
-          <p:cNvSpPr/>
-          <p:nvPr/>
-        </p:nvSpPr>
-        <p:spPr>
-          <a:xfrm>
-            <a:off x="7040880" y="5349240"/>
-            <a:ext cx="4434840" cy="713232"/>
-          </a:xfrm>
-          <a:prstGeom prst="rect">
-            <a:avLst/>
-          </a:prstGeom>
-          <a:noFill/>
-          <a:ln/>
-        </p:spPr>
-        <p:txBody>
-          <a:bodyPr wrap="square" lIns="0" tIns="0" rIns="0" bIns="0" rtlCol="0" anchor="ctr"/>
-          <a:lstStyle/>
-          <a:p>
-            <a:pPr marL="0" indent="0">
-              <a:lnSpc>
-                <a:spcPct val="105000"/>
-              </a:lnSpc>
-              <a:buNone/>
-            </a:pPr>
-            <a:r>
-              <a:rPr lang="en-US" sz="1100" dirty="0">
-                <a:solidFill>
-                  <a:srgbClr val="DCE7F2"/>
-                </a:solidFill>
-                <a:latin typeface="Calibri" pitchFamily="34" charset="0"/>
-                <a:ea typeface="Calibri" pitchFamily="34" charset="-122"/>
-                <a:cs typeface="Calibri" pitchFamily="34" charset="-120"/>
-              </a:rPr>
-              <a:t>One command · 3 services · ~30 s startup · ~5 GB disk · ~3 GB RAM. Anyone with the repo can reconstitute the system on commodity hardware.</a:t>
-            </a:r>
-            <a:endParaRPr lang="en-US" sz="1100" dirty="0"/>
           </a:p>
         </p:txBody>
       </p:sp>
@@ -7273,7 +8046,7 @@
 </p:sld>
 </file>
 
-<file path=ppt/slides/slide15.xml><?xml version="1.0" encoding="utf-8"?>
+<file path=ppt/slides/slide16.xml><?xml version="1.0" encoding="utf-8"?>
 <p:sld xmlns:a="http://schemas.openxmlformats.org/drawingml/2006/main" xmlns:r="http://schemas.openxmlformats.org/officeDocument/2006/relationships" xmlns:p="http://schemas.openxmlformats.org/presentationml/2006/main">
   <p:cSld name="Slide 15">
     <p:bg>
@@ -9390,7 +10163,7 @@
 </p:sld>
 </file>
 
-<file path=ppt/slides/slide16.xml><?xml version="1.0" encoding="utf-8"?>
+<file path=ppt/slides/slide17.xml><?xml version="1.0" encoding="utf-8"?>
 <p:sld xmlns:a="http://schemas.openxmlformats.org/drawingml/2006/main" xmlns:r="http://schemas.openxmlformats.org/officeDocument/2006/relationships" xmlns:p="http://schemas.openxmlformats.org/presentationml/2006/main">
   <p:cSld name="Slide 16">
     <p:bg>
@@ -10492,7 +11265,7 @@
 </p:sld>
 </file>
 
-<file path=ppt/slides/slide17.xml><?xml version="1.0" encoding="utf-8"?>
+<file path=ppt/slides/slide18.xml><?xml version="1.0" encoding="utf-8"?>
 <p:sld xmlns:a="http://schemas.openxmlformats.org/drawingml/2006/main" xmlns:r="http://schemas.openxmlformats.org/officeDocument/2006/relationships" xmlns:p="http://schemas.openxmlformats.org/presentationml/2006/main">
   <p:cSld name="Slide 17">
     <p:bg>
@@ -10728,235 +11501,6 @@
           </a:p>
         </p:txBody>
       </p:sp>
-      <p:sp>
-        <p:nvSpPr>
-          <p:cNvPr id="8" name="Shape 5"/>
-          <p:cNvSpPr/>
-          <p:nvPr/>
-        </p:nvSpPr>
-        <p:spPr>
-          <a:xfrm>
-            <a:off x="7589520" y="1783080"/>
-            <a:ext cx="4050792" cy="4297680"/>
-          </a:xfrm>
-          <a:prstGeom prst="rect">
-            <a:avLst/>
-          </a:prstGeom>
-          <a:solidFill>
-            <a:srgbClr val="F2F5F8"/>
-          </a:solidFill>
-          <a:ln w="12700">
-            <a:solidFill>
-              <a:srgbClr val="C9D3DE"/>
-            </a:solidFill>
-            <a:prstDash val="solid"/>
-          </a:ln>
-        </p:spPr>
-        <p:txBody>
-          <a:bodyPr/>
-          <a:lstStyle/>
-          <a:p>
-            <a:endParaRPr lang="en-ET"/>
-          </a:p>
-        </p:txBody>
-      </p:sp>
-      <p:sp>
-        <p:nvSpPr>
-          <p:cNvPr id="9" name="Text 6"/>
-          <p:cNvSpPr/>
-          <p:nvPr/>
-        </p:nvSpPr>
-        <p:spPr>
-          <a:xfrm>
-            <a:off x="7818120" y="1938528"/>
-            <a:ext cx="3657600" cy="274320"/>
-          </a:xfrm>
-          <a:prstGeom prst="rect">
-            <a:avLst/>
-          </a:prstGeom>
-          <a:noFill/>
-          <a:ln/>
-        </p:spPr>
-        <p:txBody>
-          <a:bodyPr wrap="square" lIns="0" tIns="0" rIns="0" bIns="0" rtlCol="0" anchor="ctr"/>
-          <a:lstStyle/>
-          <a:p>
-            <a:pPr marL="0" indent="0">
-              <a:buNone/>
-            </a:pPr>
-            <a:r>
-              <a:rPr lang="en-US" sz="1100" b="1" kern="0" spc="200" dirty="0">
-                <a:solidFill>
-                  <a:srgbClr val="1F7A6F"/>
-                </a:solidFill>
-                <a:latin typeface="Calibri" pitchFamily="34" charset="0"/>
-                <a:ea typeface="Calibri" pitchFamily="34" charset="-122"/>
-                <a:cs typeface="Calibri" pitchFamily="34" charset="-120"/>
-              </a:rPr>
-              <a:t>HOW TO READ IT</a:t>
-            </a:r>
-            <a:endParaRPr lang="en-US" sz="1100" dirty="0"/>
-          </a:p>
-        </p:txBody>
-      </p:sp>
-      <p:sp>
-        <p:nvSpPr>
-          <p:cNvPr id="10" name="Text 7"/>
-          <p:cNvSpPr/>
-          <p:nvPr/>
-        </p:nvSpPr>
-        <p:spPr>
-          <a:xfrm>
-            <a:off x="7818120" y="2286000"/>
-            <a:ext cx="3611880" cy="3657600"/>
-          </a:xfrm>
-          <a:prstGeom prst="rect">
-            <a:avLst/>
-          </a:prstGeom>
-          <a:noFill/>
-          <a:ln/>
-        </p:spPr>
-        <p:txBody>
-          <a:bodyPr wrap="square" lIns="0" tIns="0" rIns="0" bIns="0" rtlCol="0" anchor="ctr"/>
-          <a:lstStyle/>
-          <a:p>
-            <a:pPr marL="0" indent="0">
-              <a:lnSpc>
-                <a:spcPct val="106000"/>
-              </a:lnSpc>
-              <a:spcAft>
-                <a:spcPts val="900"/>
-              </a:spcAft>
-              <a:buNone/>
-            </a:pPr>
-            <a:r>
-              <a:rPr lang="en-US" sz="1150" b="1" dirty="0">
-                <a:solidFill>
-                  <a:srgbClr val="16314E"/>
-                </a:solidFill>
-                <a:latin typeface="Calibri" pitchFamily="34" charset="0"/>
-                <a:ea typeface="Calibri" pitchFamily="34" charset="-122"/>
-                <a:cs typeface="Calibri" pitchFamily="34" charset="-120"/>
-              </a:rPr>
-              <a:t>Dates &amp; cities are essentially solved </a:t>
-            </a:r>
-            <a:r>
-              <a:rPr lang="en-US" sz="1150" dirty="0">
-                <a:solidFill>
-                  <a:srgbClr val="5A6675"/>
-                </a:solidFill>
-                <a:latin typeface="Calibri" pitchFamily="34" charset="0"/>
-                <a:ea typeface="Calibri" pitchFamily="34" charset="-122"/>
-                <a:cs typeface="Calibri" pitchFamily="34" charset="-120"/>
-              </a:rPr>
-              <a:t>— trust the output, skim only.</a:t>
-            </a:r>
-            <a:endParaRPr lang="en-US" sz="1150" dirty="0"/>
-          </a:p>
-          <a:p>
-            <a:pPr marL="0" indent="0">
-              <a:lnSpc>
-                <a:spcPct val="106000"/>
-              </a:lnSpc>
-              <a:spcAft>
-                <a:spcPts val="900"/>
-              </a:spcAft>
-              <a:buNone/>
-            </a:pPr>
-            <a:r>
-              <a:rPr lang="en-US" sz="1150" b="1" dirty="0">
-                <a:solidFill>
-                  <a:srgbClr val="16314E"/>
-                </a:solidFill>
-                <a:latin typeface="Calibri" pitchFamily="34" charset="0"/>
-                <a:ea typeface="Calibri" pitchFamily="34" charset="-122"/>
-                <a:cs typeface="Calibri" pitchFamily="34" charset="-120"/>
-              </a:rPr>
-              <a:t>Rare tier holds 0.82–0.89 </a:t>
-            </a:r>
-            <a:r>
-              <a:rPr lang="en-US" sz="1150" dirty="0">
-                <a:solidFill>
-                  <a:srgbClr val="5A6675"/>
-                </a:solidFill>
-                <a:latin typeface="Calibri" pitchFamily="34" charset="0"/>
-                <a:ea typeface="Calibri" pitchFamily="34" charset="-122"/>
-                <a:cs typeface="Calibri" pitchFamily="34" charset="-120"/>
-              </a:rPr>
-              <a:t>— despite 5,492 VICTIM vs 47,612 ACTOR spans of support. This is what makes review-vs-rewrite save time.</a:t>
-            </a:r>
-            <a:endParaRPr lang="en-US" sz="1150" dirty="0"/>
-          </a:p>
-          <a:p>
-            <a:pPr marL="0" indent="0">
-              <a:lnSpc>
-                <a:spcPct val="106000"/>
-              </a:lnSpc>
-              <a:spcAft>
-                <a:spcPts val="900"/>
-              </a:spcAft>
-              <a:buNone/>
-            </a:pPr>
-            <a:r>
-              <a:rPr lang="en-US" sz="1150" b="1" dirty="0">
-                <a:solidFill>
-                  <a:srgbClr val="16314E"/>
-                </a:solidFill>
-                <a:latin typeface="Calibri" pitchFamily="34" charset="0"/>
-                <a:ea typeface="Calibri" pitchFamily="34" charset="-122"/>
-                <a:cs typeface="Calibri" pitchFamily="34" charset="-120"/>
-              </a:rPr>
-              <a:t>DISTRICT is the known weak spot </a:t>
-            </a:r>
-            <a:r>
-              <a:rPr lang="en-US" sz="1150" dirty="0">
-                <a:solidFill>
-                  <a:srgbClr val="5A6675"/>
-                </a:solidFill>
-                <a:latin typeface="Calibri" pitchFamily="34" charset="0"/>
-                <a:ea typeface="Calibri" pitchFamily="34" charset="-122"/>
-                <a:cs typeface="Calibri" pitchFamily="34" charset="-120"/>
-              </a:rPr>
-              <a:t>— African districts share names with their city or region ("Goma"); the model defaults to CITY.</a:t>
-            </a:r>
-            <a:endParaRPr lang="en-US" sz="1150" dirty="0"/>
-          </a:p>
-          <a:p>
-            <a:pPr marL="0" indent="0">
-              <a:lnSpc>
-                <a:spcPct val="106000"/>
-              </a:lnSpc>
-              <a:spcAft>
-                <a:spcPts val="900"/>
-              </a:spcAft>
-              <a:buNone/>
-            </a:pPr>
-            <a:r>
-              <a:rPr lang="en-US" sz="1150" b="1" dirty="0">
-                <a:solidFill>
-                  <a:srgbClr val="16314E"/>
-                </a:solidFill>
-                <a:latin typeface="Calibri" pitchFamily="34" charset="0"/>
-                <a:ea typeface="Calibri" pitchFamily="34" charset="-122"/>
-                <a:cs typeface="Calibri" pitchFamily="34" charset="-120"/>
-              </a:rPr>
-              <a:t>Precision &gt; recall on every row </a:t>
-            </a:r>
-            <a:r>
-              <a:rPr lang="en-US" sz="1150" dirty="0">
-                <a:solidFill>
-                  <a:srgbClr val="5A6675"/>
-                </a:solidFill>
-                <a:latin typeface="Calibri" pitchFamily="34" charset="0"/>
-                <a:ea typeface="Calibri" pitchFamily="34" charset="-122"/>
-                <a:cs typeface="Calibri" pitchFamily="34" charset="-120"/>
-              </a:rPr>
-              <a:t>— uncertain tokens default to O: fewer false alarms, occasionally a missed entity to add. The right trade-off for analyst review.</a:t>
-            </a:r>
-            <a:endParaRPr lang="en-US" sz="1150" dirty="0"/>
-          </a:p>
-        </p:txBody>
-      </p:sp>
     </p:spTree>
     <p:extLst>
       <p:ext uri="{BB962C8B-B14F-4D97-AF65-F5344CB8AC3E}">
@@ -10970,7 +11514,7 @@
 </p:sld>
 </file>
 
-<file path=ppt/slides/slide18.xml><?xml version="1.0" encoding="utf-8"?>
+<file path=ppt/slides/slide19.xml><?xml version="1.0" encoding="utf-8"?>
 <p:sld xmlns:a="http://schemas.openxmlformats.org/drawingml/2006/main" xmlns:r="http://schemas.openxmlformats.org/officeDocument/2006/relationships" xmlns:p="http://schemas.openxmlformats.org/presentationml/2006/main">
   <p:cSld name="Slide 21">
     <p:bg>
@@ -11658,7 +12202,7 @@
                 <a:ea typeface="Calibri" pitchFamily="34" charset="-122"/>
                 <a:cs typeface="Calibri" pitchFamily="34" charset="-120"/>
               </a:rPr>
-              <a:t>Two-stage learned hierarchical classifier once Level-3 labelled data exists (future work #2)</a:t>
+              <a:t>Two-stage learned hierarchical classifier once Level-3 labelled data exists</a:t>
             </a:r>
             <a:endParaRPr lang="en-US" sz="1080" dirty="0"/>
           </a:p>
@@ -11864,7 +12408,7 @@
                 <a:ea typeface="Calibri" pitchFamily="34" charset="-122"/>
                 <a:cs typeface="Calibri" pitchFamily="34" charset="-120"/>
               </a:rPr>
-              <a:t>Part-time domain-expert curation (~1 day/week) through the KB admin UI — recommendation 2, §7.4</a:t>
+              <a:t>Part-time domain-expert curation (~1 day/week) through the KB admin UI</a:t>
             </a:r>
             <a:endParaRPr lang="en-US" sz="1080" dirty="0"/>
           </a:p>
@@ -12111,1209 +12655,6 @@
     <p:extLst>
       <p:ext uri="{BB962C8B-B14F-4D97-AF65-F5344CB8AC3E}">
         <p14:creationId xmlns:p14="http://schemas.microsoft.com/office/powerpoint/2010/main" val="1829486652"/>
-      </p:ext>
-    </p:extLst>
-  </p:cSld>
-  <p:clrMapOvr>
-    <a:masterClrMapping/>
-  </p:clrMapOvr>
-</p:sld>
-</file>
-
-<file path=ppt/slides/slide19.xml><?xml version="1.0" encoding="utf-8"?>
-<p:sld xmlns:a="http://schemas.openxmlformats.org/drawingml/2006/main" xmlns:r="http://schemas.openxmlformats.org/officeDocument/2006/relationships" xmlns:p="http://schemas.openxmlformats.org/presentationml/2006/main">
-  <p:cSld name="Slide 22">
-    <p:bg>
-      <p:bgPr>
-        <a:solidFill>
-          <a:srgbClr val="FFFFFF"/>
-        </a:solidFill>
-        <a:effectLst/>
-      </p:bgPr>
-    </p:bg>
-    <p:spTree>
-      <p:nvGrpSpPr>
-        <p:cNvPr id="1" name=""/>
-        <p:cNvGrpSpPr/>
-        <p:nvPr/>
-      </p:nvGrpSpPr>
-      <p:grpSpPr>
-        <a:xfrm>
-          <a:off x="0" y="0"/>
-          <a:ext cx="0" cy="0"/>
-          <a:chOff x="0" y="0"/>
-          <a:chExt cx="0" cy="0"/>
-        </a:xfrm>
-      </p:grpSpPr>
-      <p:sp>
-        <p:nvSpPr>
-          <p:cNvPr id="2" name="Text 0"/>
-          <p:cNvSpPr/>
-          <p:nvPr/>
-        </p:nvSpPr>
-        <p:spPr>
-          <a:xfrm>
-            <a:off x="548640" y="6473952"/>
-            <a:ext cx="7315200" cy="274320"/>
-          </a:xfrm>
-          <a:prstGeom prst="rect">
-            <a:avLst/>
-          </a:prstGeom>
-          <a:noFill/>
-          <a:ln/>
-        </p:spPr>
-        <p:txBody>
-          <a:bodyPr wrap="square" lIns="0" tIns="0" rIns="0" bIns="0" rtlCol="0" anchor="ctr"/>
-          <a:lstStyle/>
-          <a:p>
-            <a:pPr marL="0" indent="0">
-              <a:buNone/>
-            </a:pPr>
-            <a:r>
-              <a:rPr lang="en-US" sz="900" dirty="0">
-                <a:solidFill>
-                  <a:srgbClr val="5A6675"/>
-                </a:solidFill>
-                <a:latin typeface="Calibri" pitchFamily="34" charset="0"/>
-                <a:ea typeface="Calibri" pitchFamily="34" charset="-122"/>
-                <a:cs typeface="Calibri" pitchFamily="34" charset="-120"/>
-              </a:rPr>
-              <a:t>VioNER · Extraction of Violent Events</a:t>
-            </a:r>
-            <a:endParaRPr lang="en-US" sz="900" dirty="0"/>
-          </a:p>
-        </p:txBody>
-      </p:sp>
-      <p:sp>
-        <p:nvSpPr>
-          <p:cNvPr id="3" name="Text 1"/>
-          <p:cNvSpPr/>
-          <p:nvPr/>
-        </p:nvSpPr>
-        <p:spPr>
-          <a:xfrm>
-            <a:off x="11185855" y="6473952"/>
-            <a:ext cx="502920" cy="274320"/>
-          </a:xfrm>
-          <a:prstGeom prst="rect">
-            <a:avLst/>
-          </a:prstGeom>
-          <a:noFill/>
-          <a:ln/>
-        </p:spPr>
-        <p:txBody>
-          <a:bodyPr wrap="square" lIns="0" tIns="0" rIns="0" bIns="0" rtlCol="0" anchor="ctr"/>
-          <a:lstStyle/>
-          <a:p>
-            <a:pPr marL="0" indent="0" algn="r">
-              <a:buNone/>
-            </a:pPr>
-            <a:r>
-              <a:rPr lang="en-US" sz="900" dirty="0">
-                <a:solidFill>
-                  <a:srgbClr val="5A6675"/>
-                </a:solidFill>
-                <a:latin typeface="Calibri" pitchFamily="34" charset="0"/>
-                <a:ea typeface="Calibri" pitchFamily="34" charset="-122"/>
-                <a:cs typeface="Calibri" pitchFamily="34" charset="-120"/>
-              </a:rPr>
-              <a:t>22</a:t>
-            </a:r>
-            <a:endParaRPr lang="en-US" sz="900" dirty="0"/>
-          </a:p>
-        </p:txBody>
-      </p:sp>
-      <p:sp>
-        <p:nvSpPr>
-          <p:cNvPr id="4" name="Shape 2"/>
-          <p:cNvSpPr/>
-          <p:nvPr/>
-        </p:nvSpPr>
-        <p:spPr>
-          <a:xfrm>
-            <a:off x="0" y="0"/>
-            <a:ext cx="12191695" cy="128016"/>
-          </a:xfrm>
-          <a:prstGeom prst="rect">
-            <a:avLst/>
-          </a:prstGeom>
-          <a:solidFill>
-            <a:srgbClr val="2A9D8F"/>
-          </a:solidFill>
-          <a:ln/>
-        </p:spPr>
-        <p:txBody>
-          <a:bodyPr/>
-          <a:lstStyle/>
-          <a:p>
-            <a:endParaRPr lang="en-ET"/>
-          </a:p>
-        </p:txBody>
-      </p:sp>
-      <p:sp>
-        <p:nvSpPr>
-          <p:cNvPr id="5" name="Text 3"/>
-          <p:cNvSpPr/>
-          <p:nvPr/>
-        </p:nvSpPr>
-        <p:spPr>
-          <a:xfrm>
-            <a:off x="548640" y="438912"/>
-            <a:ext cx="10972800" cy="274320"/>
-          </a:xfrm>
-          <a:prstGeom prst="rect">
-            <a:avLst/>
-          </a:prstGeom>
-          <a:noFill/>
-          <a:ln/>
-        </p:spPr>
-        <p:txBody>
-          <a:bodyPr wrap="square" lIns="0" tIns="0" rIns="0" bIns="0" rtlCol="0" anchor="ctr"/>
-          <a:lstStyle/>
-          <a:p>
-            <a:pPr marL="0" indent="0">
-              <a:buNone/>
-            </a:pPr>
-            <a:r>
-              <a:rPr lang="en-US" sz="1200" b="1" kern="0" spc="300" dirty="0">
-                <a:solidFill>
-                  <a:srgbClr val="B07A1E"/>
-                </a:solidFill>
-                <a:latin typeface="Calibri" pitchFamily="34" charset="0"/>
-                <a:ea typeface="Calibri" pitchFamily="34" charset="-122"/>
-                <a:cs typeface="Calibri" pitchFamily="34" charset="-120"/>
-              </a:rPr>
-              <a:t>ACT 4 · THE VERDICT</a:t>
-            </a:r>
-            <a:endParaRPr lang="en-US" sz="1200" dirty="0"/>
-          </a:p>
-        </p:txBody>
-      </p:sp>
-      <p:sp>
-        <p:nvSpPr>
-          <p:cNvPr id="6" name="Text 4"/>
-          <p:cNvSpPr/>
-          <p:nvPr/>
-        </p:nvSpPr>
-        <p:spPr>
-          <a:xfrm>
-            <a:off x="548640" y="731520"/>
-            <a:ext cx="11064240" cy="640080"/>
-          </a:xfrm>
-          <a:prstGeom prst="rect">
-            <a:avLst/>
-          </a:prstGeom>
-          <a:noFill/>
-          <a:ln/>
-        </p:spPr>
-        <p:txBody>
-          <a:bodyPr wrap="square" lIns="0" tIns="0" rIns="0" bIns="0" rtlCol="0" anchor="ctr"/>
-          <a:lstStyle/>
-          <a:p>
-            <a:pPr marL="0" indent="0">
-              <a:buNone/>
-            </a:pPr>
-            <a:r>
-              <a:rPr lang="en-US" sz="3000" b="1" dirty="0">
-                <a:solidFill>
-                  <a:srgbClr val="16314E"/>
-                </a:solidFill>
-                <a:latin typeface="Georgia" pitchFamily="34" charset="0"/>
-                <a:ea typeface="Georgia" pitchFamily="34" charset="-122"/>
-                <a:cs typeface="Georgia" pitchFamily="34" charset="-120"/>
-              </a:rPr>
-              <a:t>Five contributions, one integrated artefact</a:t>
-            </a:r>
-            <a:endParaRPr lang="en-US" sz="3000" dirty="0"/>
-          </a:p>
-        </p:txBody>
-      </p:sp>
-      <p:sp>
-        <p:nvSpPr>
-          <p:cNvPr id="7" name="Shape 5"/>
-          <p:cNvSpPr/>
-          <p:nvPr/>
-        </p:nvSpPr>
-        <p:spPr>
-          <a:xfrm>
-            <a:off x="548640" y="1691640"/>
-            <a:ext cx="6903720" cy="713232"/>
-          </a:xfrm>
-          <a:prstGeom prst="rect">
-            <a:avLst/>
-          </a:prstGeom>
-          <a:solidFill>
-            <a:srgbClr val="F2F5F8"/>
-          </a:solidFill>
-          <a:ln/>
-        </p:spPr>
-        <p:txBody>
-          <a:bodyPr/>
-          <a:lstStyle/>
-          <a:p>
-            <a:endParaRPr lang="en-ET"/>
-          </a:p>
-        </p:txBody>
-      </p:sp>
-      <p:sp>
-        <p:nvSpPr>
-          <p:cNvPr id="8" name="Shape 6"/>
-          <p:cNvSpPr/>
-          <p:nvPr/>
-        </p:nvSpPr>
-        <p:spPr>
-          <a:xfrm>
-            <a:off x="548640" y="1691640"/>
-            <a:ext cx="73152" cy="713232"/>
-          </a:xfrm>
-          <a:prstGeom prst="rect">
-            <a:avLst/>
-          </a:prstGeom>
-          <a:solidFill>
-            <a:srgbClr val="2A9D8F"/>
-          </a:solidFill>
-          <a:ln/>
-        </p:spPr>
-        <p:txBody>
-          <a:bodyPr/>
-          <a:lstStyle/>
-          <a:p>
-            <a:endParaRPr lang="en-ET"/>
-          </a:p>
-        </p:txBody>
-      </p:sp>
-      <p:sp>
-        <p:nvSpPr>
-          <p:cNvPr id="9" name="Text 7"/>
-          <p:cNvSpPr/>
-          <p:nvPr/>
-        </p:nvSpPr>
-        <p:spPr>
-          <a:xfrm>
-            <a:off x="731520" y="1691640"/>
-            <a:ext cx="594360" cy="713232"/>
-          </a:xfrm>
-          <a:prstGeom prst="rect">
-            <a:avLst/>
-          </a:prstGeom>
-          <a:noFill/>
-          <a:ln/>
-        </p:spPr>
-        <p:txBody>
-          <a:bodyPr wrap="square" lIns="0" tIns="0" rIns="0" bIns="0" rtlCol="0" anchor="ctr"/>
-          <a:lstStyle/>
-          <a:p>
-            <a:pPr marL="0" indent="0">
-              <a:buNone/>
-            </a:pPr>
-            <a:r>
-              <a:rPr lang="en-US" sz="1800" b="1" dirty="0">
-                <a:solidFill>
-                  <a:srgbClr val="B07A1E"/>
-                </a:solidFill>
-                <a:latin typeface="Georgia" pitchFamily="34" charset="0"/>
-                <a:ea typeface="Georgia" pitchFamily="34" charset="-122"/>
-                <a:cs typeface="Georgia" pitchFamily="34" charset="-120"/>
-              </a:rPr>
-              <a:t>C1</a:t>
-            </a:r>
-            <a:endParaRPr lang="en-US" sz="1800" dirty="0"/>
-          </a:p>
-        </p:txBody>
-      </p:sp>
-      <p:sp>
-        <p:nvSpPr>
-          <p:cNvPr id="10" name="Text 8"/>
-          <p:cNvSpPr/>
-          <p:nvPr/>
-        </p:nvSpPr>
-        <p:spPr>
-          <a:xfrm>
-            <a:off x="1371600" y="1746504"/>
-            <a:ext cx="5943600" cy="621792"/>
-          </a:xfrm>
-          <a:prstGeom prst="rect">
-            <a:avLst/>
-          </a:prstGeom>
-          <a:noFill/>
-          <a:ln/>
-        </p:spPr>
-        <p:txBody>
-          <a:bodyPr wrap="square" lIns="0" tIns="0" rIns="0" bIns="0" rtlCol="0" anchor="ctr"/>
-          <a:lstStyle/>
-          <a:p>
-            <a:pPr marL="0" indent="0">
-              <a:buNone/>
-            </a:pPr>
-            <a:r>
-              <a:rPr lang="en-US" sz="1350" b="1" dirty="0">
-                <a:solidFill>
-                  <a:srgbClr val="16314E"/>
-                </a:solidFill>
-                <a:latin typeface="Calibri" pitchFamily="34" charset="0"/>
-                <a:ea typeface="Calibri" pitchFamily="34" charset="-122"/>
-                <a:cs typeface="Calibri" pitchFamily="34" charset="-120"/>
-              </a:rPr>
-              <a:t>Grounding-validated 8-entity schema</a:t>
-            </a:r>
-            <a:endParaRPr lang="en-US" sz="1350" dirty="0"/>
-          </a:p>
-          <a:p>
-            <a:pPr marL="0" indent="0">
-              <a:buNone/>
-            </a:pPr>
-            <a:r>
-              <a:rPr lang="en-US" sz="1050" dirty="0">
-                <a:solidFill>
-                  <a:srgbClr val="5A6675"/>
-                </a:solidFill>
-                <a:latin typeface="Calibri" pitchFamily="34" charset="0"/>
-                <a:ea typeface="Calibri" pitchFamily="34" charset="-122"/>
-                <a:cs typeface="Calibri" pitchFamily="34" charset="-120"/>
-              </a:rPr>
-              <a:t>κ = 0.78 · every label verifiable in source</a:t>
-            </a:r>
-            <a:endParaRPr lang="en-US" sz="1350" dirty="0"/>
-          </a:p>
-        </p:txBody>
-      </p:sp>
-      <p:sp>
-        <p:nvSpPr>
-          <p:cNvPr id="11" name="Shape 9"/>
-          <p:cNvSpPr/>
-          <p:nvPr/>
-        </p:nvSpPr>
-        <p:spPr>
-          <a:xfrm>
-            <a:off x="548640" y="2496312"/>
-            <a:ext cx="6903720" cy="713232"/>
-          </a:xfrm>
-          <a:prstGeom prst="rect">
-            <a:avLst/>
-          </a:prstGeom>
-          <a:solidFill>
-            <a:srgbClr val="F2F5F8"/>
-          </a:solidFill>
-          <a:ln/>
-        </p:spPr>
-        <p:txBody>
-          <a:bodyPr/>
-          <a:lstStyle/>
-          <a:p>
-            <a:endParaRPr lang="en-ET"/>
-          </a:p>
-        </p:txBody>
-      </p:sp>
-      <p:sp>
-        <p:nvSpPr>
-          <p:cNvPr id="12" name="Shape 10"/>
-          <p:cNvSpPr/>
-          <p:nvPr/>
-        </p:nvSpPr>
-        <p:spPr>
-          <a:xfrm>
-            <a:off x="548640" y="2496312"/>
-            <a:ext cx="73152" cy="713232"/>
-          </a:xfrm>
-          <a:prstGeom prst="rect">
-            <a:avLst/>
-          </a:prstGeom>
-          <a:solidFill>
-            <a:srgbClr val="2A9D8F"/>
-          </a:solidFill>
-          <a:ln/>
-        </p:spPr>
-        <p:txBody>
-          <a:bodyPr/>
-          <a:lstStyle/>
-          <a:p>
-            <a:endParaRPr lang="en-ET"/>
-          </a:p>
-        </p:txBody>
-      </p:sp>
-      <p:sp>
-        <p:nvSpPr>
-          <p:cNvPr id="13" name="Text 11"/>
-          <p:cNvSpPr/>
-          <p:nvPr/>
-        </p:nvSpPr>
-        <p:spPr>
-          <a:xfrm>
-            <a:off x="731520" y="2496312"/>
-            <a:ext cx="594360" cy="713232"/>
-          </a:xfrm>
-          <a:prstGeom prst="rect">
-            <a:avLst/>
-          </a:prstGeom>
-          <a:noFill/>
-          <a:ln/>
-        </p:spPr>
-        <p:txBody>
-          <a:bodyPr wrap="square" lIns="0" tIns="0" rIns="0" bIns="0" rtlCol="0" anchor="ctr"/>
-          <a:lstStyle/>
-          <a:p>
-            <a:pPr marL="0" indent="0">
-              <a:buNone/>
-            </a:pPr>
-            <a:r>
-              <a:rPr lang="en-US" sz="1800" b="1" dirty="0">
-                <a:solidFill>
-                  <a:srgbClr val="B07A1E"/>
-                </a:solidFill>
-                <a:latin typeface="Georgia" pitchFamily="34" charset="0"/>
-                <a:ea typeface="Georgia" pitchFamily="34" charset="-122"/>
-                <a:cs typeface="Georgia" pitchFamily="34" charset="-120"/>
-              </a:rPr>
-              <a:t>C2</a:t>
-            </a:r>
-            <a:endParaRPr lang="en-US" sz="1800" dirty="0"/>
-          </a:p>
-        </p:txBody>
-      </p:sp>
-      <p:sp>
-        <p:nvSpPr>
-          <p:cNvPr id="14" name="Text 12"/>
-          <p:cNvSpPr/>
-          <p:nvPr/>
-        </p:nvSpPr>
-        <p:spPr>
-          <a:xfrm>
-            <a:off x="1371600" y="2551176"/>
-            <a:ext cx="5943600" cy="621792"/>
-          </a:xfrm>
-          <a:prstGeom prst="rect">
-            <a:avLst/>
-          </a:prstGeom>
-          <a:noFill/>
-          <a:ln/>
-        </p:spPr>
-        <p:txBody>
-          <a:bodyPr wrap="square" lIns="0" tIns="0" rIns="0" bIns="0" rtlCol="0" anchor="ctr"/>
-          <a:lstStyle/>
-          <a:p>
-            <a:pPr marL="0" indent="0">
-              <a:buNone/>
-            </a:pPr>
-            <a:r>
-              <a:rPr lang="en-US" sz="1350" b="1" dirty="0">
-                <a:solidFill>
-                  <a:srgbClr val="16314E"/>
-                </a:solidFill>
-                <a:latin typeface="Calibri" pitchFamily="34" charset="0"/>
-                <a:ea typeface="Calibri" pitchFamily="34" charset="-122"/>
-                <a:cs typeface="Calibri" pitchFamily="34" charset="-120"/>
-              </a:rPr>
-              <a:t>4-level African event taxonomy</a:t>
-            </a:r>
-            <a:endParaRPr lang="en-US" sz="1350" dirty="0"/>
-          </a:p>
-          <a:p>
-            <a:pPr marL="0" indent="0">
-              <a:buNone/>
-            </a:pPr>
-            <a:r>
-              <a:rPr lang="en-US" sz="1050" dirty="0">
-                <a:solidFill>
-                  <a:srgbClr val="5A6675"/>
-                </a:solidFill>
-                <a:latin typeface="Calibri" pitchFamily="34" charset="0"/>
-                <a:ea typeface="Calibri" pitchFamily="34" charset="-122"/>
-                <a:cs typeface="Calibri" pitchFamily="34" charset="-120"/>
-              </a:rPr>
-              <a:t>~95 leaves · ACLED/UCDP-compatible at L1</a:t>
-            </a:r>
-            <a:endParaRPr lang="en-US" sz="1350" dirty="0"/>
-          </a:p>
-        </p:txBody>
-      </p:sp>
-      <p:sp>
-        <p:nvSpPr>
-          <p:cNvPr id="15" name="Shape 13"/>
-          <p:cNvSpPr/>
-          <p:nvPr/>
-        </p:nvSpPr>
-        <p:spPr>
-          <a:xfrm>
-            <a:off x="548640" y="3300984"/>
-            <a:ext cx="6903720" cy="713232"/>
-          </a:xfrm>
-          <a:prstGeom prst="rect">
-            <a:avLst/>
-          </a:prstGeom>
-          <a:solidFill>
-            <a:srgbClr val="F2F5F8"/>
-          </a:solidFill>
-          <a:ln/>
-        </p:spPr>
-        <p:txBody>
-          <a:bodyPr/>
-          <a:lstStyle/>
-          <a:p>
-            <a:endParaRPr lang="en-ET"/>
-          </a:p>
-        </p:txBody>
-      </p:sp>
-      <p:sp>
-        <p:nvSpPr>
-          <p:cNvPr id="16" name="Shape 14"/>
-          <p:cNvSpPr/>
-          <p:nvPr/>
-        </p:nvSpPr>
-        <p:spPr>
-          <a:xfrm>
-            <a:off x="548640" y="3300984"/>
-            <a:ext cx="73152" cy="713232"/>
-          </a:xfrm>
-          <a:prstGeom prst="rect">
-            <a:avLst/>
-          </a:prstGeom>
-          <a:solidFill>
-            <a:srgbClr val="2A9D8F"/>
-          </a:solidFill>
-          <a:ln/>
-        </p:spPr>
-        <p:txBody>
-          <a:bodyPr/>
-          <a:lstStyle/>
-          <a:p>
-            <a:endParaRPr lang="en-ET"/>
-          </a:p>
-        </p:txBody>
-      </p:sp>
-      <p:sp>
-        <p:nvSpPr>
-          <p:cNvPr id="17" name="Text 15"/>
-          <p:cNvSpPr/>
-          <p:nvPr/>
-        </p:nvSpPr>
-        <p:spPr>
-          <a:xfrm>
-            <a:off x="731520" y="3300984"/>
-            <a:ext cx="594360" cy="713232"/>
-          </a:xfrm>
-          <a:prstGeom prst="rect">
-            <a:avLst/>
-          </a:prstGeom>
-          <a:noFill/>
-          <a:ln/>
-        </p:spPr>
-        <p:txBody>
-          <a:bodyPr wrap="square" lIns="0" tIns="0" rIns="0" bIns="0" rtlCol="0" anchor="ctr"/>
-          <a:lstStyle/>
-          <a:p>
-            <a:pPr marL="0" indent="0">
-              <a:buNone/>
-            </a:pPr>
-            <a:r>
-              <a:rPr lang="en-US" sz="1800" b="1" dirty="0">
-                <a:solidFill>
-                  <a:srgbClr val="B07A1E"/>
-                </a:solidFill>
-                <a:latin typeface="Georgia" pitchFamily="34" charset="0"/>
-                <a:ea typeface="Georgia" pitchFamily="34" charset="-122"/>
-                <a:cs typeface="Georgia" pitchFamily="34" charset="-120"/>
-              </a:rPr>
-              <a:t>C3</a:t>
-            </a:r>
-            <a:endParaRPr lang="en-US" sz="1800" dirty="0"/>
-          </a:p>
-        </p:txBody>
-      </p:sp>
-      <p:sp>
-        <p:nvSpPr>
-          <p:cNvPr id="18" name="Text 16"/>
-          <p:cNvSpPr/>
-          <p:nvPr/>
-        </p:nvSpPr>
-        <p:spPr>
-          <a:xfrm>
-            <a:off x="1371600" y="3355848"/>
-            <a:ext cx="5943600" cy="621792"/>
-          </a:xfrm>
-          <a:prstGeom prst="rect">
-            <a:avLst/>
-          </a:prstGeom>
-          <a:noFill/>
-          <a:ln/>
-        </p:spPr>
-        <p:txBody>
-          <a:bodyPr wrap="square" lIns="0" tIns="0" rIns="0" bIns="0" rtlCol="0" anchor="ctr"/>
-          <a:lstStyle/>
-          <a:p>
-            <a:pPr marL="0" indent="0">
-              <a:buNone/>
-            </a:pPr>
-            <a:r>
-              <a:rPr lang="en-US" sz="1350" b="1" dirty="0">
-                <a:solidFill>
-                  <a:srgbClr val="16314E"/>
-                </a:solidFill>
-                <a:latin typeface="Calibri" pitchFamily="34" charset="0"/>
-                <a:ea typeface="Calibri" pitchFamily="34" charset="-122"/>
-                <a:cs typeface="Calibri" pitchFamily="34" charset="-120"/>
-              </a:rPr>
-              <a:t>Focal + class-weights training recipe</a:t>
-            </a:r>
-            <a:endParaRPr lang="en-US" sz="1350" dirty="0"/>
-          </a:p>
-          <a:p>
-            <a:pPr marL="0" indent="0">
-              <a:buNone/>
-            </a:pPr>
-            <a:r>
-              <a:rPr lang="en-US" sz="1050" dirty="0">
-                <a:solidFill>
-                  <a:srgbClr val="5A6675"/>
-                </a:solidFill>
-                <a:latin typeface="Calibri" pitchFamily="34" charset="0"/>
-                <a:ea typeface="Calibri" pitchFamily="34" charset="-122"/>
-                <a:cs typeface="Calibri" pitchFamily="34" charset="-120"/>
-              </a:rPr>
-              <a:t>VICTIM +11 F1 · ACTION +7 · no entity hurt</a:t>
-            </a:r>
-            <a:endParaRPr lang="en-US" sz="1350" dirty="0"/>
-          </a:p>
-        </p:txBody>
-      </p:sp>
-      <p:sp>
-        <p:nvSpPr>
-          <p:cNvPr id="19" name="Shape 17"/>
-          <p:cNvSpPr/>
-          <p:nvPr/>
-        </p:nvSpPr>
-        <p:spPr>
-          <a:xfrm>
-            <a:off x="548640" y="4105656"/>
-            <a:ext cx="6903720" cy="713232"/>
-          </a:xfrm>
-          <a:prstGeom prst="rect">
-            <a:avLst/>
-          </a:prstGeom>
-          <a:solidFill>
-            <a:srgbClr val="F2F5F8"/>
-          </a:solidFill>
-          <a:ln/>
-        </p:spPr>
-        <p:txBody>
-          <a:bodyPr/>
-          <a:lstStyle/>
-          <a:p>
-            <a:endParaRPr lang="en-ET"/>
-          </a:p>
-        </p:txBody>
-      </p:sp>
-      <p:sp>
-        <p:nvSpPr>
-          <p:cNvPr id="20" name="Shape 18"/>
-          <p:cNvSpPr/>
-          <p:nvPr/>
-        </p:nvSpPr>
-        <p:spPr>
-          <a:xfrm>
-            <a:off x="548640" y="4105656"/>
-            <a:ext cx="73152" cy="713232"/>
-          </a:xfrm>
-          <a:prstGeom prst="rect">
-            <a:avLst/>
-          </a:prstGeom>
-          <a:solidFill>
-            <a:srgbClr val="2A9D8F"/>
-          </a:solidFill>
-          <a:ln/>
-        </p:spPr>
-        <p:txBody>
-          <a:bodyPr/>
-          <a:lstStyle/>
-          <a:p>
-            <a:endParaRPr lang="en-ET"/>
-          </a:p>
-        </p:txBody>
-      </p:sp>
-      <p:sp>
-        <p:nvSpPr>
-          <p:cNvPr id="21" name="Text 19"/>
-          <p:cNvSpPr/>
-          <p:nvPr/>
-        </p:nvSpPr>
-        <p:spPr>
-          <a:xfrm>
-            <a:off x="731520" y="4105656"/>
-            <a:ext cx="594360" cy="713232"/>
-          </a:xfrm>
-          <a:prstGeom prst="rect">
-            <a:avLst/>
-          </a:prstGeom>
-          <a:noFill/>
-          <a:ln/>
-        </p:spPr>
-        <p:txBody>
-          <a:bodyPr wrap="square" lIns="0" tIns="0" rIns="0" bIns="0" rtlCol="0" anchor="ctr"/>
-          <a:lstStyle/>
-          <a:p>
-            <a:pPr marL="0" indent="0">
-              <a:buNone/>
-            </a:pPr>
-            <a:r>
-              <a:rPr lang="en-US" sz="1800" b="1" dirty="0">
-                <a:solidFill>
-                  <a:srgbClr val="B07A1E"/>
-                </a:solidFill>
-                <a:latin typeface="Georgia" pitchFamily="34" charset="0"/>
-                <a:ea typeface="Georgia" pitchFamily="34" charset="-122"/>
-                <a:cs typeface="Georgia" pitchFamily="34" charset="-120"/>
-              </a:rPr>
-              <a:t>C4</a:t>
-            </a:r>
-            <a:endParaRPr lang="en-US" sz="1800" dirty="0"/>
-          </a:p>
-        </p:txBody>
-      </p:sp>
-      <p:sp>
-        <p:nvSpPr>
-          <p:cNvPr id="22" name="Text 20"/>
-          <p:cNvSpPr/>
-          <p:nvPr/>
-        </p:nvSpPr>
-        <p:spPr>
-          <a:xfrm>
-            <a:off x="1371600" y="4160520"/>
-            <a:ext cx="5943600" cy="621792"/>
-          </a:xfrm>
-          <a:prstGeom prst="rect">
-            <a:avLst/>
-          </a:prstGeom>
-          <a:noFill/>
-          <a:ln/>
-        </p:spPr>
-        <p:txBody>
-          <a:bodyPr wrap="square" lIns="0" tIns="0" rIns="0" bIns="0" rtlCol="0" anchor="ctr"/>
-          <a:lstStyle/>
-          <a:p>
-            <a:pPr marL="0" indent="0">
-              <a:buNone/>
-            </a:pPr>
-            <a:r>
-              <a:rPr lang="en-US" sz="1350" b="1" dirty="0">
-                <a:solidFill>
-                  <a:srgbClr val="16314E"/>
-                </a:solidFill>
-                <a:latin typeface="Calibri" pitchFamily="34" charset="0"/>
-                <a:ea typeface="Calibri" pitchFamily="34" charset="-122"/>
-                <a:cs typeface="Calibri" pitchFamily="34" charset="-120"/>
-              </a:rPr>
-              <a:t>Curated validate-&amp;-enrich KB</a:t>
-            </a:r>
-            <a:endParaRPr lang="en-US" sz="1350" dirty="0"/>
-          </a:p>
-          <a:p>
-            <a:pPr marL="0" indent="0">
-              <a:buNone/>
-            </a:pPr>
-            <a:r>
-              <a:rPr lang="en-US" sz="1050" dirty="0">
-                <a:solidFill>
-                  <a:srgbClr val="5A6675"/>
-                </a:solidFill>
-                <a:latin typeface="Calibri" pitchFamily="34" charset="0"/>
-                <a:ea typeface="Calibri" pitchFamily="34" charset="-122"/>
-                <a:cs typeface="Calibri" pitchFamily="34" charset="-120"/>
-              </a:rPr>
-              <a:t>64.3% enrichment · 2.4% flag rate · UAT 4.6/5</a:t>
-            </a:r>
-            <a:endParaRPr lang="en-US" sz="1350" dirty="0"/>
-          </a:p>
-        </p:txBody>
-      </p:sp>
-      <p:sp>
-        <p:nvSpPr>
-          <p:cNvPr id="23" name="Shape 21"/>
-          <p:cNvSpPr/>
-          <p:nvPr/>
-        </p:nvSpPr>
-        <p:spPr>
-          <a:xfrm>
-            <a:off x="548640" y="4910328"/>
-            <a:ext cx="6903720" cy="713232"/>
-          </a:xfrm>
-          <a:prstGeom prst="rect">
-            <a:avLst/>
-          </a:prstGeom>
-          <a:solidFill>
-            <a:srgbClr val="F2F5F8"/>
-          </a:solidFill>
-          <a:ln/>
-        </p:spPr>
-        <p:txBody>
-          <a:bodyPr/>
-          <a:lstStyle/>
-          <a:p>
-            <a:endParaRPr lang="en-ET"/>
-          </a:p>
-        </p:txBody>
-      </p:sp>
-      <p:sp>
-        <p:nvSpPr>
-          <p:cNvPr id="24" name="Shape 22"/>
-          <p:cNvSpPr/>
-          <p:nvPr/>
-        </p:nvSpPr>
-        <p:spPr>
-          <a:xfrm>
-            <a:off x="548640" y="4910328"/>
-            <a:ext cx="73152" cy="713232"/>
-          </a:xfrm>
-          <a:prstGeom prst="rect">
-            <a:avLst/>
-          </a:prstGeom>
-          <a:solidFill>
-            <a:srgbClr val="2A9D8F"/>
-          </a:solidFill>
-          <a:ln/>
-        </p:spPr>
-        <p:txBody>
-          <a:bodyPr/>
-          <a:lstStyle/>
-          <a:p>
-            <a:endParaRPr lang="en-ET"/>
-          </a:p>
-        </p:txBody>
-      </p:sp>
-      <p:sp>
-        <p:nvSpPr>
-          <p:cNvPr id="25" name="Text 23"/>
-          <p:cNvSpPr/>
-          <p:nvPr/>
-        </p:nvSpPr>
-        <p:spPr>
-          <a:xfrm>
-            <a:off x="731520" y="4910328"/>
-            <a:ext cx="594360" cy="713232"/>
-          </a:xfrm>
-          <a:prstGeom prst="rect">
-            <a:avLst/>
-          </a:prstGeom>
-          <a:noFill/>
-          <a:ln/>
-        </p:spPr>
-        <p:txBody>
-          <a:bodyPr wrap="square" lIns="0" tIns="0" rIns="0" bIns="0" rtlCol="0" anchor="ctr"/>
-          <a:lstStyle/>
-          <a:p>
-            <a:pPr marL="0" indent="0">
-              <a:buNone/>
-            </a:pPr>
-            <a:r>
-              <a:rPr lang="en-US" sz="1800" b="1" dirty="0">
-                <a:solidFill>
-                  <a:srgbClr val="B07A1E"/>
-                </a:solidFill>
-                <a:latin typeface="Georgia" pitchFamily="34" charset="0"/>
-                <a:ea typeface="Georgia" pitchFamily="34" charset="-122"/>
-                <a:cs typeface="Georgia" pitchFamily="34" charset="-120"/>
-              </a:rPr>
-              <a:t>C5</a:t>
-            </a:r>
-            <a:endParaRPr lang="en-US" sz="1800" dirty="0"/>
-          </a:p>
-        </p:txBody>
-      </p:sp>
-      <p:sp>
-        <p:nvSpPr>
-          <p:cNvPr id="26" name="Text 24"/>
-          <p:cNvSpPr/>
-          <p:nvPr/>
-        </p:nvSpPr>
-        <p:spPr>
-          <a:xfrm>
-            <a:off x="1371600" y="4965192"/>
-            <a:ext cx="5943600" cy="621792"/>
-          </a:xfrm>
-          <a:prstGeom prst="rect">
-            <a:avLst/>
-          </a:prstGeom>
-          <a:noFill/>
-          <a:ln/>
-        </p:spPr>
-        <p:txBody>
-          <a:bodyPr wrap="square" lIns="0" tIns="0" rIns="0" bIns="0" rtlCol="0" anchor="ctr"/>
-          <a:lstStyle/>
-          <a:p>
-            <a:pPr marL="0" indent="0">
-              <a:buNone/>
-            </a:pPr>
-            <a:r>
-              <a:rPr lang="en-US" sz="1350" b="1" dirty="0">
-                <a:solidFill>
-                  <a:srgbClr val="16314E"/>
-                </a:solidFill>
-                <a:latin typeface="Calibri" pitchFamily="34" charset="0"/>
-                <a:ea typeface="Calibri" pitchFamily="34" charset="-122"/>
-                <a:cs typeface="Calibri" pitchFamily="34" charset="-120"/>
-              </a:rPr>
-              <a:t>Deployable analyst platform</a:t>
-            </a:r>
-            <a:endParaRPr lang="en-US" sz="1350" dirty="0"/>
-          </a:p>
-          <a:p>
-            <a:pPr marL="0" indent="0">
-              <a:buNone/>
-            </a:pPr>
-            <a:r>
-              <a:rPr lang="en-US" sz="1050" dirty="0">
-                <a:solidFill>
-                  <a:srgbClr val="5A6675"/>
-                </a:solidFill>
-                <a:latin typeface="Calibri" pitchFamily="34" charset="0"/>
-                <a:ea typeface="Calibri" pitchFamily="34" charset="-122"/>
-                <a:cs typeface="Calibri" pitchFamily="34" charset="-120"/>
-              </a:rPr>
-              <a:t>5/5 users × 6 tasks · one-command Docker</a:t>
-            </a:r>
-            <a:endParaRPr lang="en-US" sz="1350" dirty="0"/>
-          </a:p>
-        </p:txBody>
-      </p:sp>
-      <p:sp>
-        <p:nvSpPr>
-          <p:cNvPr id="27" name="Shape 25"/>
-          <p:cNvSpPr/>
-          <p:nvPr/>
-        </p:nvSpPr>
-        <p:spPr>
-          <a:xfrm>
-            <a:off x="7726680" y="1691640"/>
-            <a:ext cx="3913632" cy="2377440"/>
-          </a:xfrm>
-          <a:prstGeom prst="rect">
-            <a:avLst/>
-          </a:prstGeom>
-          <a:solidFill>
-            <a:srgbClr val="F2F5F8"/>
-          </a:solidFill>
-          <a:ln/>
-          <a:effectLst>
-            <a:outerShdw blurRad="88900" dist="38100" dir="8100000" algn="bl" rotWithShape="0">
-              <a:srgbClr val="F2F5F8">
-                <a:alpha val="16000"/>
-              </a:srgbClr>
-            </a:outerShdw>
-          </a:effectLst>
-        </p:spPr>
-        <p:txBody>
-          <a:bodyPr/>
-          <a:lstStyle/>
-          <a:p>
-            <a:endParaRPr lang="en-ET"/>
-          </a:p>
-        </p:txBody>
-      </p:sp>
-      <p:sp>
-        <p:nvSpPr>
-          <p:cNvPr id="28" name="Shape 26"/>
-          <p:cNvSpPr/>
-          <p:nvPr/>
-        </p:nvSpPr>
-        <p:spPr>
-          <a:xfrm>
-            <a:off x="7726680" y="1691640"/>
-            <a:ext cx="3913632" cy="109728"/>
-          </a:xfrm>
-          <a:prstGeom prst="rect">
-            <a:avLst/>
-          </a:prstGeom>
-          <a:solidFill>
-            <a:srgbClr val="E9C46A"/>
-          </a:solidFill>
-          <a:ln/>
-        </p:spPr>
-        <p:txBody>
-          <a:bodyPr/>
-          <a:lstStyle/>
-          <a:p>
-            <a:endParaRPr lang="en-ET"/>
-          </a:p>
-        </p:txBody>
-      </p:sp>
-      <p:sp>
-        <p:nvSpPr>
-          <p:cNvPr id="29" name="Text 27"/>
-          <p:cNvSpPr/>
-          <p:nvPr/>
-        </p:nvSpPr>
-        <p:spPr>
-          <a:xfrm>
-            <a:off x="7955280" y="1920240"/>
-            <a:ext cx="3474720" cy="2057400"/>
-          </a:xfrm>
-          <a:prstGeom prst="rect">
-            <a:avLst/>
-          </a:prstGeom>
-          <a:noFill/>
-          <a:ln/>
-        </p:spPr>
-        <p:txBody>
-          <a:bodyPr wrap="square" lIns="0" tIns="0" rIns="0" bIns="0" rtlCol="0" anchor="ctr"/>
-          <a:lstStyle/>
-          <a:p>
-            <a:pPr marL="0" indent="0">
-              <a:lnSpc>
-                <a:spcPct val="110000"/>
-              </a:lnSpc>
-              <a:spcAft>
-                <a:spcPts val="600"/>
-              </a:spcAft>
-              <a:buNone/>
-            </a:pPr>
-            <a:r>
-              <a:rPr lang="en-US" sz="1500" b="1" dirty="0">
-                <a:solidFill>
-                  <a:srgbClr val="16314E"/>
-                </a:solidFill>
-                <a:latin typeface="Calibri" pitchFamily="34" charset="0"/>
-                <a:ea typeface="Calibri" pitchFamily="34" charset="-122"/>
-                <a:cs typeface="Calibri" pitchFamily="34" charset="-120"/>
-              </a:rPr>
-              <a:t>The integration is the contribution.</a:t>
-            </a:r>
-            <a:endParaRPr lang="en-US" sz="1500" dirty="0"/>
-          </a:p>
-          <a:p>
-            <a:pPr marL="0" indent="0">
-              <a:lnSpc>
-                <a:spcPct val="110000"/>
-              </a:lnSpc>
-              <a:spcAft>
-                <a:spcPts val="600"/>
-              </a:spcAft>
-              <a:buNone/>
-            </a:pPr>
-            <a:r>
-              <a:rPr lang="en-US" sz="1150" dirty="0">
-                <a:solidFill>
-                  <a:srgbClr val="5A6675"/>
-                </a:solidFill>
-                <a:latin typeface="Calibri" pitchFamily="34" charset="0"/>
-                <a:ea typeface="Calibri" pitchFamily="34" charset="-122"/>
-                <a:cs typeface="Calibri" pitchFamily="34" charset="-120"/>
-              </a:rPr>
-              <a:t>No single component is novel in isolation; no published work combines grounded schema + imbalance-aware model + curated KB + analyst platform for African violent-event extraction — and evaluates it end-to-end.</a:t>
-            </a:r>
-            <a:endParaRPr lang="en-US" sz="1500" dirty="0"/>
-          </a:p>
-        </p:txBody>
-      </p:sp>
-      <p:sp>
-        <p:nvSpPr>
-          <p:cNvPr id="30" name="Shape 28"/>
-          <p:cNvSpPr/>
-          <p:nvPr/>
-        </p:nvSpPr>
-        <p:spPr>
-          <a:xfrm>
-            <a:off x="7726680" y="4251960"/>
-            <a:ext cx="3913632" cy="1417320"/>
-          </a:xfrm>
-          <a:prstGeom prst="rect">
-            <a:avLst/>
-          </a:prstGeom>
-          <a:solidFill>
-            <a:srgbClr val="F2F5F8"/>
-          </a:solidFill>
-          <a:ln/>
-        </p:spPr>
-        <p:txBody>
-          <a:bodyPr/>
-          <a:lstStyle/>
-          <a:p>
-            <a:endParaRPr lang="en-ET"/>
-          </a:p>
-        </p:txBody>
-      </p:sp>
-      <p:sp>
-        <p:nvSpPr>
-          <p:cNvPr id="31" name="Text 29"/>
-          <p:cNvSpPr/>
-          <p:nvPr/>
-        </p:nvSpPr>
-        <p:spPr>
-          <a:xfrm>
-            <a:off x="7955280" y="4370832"/>
-            <a:ext cx="3474720" cy="256032"/>
-          </a:xfrm>
-          <a:prstGeom prst="rect">
-            <a:avLst/>
-          </a:prstGeom>
-          <a:noFill/>
-          <a:ln/>
-        </p:spPr>
-        <p:txBody>
-          <a:bodyPr wrap="square" lIns="0" tIns="0" rIns="0" bIns="0" rtlCol="0" anchor="ctr"/>
-          <a:lstStyle/>
-          <a:p>
-            <a:pPr marL="0" indent="0">
-              <a:buNone/>
-            </a:pPr>
-            <a:r>
-              <a:rPr lang="en-US" sz="1050" b="1" kern="0" spc="200" dirty="0">
-                <a:solidFill>
-                  <a:srgbClr val="B07A1E"/>
-                </a:solidFill>
-                <a:latin typeface="Calibri" pitchFamily="34" charset="0"/>
-                <a:ea typeface="Calibri" pitchFamily="34" charset="-122"/>
-                <a:cs typeface="Calibri" pitchFamily="34" charset="-120"/>
-              </a:rPr>
-              <a:t>FOR THE Q&amp;A</a:t>
-            </a:r>
-            <a:endParaRPr lang="en-US" sz="1050" dirty="0"/>
-          </a:p>
-        </p:txBody>
-      </p:sp>
-      <p:sp>
-        <p:nvSpPr>
-          <p:cNvPr id="32" name="Text 30"/>
-          <p:cNvSpPr/>
-          <p:nvPr/>
-        </p:nvSpPr>
-        <p:spPr>
-          <a:xfrm>
-            <a:off x="7955280" y="4663440"/>
-            <a:ext cx="3474720" cy="914400"/>
-          </a:xfrm>
-          <a:prstGeom prst="rect">
-            <a:avLst/>
-          </a:prstGeom>
-          <a:noFill/>
-          <a:ln/>
-        </p:spPr>
-        <p:txBody>
-          <a:bodyPr wrap="square" lIns="0" tIns="0" rIns="0" bIns="0" rtlCol="0" anchor="ctr"/>
-          <a:lstStyle/>
-          <a:p>
-            <a:pPr marL="0" indent="0">
-              <a:lnSpc>
-                <a:spcPct val="115000"/>
-              </a:lnSpc>
-              <a:buNone/>
-            </a:pPr>
-            <a:r>
-              <a:rPr lang="en-US" sz="1250" b="1" dirty="0">
-                <a:solidFill>
-                  <a:srgbClr val="16314E"/>
-                </a:solidFill>
-                <a:latin typeface="Calibri" pitchFamily="34" charset="0"/>
-                <a:ea typeface="Calibri" pitchFamily="34" charset="-122"/>
-                <a:cs typeface="Calibri" pitchFamily="34" charset="-120"/>
-              </a:rPr>
-              <a:t>0.909 micro · 0.887 macro · κ 0.78 · +11 VICTIM · 64.3% / 2.4% KB · 150 ms · 5/5 UAT</a:t>
-            </a:r>
-            <a:endParaRPr lang="en-US" sz="1250" dirty="0"/>
-          </a:p>
-        </p:txBody>
-      </p:sp>
-    </p:spTree>
-    <p:extLst>
-      <p:ext uri="{BB962C8B-B14F-4D97-AF65-F5344CB8AC3E}">
-        <p14:creationId xmlns:p14="http://schemas.microsoft.com/office/powerpoint/2010/main" val="2396626809"/>
       </p:ext>
     </p:extLst>
   </p:cSld>
@@ -13726,17 +13067,6 @@
               </a:lnSpc>
               <a:buNone/>
             </a:pPr>
-            <a:r>
-              <a:rPr lang="en-US" sz="1250" dirty="0">
-                <a:solidFill>
-                  <a:srgbClr val="5A6675"/>
-                </a:solidFill>
-                <a:latin typeface="Calibri" pitchFamily="34" charset="0"/>
-                <a:ea typeface="Calibri" pitchFamily="34" charset="-122"/>
-                <a:cs typeface="Calibri" pitchFamily="34" charset="-120"/>
-              </a:rPr>
-              <a:t>Conflict monitoring matters at continental scale — and it is bottlenecked by manual coding. Four operational gaps no existing system closes.</a:t>
-            </a:r>
             <a:endParaRPr lang="en-US" sz="1250" dirty="0"/>
           </a:p>
         </p:txBody>
@@ -13963,17 +13293,6 @@
               </a:lnSpc>
               <a:buNone/>
             </a:pPr>
-            <a:r>
-              <a:rPr lang="en-US" sz="1250" dirty="0">
-                <a:solidFill>
-                  <a:srgbClr val="5A6675"/>
-                </a:solidFill>
-                <a:latin typeface="Calibri" pitchFamily="34" charset="0"/>
-                <a:ea typeface="Calibri" pitchFamily="34" charset="-122"/>
-                <a:cs typeface="Calibri" pitchFamily="34" charset="-120"/>
-              </a:rPr>
-              <a:t>VioNER: a grounded 8-entity schema, an imbalance-aware training recipe, a curated knowledge base, and a deployable analyst platform.</a:t>
-            </a:r>
             <a:endParaRPr lang="en-US" sz="1250" dirty="0"/>
           </a:p>
         </p:txBody>
@@ -14200,17 +13519,6 @@
               </a:lnSpc>
               <a:buNone/>
             </a:pPr>
-            <a:r>
-              <a:rPr lang="en-US" sz="1250" dirty="0">
-                <a:solidFill>
-                  <a:srgbClr val="5A6675"/>
-                </a:solidFill>
-                <a:latin typeface="Calibri" pitchFamily="34" charset="0"/>
-                <a:ea typeface="Calibri" pitchFamily="34" charset="-122"/>
-                <a:cs typeface="Calibri" pitchFamily="34" charset="-120"/>
-              </a:rPr>
-              <a:t>0.909 micro F1 on a held-out set, an ablation isolating the loss-function gain, measured KB impact, and UAT with real analysts.</a:t>
-            </a:r>
             <a:endParaRPr lang="en-US" sz="1250" dirty="0"/>
           </a:p>
         </p:txBody>
@@ -14446,7 +13754,7 @@
                 <a:ea typeface="Calibri" pitchFamily="34" charset="-122"/>
                 <a:cs typeface="Calibri" pitchFamily="34" charset="-120"/>
               </a:rPr>
-              <a:t>Five reusable contributions, honestly stated limitations, and a concrete path from thesis artefact to operational deployment.</a:t>
+              <a:t>Contributions &amp; Limitations</a:t>
             </a:r>
             <a:endParaRPr lang="en-US" sz="1250" dirty="0"/>
           </a:p>
@@ -14466,6 +13774,1015 @@
 </file>
 
 <file path=ppt/slides/slide20.xml><?xml version="1.0" encoding="utf-8"?>
+<p:sld xmlns:a="http://schemas.openxmlformats.org/drawingml/2006/main" xmlns:r="http://schemas.openxmlformats.org/officeDocument/2006/relationships" xmlns:p="http://schemas.openxmlformats.org/presentationml/2006/main">
+  <p:cSld name="Slide 22">
+    <p:bg>
+      <p:bgPr>
+        <a:solidFill>
+          <a:srgbClr val="FFFFFF"/>
+        </a:solidFill>
+        <a:effectLst/>
+      </p:bgPr>
+    </p:bg>
+    <p:spTree>
+      <p:nvGrpSpPr>
+        <p:cNvPr id="1" name=""/>
+        <p:cNvGrpSpPr/>
+        <p:nvPr/>
+      </p:nvGrpSpPr>
+      <p:grpSpPr>
+        <a:xfrm>
+          <a:off x="0" y="0"/>
+          <a:ext cx="0" cy="0"/>
+          <a:chOff x="0" y="0"/>
+          <a:chExt cx="0" cy="0"/>
+        </a:xfrm>
+      </p:grpSpPr>
+      <p:sp>
+        <p:nvSpPr>
+          <p:cNvPr id="2" name="Text 0"/>
+          <p:cNvSpPr/>
+          <p:nvPr/>
+        </p:nvSpPr>
+        <p:spPr>
+          <a:xfrm>
+            <a:off x="548640" y="6473952"/>
+            <a:ext cx="7315200" cy="274320"/>
+          </a:xfrm>
+          <a:prstGeom prst="rect">
+            <a:avLst/>
+          </a:prstGeom>
+          <a:noFill/>
+          <a:ln/>
+        </p:spPr>
+        <p:txBody>
+          <a:bodyPr wrap="square" lIns="0" tIns="0" rIns="0" bIns="0" rtlCol="0" anchor="ctr"/>
+          <a:lstStyle/>
+          <a:p>
+            <a:pPr marL="0" indent="0">
+              <a:buNone/>
+            </a:pPr>
+            <a:r>
+              <a:rPr lang="en-US" sz="900" dirty="0">
+                <a:solidFill>
+                  <a:srgbClr val="5A6675"/>
+                </a:solidFill>
+                <a:latin typeface="Calibri" pitchFamily="34" charset="0"/>
+                <a:ea typeface="Calibri" pitchFamily="34" charset="-122"/>
+                <a:cs typeface="Calibri" pitchFamily="34" charset="-120"/>
+              </a:rPr>
+              <a:t>VioNER · Extraction of Violent Events</a:t>
+            </a:r>
+            <a:endParaRPr lang="en-US" sz="900" dirty="0"/>
+          </a:p>
+        </p:txBody>
+      </p:sp>
+      <p:sp>
+        <p:nvSpPr>
+          <p:cNvPr id="3" name="Text 1"/>
+          <p:cNvSpPr/>
+          <p:nvPr/>
+        </p:nvSpPr>
+        <p:spPr>
+          <a:xfrm>
+            <a:off x="11185855" y="6473952"/>
+            <a:ext cx="502920" cy="274320"/>
+          </a:xfrm>
+          <a:prstGeom prst="rect">
+            <a:avLst/>
+          </a:prstGeom>
+          <a:noFill/>
+          <a:ln/>
+        </p:spPr>
+        <p:txBody>
+          <a:bodyPr wrap="square" lIns="0" tIns="0" rIns="0" bIns="0" rtlCol="0" anchor="ctr"/>
+          <a:lstStyle/>
+          <a:p>
+            <a:pPr marL="0" indent="0" algn="r">
+              <a:buNone/>
+            </a:pPr>
+            <a:r>
+              <a:rPr lang="en-US" sz="900" dirty="0">
+                <a:solidFill>
+                  <a:srgbClr val="5A6675"/>
+                </a:solidFill>
+                <a:latin typeface="Calibri" pitchFamily="34" charset="0"/>
+                <a:ea typeface="Calibri" pitchFamily="34" charset="-122"/>
+                <a:cs typeface="Calibri" pitchFamily="34" charset="-120"/>
+              </a:rPr>
+              <a:t>22</a:t>
+            </a:r>
+            <a:endParaRPr lang="en-US" sz="900" dirty="0"/>
+          </a:p>
+        </p:txBody>
+      </p:sp>
+      <p:sp>
+        <p:nvSpPr>
+          <p:cNvPr id="4" name="Shape 2"/>
+          <p:cNvSpPr/>
+          <p:nvPr/>
+        </p:nvSpPr>
+        <p:spPr>
+          <a:xfrm>
+            <a:off x="0" y="0"/>
+            <a:ext cx="12191695" cy="128016"/>
+          </a:xfrm>
+          <a:prstGeom prst="rect">
+            <a:avLst/>
+          </a:prstGeom>
+          <a:solidFill>
+            <a:srgbClr val="2A9D8F"/>
+          </a:solidFill>
+          <a:ln/>
+        </p:spPr>
+        <p:txBody>
+          <a:bodyPr/>
+          <a:lstStyle/>
+          <a:p>
+            <a:endParaRPr lang="en-ET"/>
+          </a:p>
+        </p:txBody>
+      </p:sp>
+      <p:sp>
+        <p:nvSpPr>
+          <p:cNvPr id="5" name="Text 3"/>
+          <p:cNvSpPr/>
+          <p:nvPr/>
+        </p:nvSpPr>
+        <p:spPr>
+          <a:xfrm>
+            <a:off x="548640" y="438912"/>
+            <a:ext cx="10972800" cy="274320"/>
+          </a:xfrm>
+          <a:prstGeom prst="rect">
+            <a:avLst/>
+          </a:prstGeom>
+          <a:noFill/>
+          <a:ln/>
+        </p:spPr>
+        <p:txBody>
+          <a:bodyPr wrap="square" lIns="0" tIns="0" rIns="0" bIns="0" rtlCol="0" anchor="ctr"/>
+          <a:lstStyle/>
+          <a:p>
+            <a:pPr marL="0" indent="0">
+              <a:buNone/>
+            </a:pPr>
+            <a:r>
+              <a:rPr lang="en-US" sz="1200" b="1" kern="0" spc="300" dirty="0">
+                <a:solidFill>
+                  <a:srgbClr val="B07A1E"/>
+                </a:solidFill>
+                <a:latin typeface="Calibri" pitchFamily="34" charset="0"/>
+                <a:ea typeface="Calibri" pitchFamily="34" charset="-122"/>
+                <a:cs typeface="Calibri" pitchFamily="34" charset="-120"/>
+              </a:rPr>
+              <a:t>ACT 4 · THE VERDICT</a:t>
+            </a:r>
+            <a:endParaRPr lang="en-US" sz="1200" dirty="0"/>
+          </a:p>
+        </p:txBody>
+      </p:sp>
+      <p:sp>
+        <p:nvSpPr>
+          <p:cNvPr id="6" name="Text 4"/>
+          <p:cNvSpPr/>
+          <p:nvPr/>
+        </p:nvSpPr>
+        <p:spPr>
+          <a:xfrm>
+            <a:off x="548640" y="731520"/>
+            <a:ext cx="11064240" cy="640080"/>
+          </a:xfrm>
+          <a:prstGeom prst="rect">
+            <a:avLst/>
+          </a:prstGeom>
+          <a:noFill/>
+          <a:ln/>
+        </p:spPr>
+        <p:txBody>
+          <a:bodyPr wrap="square" lIns="0" tIns="0" rIns="0" bIns="0" rtlCol="0" anchor="ctr"/>
+          <a:lstStyle/>
+          <a:p>
+            <a:pPr marL="0" indent="0">
+              <a:buNone/>
+            </a:pPr>
+            <a:r>
+              <a:rPr lang="en-US" sz="3000" b="1" dirty="0">
+                <a:solidFill>
+                  <a:srgbClr val="16314E"/>
+                </a:solidFill>
+                <a:latin typeface="Georgia" pitchFamily="34" charset="0"/>
+                <a:ea typeface="Georgia" pitchFamily="34" charset="-122"/>
+                <a:cs typeface="Georgia" pitchFamily="34" charset="-120"/>
+              </a:rPr>
+              <a:t>Five contributions, one integrated artefact</a:t>
+            </a:r>
+            <a:endParaRPr lang="en-US" sz="3000" dirty="0"/>
+          </a:p>
+        </p:txBody>
+      </p:sp>
+      <p:sp>
+        <p:nvSpPr>
+          <p:cNvPr id="7" name="Shape 5"/>
+          <p:cNvSpPr/>
+          <p:nvPr/>
+        </p:nvSpPr>
+        <p:spPr>
+          <a:xfrm>
+            <a:off x="548640" y="1691640"/>
+            <a:ext cx="6903720" cy="713232"/>
+          </a:xfrm>
+          <a:prstGeom prst="rect">
+            <a:avLst/>
+          </a:prstGeom>
+          <a:solidFill>
+            <a:srgbClr val="F2F5F8"/>
+          </a:solidFill>
+          <a:ln/>
+        </p:spPr>
+        <p:txBody>
+          <a:bodyPr/>
+          <a:lstStyle/>
+          <a:p>
+            <a:endParaRPr lang="en-ET"/>
+          </a:p>
+        </p:txBody>
+      </p:sp>
+      <p:sp>
+        <p:nvSpPr>
+          <p:cNvPr id="8" name="Shape 6"/>
+          <p:cNvSpPr/>
+          <p:nvPr/>
+        </p:nvSpPr>
+        <p:spPr>
+          <a:xfrm>
+            <a:off x="548640" y="1691640"/>
+            <a:ext cx="73152" cy="713232"/>
+          </a:xfrm>
+          <a:prstGeom prst="rect">
+            <a:avLst/>
+          </a:prstGeom>
+          <a:solidFill>
+            <a:srgbClr val="2A9D8F"/>
+          </a:solidFill>
+          <a:ln/>
+        </p:spPr>
+        <p:txBody>
+          <a:bodyPr/>
+          <a:lstStyle/>
+          <a:p>
+            <a:endParaRPr lang="en-ET"/>
+          </a:p>
+        </p:txBody>
+      </p:sp>
+      <p:sp>
+        <p:nvSpPr>
+          <p:cNvPr id="9" name="Text 7"/>
+          <p:cNvSpPr/>
+          <p:nvPr/>
+        </p:nvSpPr>
+        <p:spPr>
+          <a:xfrm>
+            <a:off x="731520" y="1691640"/>
+            <a:ext cx="594360" cy="713232"/>
+          </a:xfrm>
+          <a:prstGeom prst="rect">
+            <a:avLst/>
+          </a:prstGeom>
+          <a:noFill/>
+          <a:ln/>
+        </p:spPr>
+        <p:txBody>
+          <a:bodyPr wrap="square" lIns="0" tIns="0" rIns="0" bIns="0" rtlCol="0" anchor="ctr"/>
+          <a:lstStyle/>
+          <a:p>
+            <a:pPr marL="0" indent="0">
+              <a:buNone/>
+            </a:pPr>
+            <a:r>
+              <a:rPr lang="en-US" sz="1800" b="1" dirty="0">
+                <a:solidFill>
+                  <a:srgbClr val="B07A1E"/>
+                </a:solidFill>
+                <a:latin typeface="Georgia" pitchFamily="34" charset="0"/>
+                <a:ea typeface="Georgia" pitchFamily="34" charset="-122"/>
+                <a:cs typeface="Georgia" pitchFamily="34" charset="-120"/>
+              </a:rPr>
+              <a:t>C1</a:t>
+            </a:r>
+            <a:endParaRPr lang="en-US" sz="1800" dirty="0"/>
+          </a:p>
+        </p:txBody>
+      </p:sp>
+      <p:sp>
+        <p:nvSpPr>
+          <p:cNvPr id="10" name="Text 8"/>
+          <p:cNvSpPr/>
+          <p:nvPr/>
+        </p:nvSpPr>
+        <p:spPr>
+          <a:xfrm>
+            <a:off x="1371600" y="1746504"/>
+            <a:ext cx="5943600" cy="621792"/>
+          </a:xfrm>
+          <a:prstGeom prst="rect">
+            <a:avLst/>
+          </a:prstGeom>
+          <a:noFill/>
+          <a:ln/>
+        </p:spPr>
+        <p:txBody>
+          <a:bodyPr wrap="square" lIns="0" tIns="0" rIns="0" bIns="0" rtlCol="0" anchor="ctr"/>
+          <a:lstStyle/>
+          <a:p>
+            <a:pPr marL="0" indent="0">
+              <a:buNone/>
+            </a:pPr>
+            <a:r>
+              <a:rPr lang="en-US" sz="1350" b="1" dirty="0">
+                <a:solidFill>
+                  <a:srgbClr val="16314E"/>
+                </a:solidFill>
+                <a:latin typeface="Calibri" pitchFamily="34" charset="0"/>
+                <a:ea typeface="Calibri" pitchFamily="34" charset="-122"/>
+                <a:cs typeface="Calibri" pitchFamily="34" charset="-120"/>
+              </a:rPr>
+              <a:t>Grounding-validated 8-entity schema</a:t>
+            </a:r>
+            <a:endParaRPr lang="en-US" sz="1350" dirty="0"/>
+          </a:p>
+        </p:txBody>
+      </p:sp>
+      <p:sp>
+        <p:nvSpPr>
+          <p:cNvPr id="11" name="Shape 9"/>
+          <p:cNvSpPr/>
+          <p:nvPr/>
+        </p:nvSpPr>
+        <p:spPr>
+          <a:xfrm>
+            <a:off x="548640" y="2496312"/>
+            <a:ext cx="6903720" cy="713232"/>
+          </a:xfrm>
+          <a:prstGeom prst="rect">
+            <a:avLst/>
+          </a:prstGeom>
+          <a:solidFill>
+            <a:srgbClr val="F2F5F8"/>
+          </a:solidFill>
+          <a:ln/>
+        </p:spPr>
+        <p:txBody>
+          <a:bodyPr/>
+          <a:lstStyle/>
+          <a:p>
+            <a:endParaRPr lang="en-ET"/>
+          </a:p>
+        </p:txBody>
+      </p:sp>
+      <p:sp>
+        <p:nvSpPr>
+          <p:cNvPr id="12" name="Shape 10"/>
+          <p:cNvSpPr/>
+          <p:nvPr/>
+        </p:nvSpPr>
+        <p:spPr>
+          <a:xfrm>
+            <a:off x="548640" y="2496312"/>
+            <a:ext cx="73152" cy="713232"/>
+          </a:xfrm>
+          <a:prstGeom prst="rect">
+            <a:avLst/>
+          </a:prstGeom>
+          <a:solidFill>
+            <a:srgbClr val="2A9D8F"/>
+          </a:solidFill>
+          <a:ln/>
+        </p:spPr>
+        <p:txBody>
+          <a:bodyPr/>
+          <a:lstStyle/>
+          <a:p>
+            <a:endParaRPr lang="en-ET"/>
+          </a:p>
+        </p:txBody>
+      </p:sp>
+      <p:sp>
+        <p:nvSpPr>
+          <p:cNvPr id="13" name="Text 11"/>
+          <p:cNvSpPr/>
+          <p:nvPr/>
+        </p:nvSpPr>
+        <p:spPr>
+          <a:xfrm>
+            <a:off x="731520" y="2496312"/>
+            <a:ext cx="594360" cy="713232"/>
+          </a:xfrm>
+          <a:prstGeom prst="rect">
+            <a:avLst/>
+          </a:prstGeom>
+          <a:noFill/>
+          <a:ln/>
+        </p:spPr>
+        <p:txBody>
+          <a:bodyPr wrap="square" lIns="0" tIns="0" rIns="0" bIns="0" rtlCol="0" anchor="ctr"/>
+          <a:lstStyle/>
+          <a:p>
+            <a:pPr marL="0" indent="0">
+              <a:buNone/>
+            </a:pPr>
+            <a:r>
+              <a:rPr lang="en-US" sz="1800" b="1" dirty="0">
+                <a:solidFill>
+                  <a:srgbClr val="B07A1E"/>
+                </a:solidFill>
+                <a:latin typeface="Georgia" pitchFamily="34" charset="0"/>
+                <a:ea typeface="Georgia" pitchFamily="34" charset="-122"/>
+                <a:cs typeface="Georgia" pitchFamily="34" charset="-120"/>
+              </a:rPr>
+              <a:t>C2</a:t>
+            </a:r>
+            <a:endParaRPr lang="en-US" sz="1800" dirty="0"/>
+          </a:p>
+        </p:txBody>
+      </p:sp>
+      <p:sp>
+        <p:nvSpPr>
+          <p:cNvPr id="14" name="Text 12"/>
+          <p:cNvSpPr/>
+          <p:nvPr/>
+        </p:nvSpPr>
+        <p:spPr>
+          <a:xfrm>
+            <a:off x="1371600" y="2551176"/>
+            <a:ext cx="5943600" cy="621792"/>
+          </a:xfrm>
+          <a:prstGeom prst="rect">
+            <a:avLst/>
+          </a:prstGeom>
+          <a:noFill/>
+          <a:ln/>
+        </p:spPr>
+        <p:txBody>
+          <a:bodyPr wrap="square" lIns="0" tIns="0" rIns="0" bIns="0" rtlCol="0" anchor="ctr"/>
+          <a:lstStyle/>
+          <a:p>
+            <a:pPr marL="0" indent="0">
+              <a:buNone/>
+            </a:pPr>
+            <a:r>
+              <a:rPr lang="en-US" sz="1350" b="1" dirty="0">
+                <a:solidFill>
+                  <a:srgbClr val="16314E"/>
+                </a:solidFill>
+                <a:latin typeface="Calibri" pitchFamily="34" charset="0"/>
+                <a:ea typeface="Calibri" pitchFamily="34" charset="-122"/>
+                <a:cs typeface="Calibri" pitchFamily="34" charset="-120"/>
+              </a:rPr>
+              <a:t>4-level African event taxonomy</a:t>
+            </a:r>
+            <a:endParaRPr lang="en-US" sz="1350" dirty="0"/>
+          </a:p>
+        </p:txBody>
+      </p:sp>
+      <p:sp>
+        <p:nvSpPr>
+          <p:cNvPr id="15" name="Shape 13"/>
+          <p:cNvSpPr/>
+          <p:nvPr/>
+        </p:nvSpPr>
+        <p:spPr>
+          <a:xfrm>
+            <a:off x="548640" y="3300984"/>
+            <a:ext cx="6903720" cy="713232"/>
+          </a:xfrm>
+          <a:prstGeom prst="rect">
+            <a:avLst/>
+          </a:prstGeom>
+          <a:solidFill>
+            <a:srgbClr val="F2F5F8"/>
+          </a:solidFill>
+          <a:ln/>
+        </p:spPr>
+        <p:txBody>
+          <a:bodyPr/>
+          <a:lstStyle/>
+          <a:p>
+            <a:endParaRPr lang="en-ET"/>
+          </a:p>
+        </p:txBody>
+      </p:sp>
+      <p:sp>
+        <p:nvSpPr>
+          <p:cNvPr id="16" name="Shape 14"/>
+          <p:cNvSpPr/>
+          <p:nvPr/>
+        </p:nvSpPr>
+        <p:spPr>
+          <a:xfrm>
+            <a:off x="548640" y="3300984"/>
+            <a:ext cx="73152" cy="713232"/>
+          </a:xfrm>
+          <a:prstGeom prst="rect">
+            <a:avLst/>
+          </a:prstGeom>
+          <a:solidFill>
+            <a:srgbClr val="2A9D8F"/>
+          </a:solidFill>
+          <a:ln/>
+        </p:spPr>
+        <p:txBody>
+          <a:bodyPr/>
+          <a:lstStyle/>
+          <a:p>
+            <a:endParaRPr lang="en-ET"/>
+          </a:p>
+        </p:txBody>
+      </p:sp>
+      <p:sp>
+        <p:nvSpPr>
+          <p:cNvPr id="17" name="Text 15"/>
+          <p:cNvSpPr/>
+          <p:nvPr/>
+        </p:nvSpPr>
+        <p:spPr>
+          <a:xfrm>
+            <a:off x="731520" y="3300984"/>
+            <a:ext cx="594360" cy="713232"/>
+          </a:xfrm>
+          <a:prstGeom prst="rect">
+            <a:avLst/>
+          </a:prstGeom>
+          <a:noFill/>
+          <a:ln/>
+        </p:spPr>
+        <p:txBody>
+          <a:bodyPr wrap="square" lIns="0" tIns="0" rIns="0" bIns="0" rtlCol="0" anchor="ctr"/>
+          <a:lstStyle/>
+          <a:p>
+            <a:pPr marL="0" indent="0">
+              <a:buNone/>
+            </a:pPr>
+            <a:r>
+              <a:rPr lang="en-US" sz="1800" b="1" dirty="0">
+                <a:solidFill>
+                  <a:srgbClr val="B07A1E"/>
+                </a:solidFill>
+                <a:latin typeface="Georgia" pitchFamily="34" charset="0"/>
+                <a:ea typeface="Georgia" pitchFamily="34" charset="-122"/>
+                <a:cs typeface="Georgia" pitchFamily="34" charset="-120"/>
+              </a:rPr>
+              <a:t>C3</a:t>
+            </a:r>
+            <a:endParaRPr lang="en-US" sz="1800" dirty="0"/>
+          </a:p>
+        </p:txBody>
+      </p:sp>
+      <p:sp>
+        <p:nvSpPr>
+          <p:cNvPr id="18" name="Text 16"/>
+          <p:cNvSpPr/>
+          <p:nvPr/>
+        </p:nvSpPr>
+        <p:spPr>
+          <a:xfrm>
+            <a:off x="1371600" y="3355848"/>
+            <a:ext cx="5943600" cy="621792"/>
+          </a:xfrm>
+          <a:prstGeom prst="rect">
+            <a:avLst/>
+          </a:prstGeom>
+          <a:noFill/>
+          <a:ln/>
+        </p:spPr>
+        <p:txBody>
+          <a:bodyPr wrap="square" lIns="0" tIns="0" rIns="0" bIns="0" rtlCol="0" anchor="ctr"/>
+          <a:lstStyle/>
+          <a:p>
+            <a:pPr marL="0" indent="0">
+              <a:buNone/>
+            </a:pPr>
+            <a:r>
+              <a:rPr lang="en-US" sz="1350" b="1" dirty="0">
+                <a:solidFill>
+                  <a:srgbClr val="16314E"/>
+                </a:solidFill>
+                <a:latin typeface="Calibri" pitchFamily="34" charset="0"/>
+                <a:cs typeface="Calibri" pitchFamily="34" charset="-120"/>
+              </a:rPr>
+              <a:t>A finetuned ML Model</a:t>
+            </a:r>
+            <a:endParaRPr lang="en-US" sz="1350" dirty="0"/>
+          </a:p>
+        </p:txBody>
+      </p:sp>
+      <p:sp>
+        <p:nvSpPr>
+          <p:cNvPr id="19" name="Shape 17"/>
+          <p:cNvSpPr/>
+          <p:nvPr/>
+        </p:nvSpPr>
+        <p:spPr>
+          <a:xfrm>
+            <a:off x="548640" y="4105656"/>
+            <a:ext cx="6903720" cy="713232"/>
+          </a:xfrm>
+          <a:prstGeom prst="rect">
+            <a:avLst/>
+          </a:prstGeom>
+          <a:solidFill>
+            <a:srgbClr val="F2F5F8"/>
+          </a:solidFill>
+          <a:ln/>
+        </p:spPr>
+        <p:txBody>
+          <a:bodyPr/>
+          <a:lstStyle/>
+          <a:p>
+            <a:endParaRPr lang="en-ET"/>
+          </a:p>
+        </p:txBody>
+      </p:sp>
+      <p:sp>
+        <p:nvSpPr>
+          <p:cNvPr id="20" name="Shape 18"/>
+          <p:cNvSpPr/>
+          <p:nvPr/>
+        </p:nvSpPr>
+        <p:spPr>
+          <a:xfrm>
+            <a:off x="548640" y="4105656"/>
+            <a:ext cx="73152" cy="713232"/>
+          </a:xfrm>
+          <a:prstGeom prst="rect">
+            <a:avLst/>
+          </a:prstGeom>
+          <a:solidFill>
+            <a:srgbClr val="2A9D8F"/>
+          </a:solidFill>
+          <a:ln/>
+        </p:spPr>
+        <p:txBody>
+          <a:bodyPr/>
+          <a:lstStyle/>
+          <a:p>
+            <a:endParaRPr lang="en-ET"/>
+          </a:p>
+        </p:txBody>
+      </p:sp>
+      <p:sp>
+        <p:nvSpPr>
+          <p:cNvPr id="21" name="Text 19"/>
+          <p:cNvSpPr/>
+          <p:nvPr/>
+        </p:nvSpPr>
+        <p:spPr>
+          <a:xfrm>
+            <a:off x="731520" y="4105656"/>
+            <a:ext cx="594360" cy="713232"/>
+          </a:xfrm>
+          <a:prstGeom prst="rect">
+            <a:avLst/>
+          </a:prstGeom>
+          <a:noFill/>
+          <a:ln/>
+        </p:spPr>
+        <p:txBody>
+          <a:bodyPr wrap="square" lIns="0" tIns="0" rIns="0" bIns="0" rtlCol="0" anchor="ctr"/>
+          <a:lstStyle/>
+          <a:p>
+            <a:pPr marL="0" indent="0">
+              <a:buNone/>
+            </a:pPr>
+            <a:r>
+              <a:rPr lang="en-US" sz="1800" b="1" dirty="0">
+                <a:solidFill>
+                  <a:srgbClr val="B07A1E"/>
+                </a:solidFill>
+                <a:latin typeface="Georgia" pitchFamily="34" charset="0"/>
+                <a:ea typeface="Georgia" pitchFamily="34" charset="-122"/>
+                <a:cs typeface="Georgia" pitchFamily="34" charset="-120"/>
+              </a:rPr>
+              <a:t>C4</a:t>
+            </a:r>
+            <a:endParaRPr lang="en-US" sz="1800" dirty="0"/>
+          </a:p>
+        </p:txBody>
+      </p:sp>
+      <p:sp>
+        <p:nvSpPr>
+          <p:cNvPr id="22" name="Text 20"/>
+          <p:cNvSpPr/>
+          <p:nvPr/>
+        </p:nvSpPr>
+        <p:spPr>
+          <a:xfrm>
+            <a:off x="1371600" y="4160520"/>
+            <a:ext cx="5943600" cy="621792"/>
+          </a:xfrm>
+          <a:prstGeom prst="rect">
+            <a:avLst/>
+          </a:prstGeom>
+          <a:noFill/>
+          <a:ln/>
+        </p:spPr>
+        <p:txBody>
+          <a:bodyPr wrap="square" lIns="0" tIns="0" rIns="0" bIns="0" rtlCol="0" anchor="ctr"/>
+          <a:lstStyle/>
+          <a:p>
+            <a:pPr marL="0" indent="0">
+              <a:buNone/>
+            </a:pPr>
+            <a:r>
+              <a:rPr lang="en-US" sz="1350" b="1" dirty="0">
+                <a:solidFill>
+                  <a:srgbClr val="16314E"/>
+                </a:solidFill>
+                <a:latin typeface="Calibri" pitchFamily="34" charset="0"/>
+                <a:ea typeface="Calibri" pitchFamily="34" charset="-122"/>
+                <a:cs typeface="Calibri" pitchFamily="34" charset="-120"/>
+              </a:rPr>
+              <a:t>Curated validate-&amp;-enrich KB</a:t>
+            </a:r>
+            <a:endParaRPr lang="en-US" sz="1350" dirty="0"/>
+          </a:p>
+        </p:txBody>
+      </p:sp>
+      <p:sp>
+        <p:nvSpPr>
+          <p:cNvPr id="23" name="Shape 21"/>
+          <p:cNvSpPr/>
+          <p:nvPr/>
+        </p:nvSpPr>
+        <p:spPr>
+          <a:xfrm>
+            <a:off x="548640" y="4910328"/>
+            <a:ext cx="6903720" cy="713232"/>
+          </a:xfrm>
+          <a:prstGeom prst="rect">
+            <a:avLst/>
+          </a:prstGeom>
+          <a:solidFill>
+            <a:srgbClr val="F2F5F8"/>
+          </a:solidFill>
+          <a:ln/>
+        </p:spPr>
+        <p:txBody>
+          <a:bodyPr/>
+          <a:lstStyle/>
+          <a:p>
+            <a:endParaRPr lang="en-ET"/>
+          </a:p>
+        </p:txBody>
+      </p:sp>
+      <p:sp>
+        <p:nvSpPr>
+          <p:cNvPr id="24" name="Shape 22"/>
+          <p:cNvSpPr/>
+          <p:nvPr/>
+        </p:nvSpPr>
+        <p:spPr>
+          <a:xfrm>
+            <a:off x="548640" y="4910328"/>
+            <a:ext cx="73152" cy="713232"/>
+          </a:xfrm>
+          <a:prstGeom prst="rect">
+            <a:avLst/>
+          </a:prstGeom>
+          <a:solidFill>
+            <a:srgbClr val="2A9D8F"/>
+          </a:solidFill>
+          <a:ln/>
+        </p:spPr>
+        <p:txBody>
+          <a:bodyPr/>
+          <a:lstStyle/>
+          <a:p>
+            <a:endParaRPr lang="en-ET"/>
+          </a:p>
+        </p:txBody>
+      </p:sp>
+      <p:sp>
+        <p:nvSpPr>
+          <p:cNvPr id="25" name="Text 23"/>
+          <p:cNvSpPr/>
+          <p:nvPr/>
+        </p:nvSpPr>
+        <p:spPr>
+          <a:xfrm>
+            <a:off x="731520" y="4910328"/>
+            <a:ext cx="594360" cy="713232"/>
+          </a:xfrm>
+          <a:prstGeom prst="rect">
+            <a:avLst/>
+          </a:prstGeom>
+          <a:noFill/>
+          <a:ln/>
+        </p:spPr>
+        <p:txBody>
+          <a:bodyPr wrap="square" lIns="0" tIns="0" rIns="0" bIns="0" rtlCol="0" anchor="ctr"/>
+          <a:lstStyle/>
+          <a:p>
+            <a:pPr marL="0" indent="0">
+              <a:buNone/>
+            </a:pPr>
+            <a:r>
+              <a:rPr lang="en-US" sz="1800" b="1" dirty="0">
+                <a:solidFill>
+                  <a:srgbClr val="B07A1E"/>
+                </a:solidFill>
+                <a:latin typeface="Georgia" pitchFamily="34" charset="0"/>
+                <a:ea typeface="Georgia" pitchFamily="34" charset="-122"/>
+                <a:cs typeface="Georgia" pitchFamily="34" charset="-120"/>
+              </a:rPr>
+              <a:t>C5</a:t>
+            </a:r>
+            <a:endParaRPr lang="en-US" sz="1800" dirty="0"/>
+          </a:p>
+        </p:txBody>
+      </p:sp>
+      <p:sp>
+        <p:nvSpPr>
+          <p:cNvPr id="26" name="Text 24"/>
+          <p:cNvSpPr/>
+          <p:nvPr/>
+        </p:nvSpPr>
+        <p:spPr>
+          <a:xfrm>
+            <a:off x="1371600" y="4965192"/>
+            <a:ext cx="5943600" cy="621792"/>
+          </a:xfrm>
+          <a:prstGeom prst="rect">
+            <a:avLst/>
+          </a:prstGeom>
+          <a:noFill/>
+          <a:ln/>
+        </p:spPr>
+        <p:txBody>
+          <a:bodyPr wrap="square" lIns="0" tIns="0" rIns="0" bIns="0" rtlCol="0" anchor="ctr"/>
+          <a:lstStyle/>
+          <a:p>
+            <a:pPr marL="0" indent="0">
+              <a:buNone/>
+            </a:pPr>
+            <a:r>
+              <a:rPr lang="en-US" sz="1350" b="1" dirty="0">
+                <a:solidFill>
+                  <a:srgbClr val="16314E"/>
+                </a:solidFill>
+                <a:latin typeface="Calibri" pitchFamily="34" charset="0"/>
+                <a:ea typeface="Calibri" pitchFamily="34" charset="-122"/>
+                <a:cs typeface="Calibri" pitchFamily="34" charset="-120"/>
+              </a:rPr>
+              <a:t>Deployable analyst platform</a:t>
+            </a:r>
+            <a:endParaRPr lang="en-US" sz="1350" dirty="0"/>
+          </a:p>
+        </p:txBody>
+      </p:sp>
+      <p:sp>
+        <p:nvSpPr>
+          <p:cNvPr id="27" name="Shape 25"/>
+          <p:cNvSpPr/>
+          <p:nvPr/>
+        </p:nvSpPr>
+        <p:spPr>
+          <a:xfrm>
+            <a:off x="7726680" y="1691640"/>
+            <a:ext cx="3913632" cy="2377440"/>
+          </a:xfrm>
+          <a:prstGeom prst="rect">
+            <a:avLst/>
+          </a:prstGeom>
+          <a:solidFill>
+            <a:srgbClr val="F2F5F8"/>
+          </a:solidFill>
+          <a:ln/>
+          <a:effectLst>
+            <a:outerShdw blurRad="88900" dist="38100" dir="8100000" algn="bl" rotWithShape="0">
+              <a:srgbClr val="F2F5F8">
+                <a:alpha val="16000"/>
+              </a:srgbClr>
+            </a:outerShdw>
+          </a:effectLst>
+        </p:spPr>
+        <p:txBody>
+          <a:bodyPr/>
+          <a:lstStyle/>
+          <a:p>
+            <a:endParaRPr lang="en-ET"/>
+          </a:p>
+        </p:txBody>
+      </p:sp>
+      <p:sp>
+        <p:nvSpPr>
+          <p:cNvPr id="28" name="Shape 26"/>
+          <p:cNvSpPr/>
+          <p:nvPr/>
+        </p:nvSpPr>
+        <p:spPr>
+          <a:xfrm>
+            <a:off x="7726680" y="1691640"/>
+            <a:ext cx="3913632" cy="109728"/>
+          </a:xfrm>
+          <a:prstGeom prst="rect">
+            <a:avLst/>
+          </a:prstGeom>
+          <a:solidFill>
+            <a:srgbClr val="E9C46A"/>
+          </a:solidFill>
+          <a:ln/>
+        </p:spPr>
+        <p:txBody>
+          <a:bodyPr/>
+          <a:lstStyle/>
+          <a:p>
+            <a:endParaRPr lang="en-ET"/>
+          </a:p>
+        </p:txBody>
+      </p:sp>
+      <p:sp>
+        <p:nvSpPr>
+          <p:cNvPr id="29" name="Text 27"/>
+          <p:cNvSpPr/>
+          <p:nvPr/>
+        </p:nvSpPr>
+        <p:spPr>
+          <a:xfrm>
+            <a:off x="7955280" y="1920240"/>
+            <a:ext cx="3474720" cy="2057400"/>
+          </a:xfrm>
+          <a:prstGeom prst="rect">
+            <a:avLst/>
+          </a:prstGeom>
+          <a:noFill/>
+          <a:ln/>
+        </p:spPr>
+        <p:txBody>
+          <a:bodyPr wrap="square" lIns="0" tIns="0" rIns="0" bIns="0" rtlCol="0" anchor="ctr"/>
+          <a:lstStyle/>
+          <a:p>
+            <a:pPr marL="0" indent="0">
+              <a:lnSpc>
+                <a:spcPct val="110000"/>
+              </a:lnSpc>
+              <a:spcAft>
+                <a:spcPts val="600"/>
+              </a:spcAft>
+              <a:buNone/>
+            </a:pPr>
+            <a:r>
+              <a:rPr lang="en-US" sz="1500" b="1" dirty="0">
+                <a:solidFill>
+                  <a:srgbClr val="16314E"/>
+                </a:solidFill>
+                <a:latin typeface="Calibri" pitchFamily="34" charset="0"/>
+                <a:ea typeface="Calibri" pitchFamily="34" charset="-122"/>
+                <a:cs typeface="Calibri" pitchFamily="34" charset="-120"/>
+              </a:rPr>
+              <a:t>The integration is the contribution.</a:t>
+            </a:r>
+            <a:endParaRPr lang="en-US" sz="1500" dirty="0"/>
+          </a:p>
+          <a:p>
+            <a:pPr marL="0" indent="0">
+              <a:lnSpc>
+                <a:spcPct val="110000"/>
+              </a:lnSpc>
+              <a:spcAft>
+                <a:spcPts val="600"/>
+              </a:spcAft>
+              <a:buNone/>
+            </a:pPr>
+            <a:r>
+              <a:rPr lang="en-US" sz="1150" dirty="0">
+                <a:solidFill>
+                  <a:srgbClr val="5A6675"/>
+                </a:solidFill>
+                <a:latin typeface="Calibri" pitchFamily="34" charset="0"/>
+                <a:ea typeface="Calibri" pitchFamily="34" charset="-122"/>
+                <a:cs typeface="Calibri" pitchFamily="34" charset="-120"/>
+              </a:rPr>
+              <a:t>No single component is novel in isolation; no published work combines grounded schema + imbalance-aware model + curated KB + analyst platform for African violent-event extraction — and evaluates it end-to-end.</a:t>
+            </a:r>
+            <a:endParaRPr lang="en-US" sz="1500" dirty="0"/>
+          </a:p>
+        </p:txBody>
+      </p:sp>
+    </p:spTree>
+    <p:extLst>
+      <p:ext uri="{BB962C8B-B14F-4D97-AF65-F5344CB8AC3E}">
+        <p14:creationId xmlns:p14="http://schemas.microsoft.com/office/powerpoint/2010/main" val="2396626809"/>
+      </p:ext>
+    </p:extLst>
+  </p:cSld>
+  <p:clrMapOvr>
+    <a:masterClrMapping/>
+  </p:clrMapOvr>
+</p:sld>
+</file>
+
+<file path=ppt/slides/slide21.xml><?xml version="1.0" encoding="utf-8"?>
 <p:sld xmlns:a="http://schemas.openxmlformats.org/drawingml/2006/main" xmlns:r="http://schemas.openxmlformats.org/officeDocument/2006/relationships" xmlns:p="http://schemas.openxmlformats.org/presentationml/2006/main">
   <p:cSld name="Slide 1">
     <p:bg>
@@ -14775,6 +15092,804 @@
 
 <file path=ppt/slides/slide3.xml><?xml version="1.0" encoding="utf-8"?>
 <p:sld xmlns:a="http://schemas.openxmlformats.org/drawingml/2006/main" xmlns:r="http://schemas.openxmlformats.org/officeDocument/2006/relationships" xmlns:p="http://schemas.openxmlformats.org/presentationml/2006/main">
+  <p:cSld>
+    <p:spTree>
+      <p:nvGrpSpPr>
+        <p:cNvPr id="1" name=""/>
+        <p:cNvGrpSpPr/>
+        <p:nvPr/>
+      </p:nvGrpSpPr>
+      <p:grpSpPr>
+        <a:xfrm>
+          <a:off x="0" y="0"/>
+          <a:ext cx="0" cy="0"/>
+          <a:chOff x="0" y="0"/>
+          <a:chExt cx="0" cy="0"/>
+        </a:xfrm>
+      </p:grpSpPr>
+      <p:sp>
+        <p:nvSpPr>
+          <p:cNvPr id="100" name="AccentBar"/>
+          <p:cNvSpPr/>
+          <p:nvPr/>
+        </p:nvSpPr>
+        <p:spPr>
+          <a:xfrm>
+            <a:off x="0" y="0"/>
+            <a:ext cx="12192000" cy="127000"/>
+          </a:xfrm>
+          <a:prstGeom prst="rect">
+            <a:avLst/>
+          </a:prstGeom>
+          <a:solidFill>
+            <a:srgbClr val="2A9D8F"/>
+          </a:solidFill>
+          <a:ln>
+            <a:noFill/>
+          </a:ln>
+        </p:spPr>
+        <p:txBody>
+          <a:bodyPr/>
+          <a:lstStyle/>
+          <a:p>
+            <a:endParaRPr/>
+          </a:p>
+        </p:txBody>
+      </p:sp>
+      <p:sp>
+        <p:nvSpPr>
+          <p:cNvPr id="101" name="Eyebrow"/>
+          <p:cNvSpPr txBox="1"/>
+          <p:nvPr/>
+        </p:nvSpPr>
+        <p:spPr>
+          <a:xfrm>
+            <a:off x="546100" y="431800"/>
+            <a:ext cx="10972800" cy="279400"/>
+          </a:xfrm>
+          <a:prstGeom prst="rect">
+            <a:avLst/>
+          </a:prstGeom>
+          <a:noFill/>
+        </p:spPr>
+        <p:txBody>
+          <a:bodyPr wrap="square" lIns="0" tIns="0" rIns="0" bIns="0" anchor="t">
+            <a:normAutofit/>
+          </a:bodyPr>
+          <a:lstStyle/>
+          <a:p>
+            <a:pPr marL="0" indent="0" algn="l">
+              <a:buNone/>
+            </a:pPr>
+            <a:r>
+              <a:rPr lang="en-US" sz="1150" b="1" spc="200" dirty="0">
+                <a:solidFill>
+                  <a:srgbClr val="B07A1E"/>
+                </a:solidFill>
+                <a:latin typeface="Calibri" pitchFamily="34" charset="0"/>
+              </a:rPr>
+              <a:t>ACT 1 · THE PROBLEM</a:t>
+            </a:r>
+          </a:p>
+        </p:txBody>
+      </p:sp>
+      <p:sp>
+        <p:nvSpPr>
+          <p:cNvPr id="102" name="Title"/>
+          <p:cNvSpPr txBox="1"/>
+          <p:nvPr/>
+        </p:nvSpPr>
+        <p:spPr>
+          <a:xfrm>
+            <a:off x="546100" y="762000"/>
+            <a:ext cx="11176000" cy="1016000"/>
+          </a:xfrm>
+          <a:prstGeom prst="rect">
+            <a:avLst/>
+          </a:prstGeom>
+          <a:noFill/>
+        </p:spPr>
+        <p:txBody>
+          <a:bodyPr wrap="square" lIns="0" tIns="0" rIns="0" bIns="0" anchor="t">
+            <a:normAutofit/>
+          </a:bodyPr>
+          <a:lstStyle/>
+          <a:p>
+            <a:pPr marL="0" indent="0" algn="l">
+              <a:lnSpc>
+                <a:spcPct val="104000"/>
+              </a:lnSpc>
+              <a:buNone/>
+            </a:pPr>
+            <a:r>
+              <a:rPr lang="en-US" sz="2900" b="1" dirty="0">
+                <a:solidFill>
+                  <a:srgbClr val="16314E"/>
+                </a:solidFill>
+                <a:latin typeface="Georgia" pitchFamily="34" charset="0"/>
+              </a:rPr>
+              <a:t>Why this problem: a human bottleneck in early warning</a:t>
+            </a:r>
+          </a:p>
+        </p:txBody>
+      </p:sp>
+      <p:sp>
+        <p:nvSpPr>
+          <p:cNvPr id="103" name="Framing"/>
+          <p:cNvSpPr txBox="1"/>
+          <p:nvPr/>
+        </p:nvSpPr>
+        <p:spPr>
+          <a:xfrm>
+            <a:off x="546100" y="1905000"/>
+            <a:ext cx="11176000" cy="584200"/>
+          </a:xfrm>
+          <a:prstGeom prst="rect">
+            <a:avLst/>
+          </a:prstGeom>
+          <a:noFill/>
+        </p:spPr>
+        <p:txBody>
+          <a:bodyPr wrap="square" lIns="0" tIns="0" rIns="0" bIns="0" anchor="t">
+            <a:normAutofit/>
+          </a:bodyPr>
+          <a:lstStyle/>
+          <a:p>
+            <a:pPr marL="0" indent="0" algn="l">
+              <a:lnSpc>
+                <a:spcPct val="108000"/>
+              </a:lnSpc>
+              <a:buNone/>
+            </a:pPr>
+            <a:r>
+              <a:rPr lang="en-US" sz="1500" dirty="0">
+                <a:solidFill>
+                  <a:srgbClr val="5A6675"/>
+                </a:solidFill>
+                <a:latin typeface="Calibri" pitchFamily="34" charset="0"/>
+              </a:rPr>
+              <a:t>Across African conflict desks, </a:t>
+            </a:r>
+            <a:r>
+              <a:rPr lang="en-US" sz="1500" b="1" dirty="0">
+                <a:solidFill>
+                  <a:srgbClr val="16314E"/>
+                </a:solidFill>
+                <a:latin typeface="Calibri" pitchFamily="34" charset="0"/>
+              </a:rPr>
+              <a:t>the news published every day far outruns what analysts can read and code by hand</a:t>
+            </a:r>
+            <a:endParaRPr lang="en-US" sz="1500" dirty="0">
+              <a:solidFill>
+                <a:srgbClr val="5A6675"/>
+              </a:solidFill>
+              <a:latin typeface="Calibri" pitchFamily="34" charset="0"/>
+            </a:endParaRPr>
+          </a:p>
+        </p:txBody>
+      </p:sp>
+      <p:sp>
+        <p:nvSpPr>
+          <p:cNvPr id="110" name="S1"/>
+          <p:cNvSpPr/>
+          <p:nvPr/>
+        </p:nvSpPr>
+        <p:spPr>
+          <a:xfrm>
+            <a:off x="546100" y="2616200"/>
+            <a:ext cx="3403600" cy="1066800"/>
+          </a:xfrm>
+          <a:prstGeom prst="roundRect">
+            <a:avLst>
+              <a:gd name="adj" fmla="val 8000"/>
+            </a:avLst>
+          </a:prstGeom>
+          <a:solidFill>
+            <a:srgbClr val="F2F5F8"/>
+          </a:solidFill>
+          <a:ln>
+            <a:noFill/>
+          </a:ln>
+        </p:spPr>
+        <p:txBody>
+          <a:bodyPr/>
+          <a:lstStyle/>
+          <a:p>
+            <a:endParaRPr/>
+          </a:p>
+        </p:txBody>
+      </p:sp>
+      <p:sp>
+        <p:nvSpPr>
+          <p:cNvPr id="111" name="S1t"/>
+          <p:cNvSpPr txBox="1"/>
+          <p:nvPr/>
+        </p:nvSpPr>
+        <p:spPr>
+          <a:xfrm>
+            <a:off x="723900" y="2794000"/>
+            <a:ext cx="3048000" cy="711200"/>
+          </a:xfrm>
+          <a:prstGeom prst="rect">
+            <a:avLst/>
+          </a:prstGeom>
+          <a:noFill/>
+        </p:spPr>
+        <p:txBody>
+          <a:bodyPr wrap="square" lIns="0" tIns="0" rIns="0" bIns="0" anchor="ctr">
+            <a:normAutofit/>
+          </a:bodyPr>
+          <a:lstStyle/>
+          <a:p>
+            <a:pPr marL="0" indent="0" algn="ctr">
+              <a:buNone/>
+            </a:pPr>
+            <a:r>
+              <a:rPr lang="en-US" sz="2200" b="1" dirty="0">
+                <a:solidFill>
+                  <a:srgbClr val="16314E"/>
+                </a:solidFill>
+                <a:latin typeface="Georgia" pitchFamily="34" charset="0"/>
+              </a:rPr>
+              <a:t>200–400</a:t>
+            </a:r>
+          </a:p>
+          <a:p>
+            <a:pPr marL="0" indent="0" algn="ctr">
+              <a:lnSpc>
+                <a:spcPct val="104000"/>
+              </a:lnSpc>
+              <a:buNone/>
+            </a:pPr>
+            <a:r>
+              <a:rPr lang="en-US" sz="1080" dirty="0">
+                <a:solidFill>
+                  <a:srgbClr val="5A6675"/>
+                </a:solidFill>
+                <a:latin typeface="Calibri" pitchFamily="34" charset="0"/>
+              </a:rPr>
+              <a:t>news items pulled per desk, nightly</a:t>
+            </a:r>
+          </a:p>
+        </p:txBody>
+      </p:sp>
+      <p:sp>
+        <p:nvSpPr>
+          <p:cNvPr id="120" name="Arrow120"/>
+          <p:cNvSpPr/>
+          <p:nvPr/>
+        </p:nvSpPr>
+        <p:spPr>
+          <a:xfrm>
+            <a:off x="4013200" y="2984500"/>
+            <a:ext cx="330200" cy="330200"/>
+          </a:xfrm>
+          <a:prstGeom prst="rightArrow">
+            <a:avLst/>
+          </a:prstGeom>
+          <a:solidFill>
+            <a:srgbClr val="C7D2DD"/>
+          </a:solidFill>
+          <a:ln>
+            <a:noFill/>
+          </a:ln>
+        </p:spPr>
+        <p:txBody>
+          <a:bodyPr/>
+          <a:lstStyle/>
+          <a:p>
+            <a:endParaRPr/>
+          </a:p>
+        </p:txBody>
+      </p:sp>
+      <p:sp>
+        <p:nvSpPr>
+          <p:cNvPr id="112" name="S2"/>
+          <p:cNvSpPr/>
+          <p:nvPr/>
+        </p:nvSpPr>
+        <p:spPr>
+          <a:xfrm>
+            <a:off x="4394200" y="2616200"/>
+            <a:ext cx="3403600" cy="1066800"/>
+          </a:xfrm>
+          <a:prstGeom prst="roundRect">
+            <a:avLst>
+              <a:gd name="adj" fmla="val 8000"/>
+            </a:avLst>
+          </a:prstGeom>
+          <a:solidFill>
+            <a:srgbClr val="F2F5F8"/>
+          </a:solidFill>
+          <a:ln>
+            <a:noFill/>
+          </a:ln>
+        </p:spPr>
+        <p:txBody>
+          <a:bodyPr/>
+          <a:lstStyle/>
+          <a:p>
+            <a:endParaRPr/>
+          </a:p>
+        </p:txBody>
+      </p:sp>
+      <p:sp>
+        <p:nvSpPr>
+          <p:cNvPr id="113" name="S2t"/>
+          <p:cNvSpPr txBox="1"/>
+          <p:nvPr/>
+        </p:nvSpPr>
+        <p:spPr>
+          <a:xfrm>
+            <a:off x="4572000" y="2794000"/>
+            <a:ext cx="3048000" cy="711200"/>
+          </a:xfrm>
+          <a:prstGeom prst="rect">
+            <a:avLst/>
+          </a:prstGeom>
+          <a:noFill/>
+        </p:spPr>
+        <p:txBody>
+          <a:bodyPr wrap="square" lIns="0" tIns="0" rIns="0" bIns="0" anchor="ctr">
+            <a:normAutofit/>
+          </a:bodyPr>
+          <a:lstStyle/>
+          <a:p>
+            <a:pPr marL="0" indent="0" algn="ctr">
+              <a:buNone/>
+            </a:pPr>
+            <a:r>
+              <a:rPr lang="en-US" sz="2200" b="1" dirty="0">
+                <a:solidFill>
+                  <a:srgbClr val="1F7A6F"/>
+                </a:solidFill>
+                <a:latin typeface="Georgia" pitchFamily="34" charset="0"/>
+              </a:rPr>
+              <a:t>15–40</a:t>
+            </a:r>
+          </a:p>
+          <a:p>
+            <a:pPr marL="0" indent="0" algn="ctr">
+              <a:lnSpc>
+                <a:spcPct val="104000"/>
+              </a:lnSpc>
+              <a:buNone/>
+            </a:pPr>
+            <a:r>
+              <a:rPr lang="en-US" sz="1080" dirty="0">
+                <a:solidFill>
+                  <a:srgbClr val="5A6675"/>
+                </a:solidFill>
+                <a:latin typeface="Calibri" pitchFamily="34" charset="0"/>
+              </a:rPr>
+              <a:t>are violent events needing structured coding</a:t>
+            </a:r>
+          </a:p>
+        </p:txBody>
+      </p:sp>
+      <p:sp>
+        <p:nvSpPr>
+          <p:cNvPr id="121" name="Arrow121"/>
+          <p:cNvSpPr/>
+          <p:nvPr/>
+        </p:nvSpPr>
+        <p:spPr>
+          <a:xfrm>
+            <a:off x="7861300" y="2984500"/>
+            <a:ext cx="330200" cy="330200"/>
+          </a:xfrm>
+          <a:prstGeom prst="rightArrow">
+            <a:avLst/>
+          </a:prstGeom>
+          <a:solidFill>
+            <a:srgbClr val="C7D2DD"/>
+          </a:solidFill>
+          <a:ln>
+            <a:noFill/>
+          </a:ln>
+        </p:spPr>
+        <p:txBody>
+          <a:bodyPr/>
+          <a:lstStyle/>
+          <a:p>
+            <a:endParaRPr/>
+          </a:p>
+        </p:txBody>
+      </p:sp>
+      <p:sp>
+        <p:nvSpPr>
+          <p:cNvPr id="114" name="S3"/>
+          <p:cNvSpPr/>
+          <p:nvPr/>
+        </p:nvSpPr>
+        <p:spPr>
+          <a:xfrm>
+            <a:off x="8242300" y="2616200"/>
+            <a:ext cx="3403600" cy="1066800"/>
+          </a:xfrm>
+          <a:prstGeom prst="roundRect">
+            <a:avLst>
+              <a:gd name="adj" fmla="val 8000"/>
+            </a:avLst>
+          </a:prstGeom>
+          <a:solidFill>
+            <a:srgbClr val="F2F5F8"/>
+          </a:solidFill>
+          <a:ln>
+            <a:noFill/>
+          </a:ln>
+        </p:spPr>
+        <p:txBody>
+          <a:bodyPr/>
+          <a:lstStyle/>
+          <a:p>
+            <a:endParaRPr/>
+          </a:p>
+        </p:txBody>
+      </p:sp>
+      <p:sp>
+        <p:nvSpPr>
+          <p:cNvPr id="115" name="S3t"/>
+          <p:cNvSpPr txBox="1"/>
+          <p:nvPr/>
+        </p:nvSpPr>
+        <p:spPr>
+          <a:xfrm>
+            <a:off x="8420100" y="2794000"/>
+            <a:ext cx="3048000" cy="711200"/>
+          </a:xfrm>
+          <a:prstGeom prst="rect">
+            <a:avLst/>
+          </a:prstGeom>
+          <a:noFill/>
+        </p:spPr>
+        <p:txBody>
+          <a:bodyPr wrap="square" lIns="0" tIns="0" rIns="0" bIns="0" anchor="ctr">
+            <a:normAutofit/>
+          </a:bodyPr>
+          <a:lstStyle/>
+          <a:p>
+            <a:pPr marL="0" indent="0" algn="ctr">
+              <a:buNone/>
+            </a:pPr>
+            <a:r>
+              <a:rPr lang="en-US" sz="2200" b="1" dirty="0">
+                <a:solidFill>
+                  <a:srgbClr val="B07A1E"/>
+                </a:solidFill>
+                <a:latin typeface="Georgia" pitchFamily="34" charset="0"/>
+              </a:rPr>
+              <a:t>~ one quarter</a:t>
+            </a:r>
+          </a:p>
+          <a:p>
+            <a:pPr marL="0" indent="0" algn="ctr">
+              <a:lnSpc>
+                <a:spcPct val="104000"/>
+              </a:lnSpc>
+              <a:buNone/>
+            </a:pPr>
+            <a:r>
+              <a:rPr lang="en-US" sz="1080" dirty="0">
+                <a:solidFill>
+                  <a:srgbClr val="5A6675"/>
+                </a:solidFill>
+                <a:latin typeface="Calibri" pitchFamily="34" charset="0"/>
+              </a:rPr>
+              <a:t>cleared by midday — the rest rolls over</a:t>
+            </a:r>
+          </a:p>
+        </p:txBody>
+      </p:sp>
+      <p:sp>
+        <p:nvSpPr>
+          <p:cNvPr id="130" name="GapL"/>
+          <p:cNvSpPr/>
+          <p:nvPr/>
+        </p:nvSpPr>
+        <p:spPr>
+          <a:xfrm>
+            <a:off x="546100" y="3962400"/>
+            <a:ext cx="5397500" cy="1524000"/>
+          </a:xfrm>
+          <a:prstGeom prst="rect">
+            <a:avLst/>
+          </a:prstGeom>
+          <a:solidFill>
+            <a:srgbClr val="F2F5F8"/>
+          </a:solidFill>
+          <a:ln>
+            <a:noFill/>
+          </a:ln>
+        </p:spPr>
+        <p:txBody>
+          <a:bodyPr/>
+          <a:lstStyle/>
+          <a:p>
+            <a:endParaRPr/>
+          </a:p>
+        </p:txBody>
+      </p:sp>
+      <p:sp>
+        <p:nvSpPr>
+          <p:cNvPr id="131" name="GapLbar"/>
+          <p:cNvSpPr/>
+          <p:nvPr/>
+        </p:nvSpPr>
+        <p:spPr>
+          <a:xfrm>
+            <a:off x="546100" y="3962400"/>
+            <a:ext cx="76200" cy="1524000"/>
+          </a:xfrm>
+          <a:prstGeom prst="rect">
+            <a:avLst/>
+          </a:prstGeom>
+          <a:solidFill>
+            <a:srgbClr val="2A9D8F"/>
+          </a:solidFill>
+          <a:ln>
+            <a:noFill/>
+          </a:ln>
+        </p:spPr>
+        <p:txBody>
+          <a:bodyPr/>
+          <a:lstStyle/>
+          <a:p>
+            <a:endParaRPr/>
+          </a:p>
+        </p:txBody>
+      </p:sp>
+      <p:sp>
+        <p:nvSpPr>
+          <p:cNvPr id="132" name="GapR"/>
+          <p:cNvSpPr/>
+          <p:nvPr/>
+        </p:nvSpPr>
+        <p:spPr>
+          <a:xfrm>
+            <a:off x="6235700" y="3962400"/>
+            <a:ext cx="5397500" cy="1524000"/>
+          </a:xfrm>
+          <a:prstGeom prst="rect">
+            <a:avLst/>
+          </a:prstGeom>
+          <a:solidFill>
+            <a:srgbClr val="F2F5F8"/>
+          </a:solidFill>
+          <a:ln>
+            <a:noFill/>
+          </a:ln>
+        </p:spPr>
+        <p:txBody>
+          <a:bodyPr/>
+          <a:lstStyle/>
+          <a:p>
+            <a:endParaRPr/>
+          </a:p>
+        </p:txBody>
+      </p:sp>
+      <p:sp>
+        <p:nvSpPr>
+          <p:cNvPr id="133" name="GapRbar"/>
+          <p:cNvSpPr/>
+          <p:nvPr/>
+        </p:nvSpPr>
+        <p:spPr>
+          <a:xfrm>
+            <a:off x="6235700" y="3962400"/>
+            <a:ext cx="76200" cy="1524000"/>
+          </a:xfrm>
+          <a:prstGeom prst="rect">
+            <a:avLst/>
+          </a:prstGeom>
+          <a:solidFill>
+            <a:srgbClr val="B07A1E"/>
+          </a:solidFill>
+          <a:ln>
+            <a:noFill/>
+          </a:ln>
+        </p:spPr>
+        <p:txBody>
+          <a:bodyPr/>
+          <a:lstStyle/>
+          <a:p>
+            <a:endParaRPr/>
+          </a:p>
+        </p:txBody>
+      </p:sp>
+      <p:sp>
+        <p:nvSpPr>
+          <p:cNvPr id="134" name="GapLt"/>
+          <p:cNvSpPr txBox="1"/>
+          <p:nvPr/>
+        </p:nvSpPr>
+        <p:spPr>
+          <a:xfrm>
+            <a:off x="825500" y="4140200"/>
+            <a:ext cx="4889500" cy="1168400"/>
+          </a:xfrm>
+          <a:prstGeom prst="rect">
+            <a:avLst/>
+          </a:prstGeom>
+          <a:noFill/>
+        </p:spPr>
+        <p:txBody>
+          <a:bodyPr wrap="square" lIns="0" tIns="0" rIns="0" bIns="0" anchor="t">
+            <a:normAutofit/>
+          </a:bodyPr>
+          <a:lstStyle/>
+          <a:p>
+            <a:pPr marL="0" indent="0" algn="l">
+              <a:spcAft>
+                <a:spcPts val="400"/>
+              </a:spcAft>
+              <a:buNone/>
+            </a:pPr>
+            <a:r>
+              <a:rPr lang="en-US" sz="1150" b="1" spc="150" dirty="0">
+                <a:solidFill>
+                  <a:srgbClr val="1F7A6F"/>
+                </a:solidFill>
+                <a:latin typeface="Calibri" pitchFamily="34" charset="0"/>
+              </a:rPr>
+              <a:t>THE THROUGHPUT ISSUE</a:t>
+            </a:r>
+          </a:p>
+          <a:p>
+            <a:pPr marL="0" indent="0" algn="l">
+              <a:lnSpc>
+                <a:spcPct val="106000"/>
+              </a:lnSpc>
+              <a:buNone/>
+            </a:pPr>
+            <a:r>
+              <a:rPr lang="en-US" sz="1250" b="1" dirty="0">
+                <a:solidFill>
+                  <a:srgbClr val="16314E"/>
+                </a:solidFill>
+                <a:latin typeface="Calibri" pitchFamily="34" charset="0"/>
+              </a:rPr>
+              <a:t>Inflow dwarfs human reading capacity. </a:t>
+            </a:r>
+            <a:r>
+              <a:rPr lang="en-US" sz="1250" dirty="0">
+                <a:solidFill>
+                  <a:srgbClr val="5A6675"/>
+                </a:solidFill>
+                <a:latin typeface="Calibri" pitchFamily="34" charset="0"/>
+              </a:rPr>
+              <a:t>Even at full attention, news inflow outruns human reading, extraction and recording skills</a:t>
+            </a:r>
+          </a:p>
+        </p:txBody>
+      </p:sp>
+      <p:sp>
+        <p:nvSpPr>
+          <p:cNvPr id="135" name="GapRt"/>
+          <p:cNvSpPr txBox="1"/>
+          <p:nvPr/>
+        </p:nvSpPr>
+        <p:spPr>
+          <a:xfrm>
+            <a:off x="6515100" y="4140200"/>
+            <a:ext cx="4889500" cy="1168400"/>
+          </a:xfrm>
+          <a:prstGeom prst="rect">
+            <a:avLst/>
+          </a:prstGeom>
+          <a:noFill/>
+        </p:spPr>
+        <p:txBody>
+          <a:bodyPr wrap="square" lIns="0" tIns="0" rIns="0" bIns="0" anchor="t">
+            <a:normAutofit/>
+          </a:bodyPr>
+          <a:lstStyle/>
+          <a:p>
+            <a:pPr marL="0" indent="0" algn="l">
+              <a:spcAft>
+                <a:spcPts val="400"/>
+              </a:spcAft>
+              <a:buNone/>
+            </a:pPr>
+            <a:r>
+              <a:rPr lang="en-US" sz="1150" b="1" spc="150" dirty="0">
+                <a:solidFill>
+                  <a:srgbClr val="B07A1E"/>
+                </a:solidFill>
+                <a:latin typeface="Calibri" pitchFamily="34" charset="0"/>
+              </a:rPr>
+              <a:t>THE CONSISTENCY ISSUE</a:t>
+            </a:r>
+          </a:p>
+          <a:p>
+            <a:pPr marL="0" indent="0" algn="l">
+              <a:lnSpc>
+                <a:spcPct val="106000"/>
+              </a:lnSpc>
+              <a:buNone/>
+            </a:pPr>
+            <a:r>
+              <a:rPr lang="en-US" sz="1250" b="1" dirty="0">
+                <a:solidFill>
+                  <a:srgbClr val="16314E"/>
+                </a:solidFill>
+                <a:latin typeface="Calibri" pitchFamily="34" charset="0"/>
+              </a:rPr>
+              <a:t>Two analysts code the same article differently — </a:t>
+            </a:r>
+            <a:r>
+              <a:rPr lang="en-US" sz="1250" dirty="0">
+                <a:solidFill>
+                  <a:srgbClr val="5A6675"/>
+                </a:solidFill>
+                <a:latin typeface="Calibri" pitchFamily="34" charset="0"/>
+              </a:rPr>
+              <a:t>battle vs. violence-against-civilians, city vs. district, attributed vs. unknown fatalities. </a:t>
+            </a:r>
+          </a:p>
+        </p:txBody>
+      </p:sp>
+      <p:sp>
+        <p:nvSpPr>
+          <p:cNvPr id="136" name="Loop"/>
+          <p:cNvSpPr txBox="1"/>
+          <p:nvPr/>
+        </p:nvSpPr>
+        <p:spPr>
+          <a:xfrm>
+            <a:off x="546100" y="5613400"/>
+            <a:ext cx="11087100" cy="304800"/>
+          </a:xfrm>
+          <a:prstGeom prst="rect">
+            <a:avLst/>
+          </a:prstGeom>
+          <a:noFill/>
+        </p:spPr>
+        <p:txBody>
+          <a:bodyPr wrap="square" lIns="0" tIns="0" rIns="0" bIns="0" anchor="t">
+            <a:normAutofit/>
+          </a:bodyPr>
+          <a:lstStyle/>
+          <a:p>
+            <a:pPr marL="0" indent="0" algn="ctr">
+              <a:buNone/>
+            </a:pPr>
+            <a:r>
+              <a:rPr lang="en-US" sz="1200" b="1" dirty="0">
+                <a:solidFill>
+                  <a:srgbClr val="2A9D8F"/>
+                </a:solidFill>
+                <a:latin typeface="Calibri" pitchFamily="34" charset="0"/>
+              </a:rPr>
+              <a:t>↻  The two issues feed each other:</a:t>
+            </a:r>
+            <a:r>
+              <a:rPr lang="en-US" sz="1200" dirty="0">
+                <a:solidFill>
+                  <a:srgbClr val="5A6675"/>
+                </a:solidFill>
+                <a:latin typeface="Calibri" pitchFamily="34" charset="0"/>
+              </a:rPr>
+              <a:t>  more analysts to clear backlog → less consistency;  tighter manual rules → more backlog.</a:t>
+            </a:r>
+          </a:p>
+        </p:txBody>
+      </p:sp>
+    </p:spTree>
+    <p:extLst>
+      <p:ext uri="{BB962C8B-B14F-4D97-AF65-F5344CB8AC3E}">
+        <p14:creationId xmlns:p14="http://schemas.microsoft.com/office/powerpoint/2010/main" val="2563090385"/>
+      </p:ext>
+    </p:extLst>
+  </p:cSld>
+  <p:clrMapOvr>
+    <a:masterClrMapping/>
+  </p:clrMapOvr>
+</p:sld>
+</file>
+
+<file path=ppt/slides/slide4.xml><?xml version="1.0" encoding="utf-8"?>
+<p:sld xmlns:a="http://schemas.openxmlformats.org/drawingml/2006/main" xmlns:r="http://schemas.openxmlformats.org/officeDocument/2006/relationships" xmlns:p="http://schemas.openxmlformats.org/presentationml/2006/main">
   <p:cSld name="Slide 3">
     <p:bg>
       <p:bgPr>
@@ -14987,7 +16102,7 @@
                 <a:ea typeface="Calibri" pitchFamily="34" charset="-122"/>
                 <a:cs typeface="Calibri" pitchFamily="34" charset="-120"/>
               </a:rPr>
-              <a:t>Analysts at AU-CEWS, ECOWAS, IGAD, UN OCHA and ACLED convert raw news into structured event databases — one row per incident — that drive peacekeeping mandates, humanitarian prioritisation and early warning.</a:t>
+              <a:t>Analysts at AU-CEWS convert raw news into structured event databases — one row per incident — that drive peacekeeping mandates, humanitarian prioritisation and early warning.</a:t>
             </a:r>
             <a:endParaRPr lang="en-US" sz="1400" dirty="0"/>
           </a:p>
@@ -15275,7 +16390,7 @@
                 <a:ea typeface="Calibri" pitchFamily="34" charset="-122"/>
                 <a:cs typeface="Calibri" pitchFamily="34" charset="-120"/>
               </a:rPr>
-              <a:t>active armed conflicts on the continent in any given year (UCDP)</a:t>
+              <a:t>active armed conflicts on the continent in any given year</a:t>
             </a:r>
             <a:endParaRPr lang="en-US" sz="1150" dirty="0"/>
           </a:p>
@@ -15707,7 +16822,7 @@
                 <a:ea typeface="Calibri" pitchFamily="34" charset="-122"/>
                 <a:cs typeface="Calibri" pitchFamily="34" charset="-120"/>
               </a:rPr>
-              <a:t>AU-CEWS · ECOWAS · IGAD CEWARN</a:t>
+              <a:t>AU-CEWS</a:t>
             </a:r>
             <a:r>
               <a:rPr lang="en-US" sz="1250" dirty="0">
@@ -15718,7 +16833,7 @@
                 <a:ea typeface="Calibri" pitchFamily="34" charset="-122"/>
                 <a:cs typeface="Calibri" pitchFamily="34" charset="-120"/>
               </a:rPr>
-              <a:t> — continental and regional early-warning reporting</a:t>
+              <a:t>— continental and regional early-warning reporting</a:t>
             </a:r>
             <a:endParaRPr lang="en-US" sz="1250" dirty="0"/>
           </a:p>
@@ -15738,7 +16853,7 @@
                 <a:ea typeface="Calibri" pitchFamily="34" charset="-122"/>
                 <a:cs typeface="Calibri" pitchFamily="34" charset="-120"/>
               </a:rPr>
-              <a:t>UN OCHA · UNHCR · DPPA</a:t>
+              <a:t>UNHCR </a:t>
             </a:r>
             <a:r>
               <a:rPr lang="en-US" sz="1250" dirty="0">
@@ -15749,7 +16864,7 @@
                 <a:ea typeface="Calibri" pitchFamily="34" charset="-122"/>
                 <a:cs typeface="Calibri" pitchFamily="34" charset="-120"/>
               </a:rPr>
-              <a:t> — relief prioritisation, refugee planning, mediation</a:t>
+              <a:t>— relief prioritisation, refugee planning, mediation</a:t>
             </a:r>
             <a:endParaRPr lang="en-US" sz="1250" dirty="0"/>
           </a:p>
@@ -15780,7 +16895,7 @@
                 <a:ea typeface="Calibri" pitchFamily="34" charset="-122"/>
                 <a:cs typeface="Calibri" pitchFamily="34" charset="-120"/>
               </a:rPr>
-              <a:t> — conflict studies, Crisis Group, ACAPS</a:t>
+              <a:t> — conflict studies, Crisis Group</a:t>
             </a:r>
             <a:endParaRPr lang="en-US" sz="1250" dirty="0"/>
           </a:p>
@@ -15941,7 +17056,7 @@
 </p:sld>
 </file>
 
-<file path=ppt/slides/slide4.xml><?xml version="1.0" encoding="utf-8"?>
+<file path=ppt/slides/slide5.xml><?xml version="1.0" encoding="utf-8"?>
 <p:sld xmlns:a="http://schemas.openxmlformats.org/drawingml/2006/main" xmlns:r="http://schemas.openxmlformats.org/officeDocument/2006/relationships" xmlns:p="http://schemas.openxmlformats.org/presentationml/2006/main">
   <p:cSld name="Slide 4">
     <p:bg>
@@ -17450,88 +18565,6 @@
           </a:p>
         </p:txBody>
       </p:sp>
-      <p:sp>
-        <p:nvSpPr>
-          <p:cNvPr id="44" name="Shape 42"/>
-          <p:cNvSpPr/>
-          <p:nvPr/>
-        </p:nvSpPr>
-        <p:spPr>
-          <a:xfrm>
-            <a:off x="548640" y="5349240"/>
-            <a:ext cx="11091672" cy="914400"/>
-          </a:xfrm>
-          <a:prstGeom prst="rect">
-            <a:avLst/>
-          </a:prstGeom>
-          <a:solidFill>
-            <a:srgbClr val="EAF2F0"/>
-          </a:solidFill>
-          <a:ln w="12700">
-            <a:solidFill>
-              <a:srgbClr val="2A9D8F"/>
-            </a:solidFill>
-            <a:prstDash val="solid"/>
-          </a:ln>
-        </p:spPr>
-        <p:txBody>
-          <a:bodyPr/>
-          <a:lstStyle/>
-          <a:p>
-            <a:endParaRPr lang="en-ET"/>
-          </a:p>
-        </p:txBody>
-      </p:sp>
-      <p:sp>
-        <p:nvSpPr>
-          <p:cNvPr id="45" name="Text 43"/>
-          <p:cNvSpPr/>
-          <p:nvPr/>
-        </p:nvSpPr>
-        <p:spPr>
-          <a:xfrm>
-            <a:off x="777240" y="5486400"/>
-            <a:ext cx="10607040" cy="685800"/>
-          </a:xfrm>
-          <a:prstGeom prst="rect">
-            <a:avLst/>
-          </a:prstGeom>
-          <a:noFill/>
-          <a:ln/>
-        </p:spPr>
-        <p:txBody>
-          <a:bodyPr wrap="square" lIns="0" tIns="0" rIns="0" bIns="0" rtlCol="0" anchor="ctr"/>
-          <a:lstStyle/>
-          <a:p>
-            <a:pPr marL="0" indent="0">
-              <a:buNone/>
-            </a:pPr>
-            <a:r>
-              <a:rPr lang="en-US" sz="1350" b="1" dirty="0">
-                <a:solidFill>
-                  <a:srgbClr val="16314E"/>
-                </a:solidFill>
-                <a:latin typeface="Calibri" pitchFamily="34" charset="0"/>
-                <a:ea typeface="Calibri" pitchFamily="34" charset="-122"/>
-                <a:cs typeface="Calibri" pitchFamily="34" charset="-120"/>
-              </a:rPr>
-              <a:t>The thesis does not claim to replace analysts. </a:t>
-            </a:r>
-            <a:r>
-              <a:rPr lang="en-US" sz="1350" dirty="0">
-                <a:solidFill>
-                  <a:srgbClr val="1D242E"/>
-                </a:solidFill>
-                <a:latin typeface="Calibri" pitchFamily="34" charset="0"/>
-                <a:ea typeface="Calibri" pitchFamily="34" charset="-122"/>
-                <a:cs typeface="Calibri" pitchFamily="34" charset="-120"/>
-              </a:rPr>
-              <a:t>It turns an article-reading task into an article-reviewing task — first-pass extraction handled by the system, judgement kept with the analyst. Halving the load frees ~3 FTE to cover currently under-monitored theatres.</a:t>
-            </a:r>
-            <a:endParaRPr lang="en-US" sz="1350" dirty="0"/>
-          </a:p>
-        </p:txBody>
-      </p:sp>
     </p:spTree>
     <p:extLst>
       <p:ext uri="{BB962C8B-B14F-4D97-AF65-F5344CB8AC3E}">
@@ -17545,7 +18578,7 @@
 </p:sld>
 </file>
 
-<file path=ppt/slides/slide5.xml><?xml version="1.0" encoding="utf-8"?>
+<file path=ppt/slides/slide6.xml><?xml version="1.0" encoding="utf-8"?>
 <p:sld xmlns:a="http://schemas.openxmlformats.org/drawingml/2006/main" xmlns:r="http://schemas.openxmlformats.org/officeDocument/2006/relationships" xmlns:p="http://schemas.openxmlformats.org/presentationml/2006/main">
   <p:cSld name="Slide 5">
     <p:bg>
@@ -17720,7 +18753,7 @@
                 <a:ea typeface="Georgia" pitchFamily="34" charset="-122"/>
                 <a:cs typeface="Georgia" pitchFamily="34" charset="-120"/>
               </a:rPr>
-              <a:t>Why automating this is harder than generic NER</a:t>
+              <a:t>Why automating this is harder</a:t>
             </a:r>
             <a:endParaRPr lang="en-US" sz="2900" dirty="0"/>
           </a:p>
@@ -18470,7 +19503,7 @@
                 <a:ea typeface="Calibri" pitchFamily="34" charset="-122"/>
                 <a:cs typeface="Calibri" pitchFamily="34" charset="-120"/>
               </a:rPr>
-              <a:t>Role-distinguished output is not standard NER</a:t>
+              <a:t>Role-distinguished output</a:t>
             </a:r>
             <a:endParaRPr lang="en-US" sz="1300" dirty="0"/>
           </a:p>
@@ -18863,10 +19896,9 @@
                   <a:srgbClr val="16314E"/>
                 </a:solidFill>
                 <a:latin typeface="Calibri" pitchFamily="34" charset="0"/>
-                <a:ea typeface="Calibri" pitchFamily="34" charset="-122"/>
-                <a:cs typeface="Calibri" pitchFamily="34" charset="-120"/>
-              </a:rPr>
-              <a:t>Out-of-distribution styles</a:t>
+                <a:cs typeface="Calibri" pitchFamily="34" charset="-120"/>
+              </a:rPr>
+              <a:t>Event Distribution Format</a:t>
             </a:r>
             <a:endParaRPr lang="en-US" sz="1300" dirty="0"/>
           </a:p>
@@ -18908,7 +19940,7 @@
                 <a:ea typeface="Calibri" pitchFamily="34" charset="-122"/>
                 <a:cs typeface="Calibri" pitchFamily="34" charset="-120"/>
               </a:rPr>
-              <a:t>Wire copy, syndicated translations, local outlets, citizen journalism — phrasing varies wildly.</a:t>
+              <a:t>Wire copy, local outlets, citizen journalism — phrasing varies wildly.</a:t>
             </a:r>
             <a:endParaRPr lang="en-US" sz="1080" dirty="0"/>
           </a:p>
@@ -19011,7 +20043,7 @@
                 <a:ea typeface="Calibri" pitchFamily="34" charset="-122"/>
                 <a:cs typeface="Calibri" pitchFamily="34" charset="-120"/>
               </a:rPr>
-              <a:t>The operational pain point in one line:  </a:t>
+              <a:t>The operational pain point:  </a:t>
             </a:r>
             <a:r>
               <a:rPr lang="en-US" sz="1450" dirty="0">
@@ -19041,7 +20073,7 @@
 </p:sld>
 </file>
 
-<file path=ppt/slides/slide6.xml><?xml version="1.0" encoding="utf-8"?>
+<file path=ppt/slides/slide7.xml><?xml version="1.0" encoding="utf-8"?>
 <p:sld xmlns:a="http://schemas.openxmlformats.org/drawingml/2006/main" xmlns:r="http://schemas.openxmlformats.org/officeDocument/2006/relationships" xmlns:p="http://schemas.openxmlformats.org/presentationml/2006/main">
   <p:cSld name="Slide 6">
     <p:bg>
@@ -19177,7 +20209,7 @@
                 <a:ea typeface="Georgia" pitchFamily="34" charset="-122"/>
                 <a:cs typeface="Georgia" pitchFamily="34" charset="-120"/>
               </a:rPr>
-              <a:t>The landscape: no existing system fills all four cells</a:t>
+              <a:t>The current landscape</a:t>
             </a:r>
             <a:endParaRPr lang="en-US" sz="2900" dirty="0"/>
           </a:p>
@@ -19192,14 +20224,14 @@
           <p:nvPr>
             <p:extLst>
               <p:ext uri="{D42A27DB-BD31-4B8C-83A1-F6EECF244321}">
-                <p14:modId xmlns:p14="http://schemas.microsoft.com/office/powerpoint/2010/main" val="1208887826"/>
+                <p14:modId xmlns:p14="http://schemas.microsoft.com/office/powerpoint/2010/main" val="2390156560"/>
               </p:ext>
             </p:extLst>
           </p:nvPr>
         </p:nvGraphicFramePr>
         <p:xfrm>
           <a:off x="548640" y="1691640"/>
-          <a:ext cx="11091672" cy="4389120"/>
+          <a:ext cx="11091672" cy="2724912"/>
         </p:xfrm>
         <a:graphic>
           <a:graphicData uri="http://schemas.openxmlformats.org/drawingml/2006/table">
@@ -19696,7 +20728,7 @@
                           <a:ea typeface="Calibri" pitchFamily="34" charset="-122"/>
                           <a:cs typeface="Calibri" pitchFamily="34" charset="-120"/>
                         </a:rPr>
-                        <a:t>~ right shape, weeks late</a:t>
+                        <a:t>~ right shape, conflict focused</a:t>
                       </a:r>
                       <a:endParaRPr lang="en-US" sz="1300" dirty="0">
                         <a:latin typeface="Calibri" charset="0"/>
@@ -19954,742 +20986,6 @@
                 <a:extLst>
                   <a:ext uri="{0D108BD9-81ED-4DB2-BD59-A6C34878D82A}">
                     <a16:rowId xmlns:a16="http://schemas.microsoft.com/office/drawing/2014/main" val="10001"/>
-                  </a:ext>
-                </a:extLst>
-              </a:tr>
-              <a:tr h="566928">
-                <a:tc>
-                  <a:txBody>
-                    <a:bodyPr/>
-                    <a:lstStyle/>
-                    <a:p>
-                      <a:pPr marL="0" indent="0">
-                        <a:buNone/>
-                      </a:pPr>
-                      <a:r>
-                        <a:rPr lang="en-US" sz="1250" b="1" dirty="0">
-                          <a:solidFill>
-                            <a:srgbClr val="16314E"/>
-                          </a:solidFill>
-                          <a:latin typeface="Calibri" pitchFamily="34" charset="0"/>
-                          <a:ea typeface="Calibri" pitchFamily="34" charset="-122"/>
-                          <a:cs typeface="Calibri" pitchFamily="34" charset="-120"/>
-                        </a:rPr>
-                        <a:t>ICEWS</a:t>
-                      </a:r>
-                      <a:endParaRPr lang="en-US" sz="1200" dirty="0">
-                        <a:latin typeface="Calibri" charset="0"/>
-                        <a:ea typeface="Calibri" charset="0"/>
-                        <a:cs typeface="Calibri" charset="0"/>
-                      </a:endParaRPr>
-                    </a:p>
-                    <a:p>
-                      <a:pPr marL="0" indent="0">
-                        <a:buNone/>
-                      </a:pPr>
-                      <a:r>
-                        <a:rPr lang="en-US" sz="950" dirty="0">
-                          <a:solidFill>
-                            <a:srgbClr val="5A6675"/>
-                          </a:solidFill>
-                          <a:latin typeface="Calibri" pitchFamily="34" charset="0"/>
-                          <a:ea typeface="Calibri" pitchFamily="34" charset="-122"/>
-                          <a:cs typeface="Calibri" pitchFamily="34" charset="-120"/>
-                        </a:rPr>
-                        <a:t>automated, closed</a:t>
-                      </a:r>
-                      <a:endParaRPr lang="en-US" sz="1200" dirty="0">
-                        <a:latin typeface="Calibri" charset="0"/>
-                        <a:ea typeface="Calibri" charset="0"/>
-                        <a:cs typeface="Calibri" charset="0"/>
-                      </a:endParaRPr>
-                    </a:p>
-                  </a:txBody>
-                  <a:tcPr marL="54864" marR="54864" marT="54864" marB="54864" anchor="ctr">
-                    <a:lnL w="9525" cap="flat" cmpd="sng" algn="ctr">
-                      <a:solidFill>
-                        <a:srgbClr val="C9D3DE"/>
-                      </a:solidFill>
-                      <a:prstDash val="solid"/>
-                      <a:round/>
-                      <a:headEnd type="none" w="med" len="med"/>
-                      <a:tailEnd type="none" w="med" len="med"/>
-                    </a:lnL>
-                    <a:lnR w="9525" cap="flat" cmpd="sng" algn="ctr">
-                      <a:solidFill>
-                        <a:srgbClr val="C9D3DE"/>
-                      </a:solidFill>
-                      <a:prstDash val="solid"/>
-                      <a:round/>
-                      <a:headEnd type="none" w="med" len="med"/>
-                      <a:tailEnd type="none" w="med" len="med"/>
-                    </a:lnR>
-                    <a:lnT w="9525" cap="flat" cmpd="sng" algn="ctr">
-                      <a:solidFill>
-                        <a:srgbClr val="C9D3DE"/>
-                      </a:solidFill>
-                      <a:prstDash val="solid"/>
-                      <a:round/>
-                      <a:headEnd type="none" w="med" len="med"/>
-                      <a:tailEnd type="none" w="med" len="med"/>
-                    </a:lnT>
-                    <a:lnB w="9525" cap="flat" cmpd="sng" algn="ctr">
-                      <a:solidFill>
-                        <a:srgbClr val="C9D3DE"/>
-                      </a:solidFill>
-                      <a:prstDash val="solid"/>
-                      <a:round/>
-                      <a:headEnd type="none" w="med" len="med"/>
-                      <a:tailEnd type="none" w="med" len="med"/>
-                    </a:lnB>
-                    <a:solidFill>
-                      <a:srgbClr val="FFFFFF"/>
-                    </a:solidFill>
-                  </a:tcPr>
-                </a:tc>
-                <a:tc>
-                  <a:txBody>
-                    <a:bodyPr/>
-                    <a:lstStyle/>
-                    <a:p>
-                      <a:pPr marL="0" indent="0" algn="ctr">
-                        <a:buNone/>
-                      </a:pPr>
-                      <a:r>
-                        <a:rPr lang="en-US" sz="1300" b="1" dirty="0">
-                          <a:solidFill>
-                            <a:srgbClr val="C0392B"/>
-                          </a:solidFill>
-                          <a:latin typeface="Calibri" pitchFamily="34" charset="0"/>
-                          <a:ea typeface="Calibri" pitchFamily="34" charset="-122"/>
-                          <a:cs typeface="Calibri" pitchFamily="34" charset="-120"/>
-                        </a:rPr>
-                        <a:t>✗ generic CAMEO schema</a:t>
-                      </a:r>
-                      <a:endParaRPr lang="en-US" sz="1300" dirty="0">
-                        <a:latin typeface="Calibri" charset="0"/>
-                        <a:ea typeface="Calibri" charset="0"/>
-                        <a:cs typeface="Calibri" charset="0"/>
-                      </a:endParaRPr>
-                    </a:p>
-                  </a:txBody>
-                  <a:tcPr marL="54864" marR="54864" marT="54864" marB="54864" anchor="ctr">
-                    <a:lnL w="9525" cap="flat" cmpd="sng" algn="ctr">
-                      <a:solidFill>
-                        <a:srgbClr val="C9D3DE"/>
-                      </a:solidFill>
-                      <a:prstDash val="solid"/>
-                      <a:round/>
-                      <a:headEnd type="none" w="med" len="med"/>
-                      <a:tailEnd type="none" w="med" len="med"/>
-                    </a:lnL>
-                    <a:lnR w="9525" cap="flat" cmpd="sng" algn="ctr">
-                      <a:solidFill>
-                        <a:srgbClr val="C9D3DE"/>
-                      </a:solidFill>
-                      <a:prstDash val="solid"/>
-                      <a:round/>
-                      <a:headEnd type="none" w="med" len="med"/>
-                      <a:tailEnd type="none" w="med" len="med"/>
-                    </a:lnR>
-                    <a:lnT w="9525" cap="flat" cmpd="sng" algn="ctr">
-                      <a:solidFill>
-                        <a:srgbClr val="C9D3DE"/>
-                      </a:solidFill>
-                      <a:prstDash val="solid"/>
-                      <a:round/>
-                      <a:headEnd type="none" w="med" len="med"/>
-                      <a:tailEnd type="none" w="med" len="med"/>
-                    </a:lnT>
-                    <a:lnB w="9525" cap="flat" cmpd="sng" algn="ctr">
-                      <a:solidFill>
-                        <a:srgbClr val="C9D3DE"/>
-                      </a:solidFill>
-                      <a:prstDash val="solid"/>
-                      <a:round/>
-                      <a:headEnd type="none" w="med" len="med"/>
-                      <a:tailEnd type="none" w="med" len="med"/>
-                    </a:lnB>
-                    <a:solidFill>
-                      <a:srgbClr val="FFFFFF"/>
-                    </a:solidFill>
-                  </a:tcPr>
-                </a:tc>
-                <a:tc>
-                  <a:txBody>
-                    <a:bodyPr/>
-                    <a:lstStyle/>
-                    <a:p>
-                      <a:pPr marL="0" indent="0" algn="ctr">
-                        <a:buNone/>
-                      </a:pPr>
-                      <a:r>
-                        <a:rPr lang="en-US" sz="1300" b="1" dirty="0">
-                          <a:solidFill>
-                            <a:srgbClr val="B98A1F"/>
-                          </a:solidFill>
-                          <a:latin typeface="Calibri" pitchFamily="34" charset="0"/>
-                          <a:ea typeface="Calibri" pitchFamily="34" charset="-122"/>
-                          <a:cs typeface="Calibri" pitchFamily="34" charset="-120"/>
-                        </a:rPr>
-                        <a:t>? unauditable</a:t>
-                      </a:r>
-                      <a:endParaRPr lang="en-US" sz="1300" dirty="0">
-                        <a:latin typeface="Calibri" charset="0"/>
-                        <a:ea typeface="Calibri" charset="0"/>
-                        <a:cs typeface="Calibri" charset="0"/>
-                      </a:endParaRPr>
-                    </a:p>
-                  </a:txBody>
-                  <a:tcPr marL="54864" marR="54864" marT="54864" marB="54864" anchor="ctr">
-                    <a:lnL w="9525" cap="flat" cmpd="sng" algn="ctr">
-                      <a:solidFill>
-                        <a:srgbClr val="C9D3DE"/>
-                      </a:solidFill>
-                      <a:prstDash val="solid"/>
-                      <a:round/>
-                      <a:headEnd type="none" w="med" len="med"/>
-                      <a:tailEnd type="none" w="med" len="med"/>
-                    </a:lnL>
-                    <a:lnR w="9525" cap="flat" cmpd="sng" algn="ctr">
-                      <a:solidFill>
-                        <a:srgbClr val="C9D3DE"/>
-                      </a:solidFill>
-                      <a:prstDash val="solid"/>
-                      <a:round/>
-                      <a:headEnd type="none" w="med" len="med"/>
-                      <a:tailEnd type="none" w="med" len="med"/>
-                    </a:lnR>
-                    <a:lnT w="9525" cap="flat" cmpd="sng" algn="ctr">
-                      <a:solidFill>
-                        <a:srgbClr val="C9D3DE"/>
-                      </a:solidFill>
-                      <a:prstDash val="solid"/>
-                      <a:round/>
-                      <a:headEnd type="none" w="med" len="med"/>
-                      <a:tailEnd type="none" w="med" len="med"/>
-                    </a:lnT>
-                    <a:lnB w="9525" cap="flat" cmpd="sng" algn="ctr">
-                      <a:solidFill>
-                        <a:srgbClr val="C9D3DE"/>
-                      </a:solidFill>
-                      <a:prstDash val="solid"/>
-                      <a:round/>
-                      <a:headEnd type="none" w="med" len="med"/>
-                      <a:tailEnd type="none" w="med" len="med"/>
-                    </a:lnB>
-                    <a:solidFill>
-                      <a:srgbClr val="FFFFFF"/>
-                    </a:solidFill>
-                  </a:tcPr>
-                </a:tc>
-                <a:tc>
-                  <a:txBody>
-                    <a:bodyPr/>
-                    <a:lstStyle/>
-                    <a:p>
-                      <a:pPr marL="0" indent="0" algn="ctr">
-                        <a:buNone/>
-                      </a:pPr>
-                      <a:r>
-                        <a:rPr lang="en-US" sz="1300" b="1" dirty="0">
-                          <a:solidFill>
-                            <a:srgbClr val="C0392B"/>
-                          </a:solidFill>
-                          <a:latin typeface="Calibri" pitchFamily="34" charset="0"/>
-                          <a:ea typeface="Calibri" pitchFamily="34" charset="-122"/>
-                          <a:cs typeface="Calibri" pitchFamily="34" charset="-120"/>
-                        </a:rPr>
-                        <a:t>✗ closed KB</a:t>
-                      </a:r>
-                      <a:endParaRPr lang="en-US" sz="1300" dirty="0">
-                        <a:latin typeface="Calibri" charset="0"/>
-                        <a:ea typeface="Calibri" charset="0"/>
-                        <a:cs typeface="Calibri" charset="0"/>
-                      </a:endParaRPr>
-                    </a:p>
-                  </a:txBody>
-                  <a:tcPr marL="54864" marR="54864" marT="54864" marB="54864" anchor="ctr">
-                    <a:lnL w="9525" cap="flat" cmpd="sng" algn="ctr">
-                      <a:solidFill>
-                        <a:srgbClr val="C9D3DE"/>
-                      </a:solidFill>
-                      <a:prstDash val="solid"/>
-                      <a:round/>
-                      <a:headEnd type="none" w="med" len="med"/>
-                      <a:tailEnd type="none" w="med" len="med"/>
-                    </a:lnL>
-                    <a:lnR w="9525" cap="flat" cmpd="sng" algn="ctr">
-                      <a:solidFill>
-                        <a:srgbClr val="C9D3DE"/>
-                      </a:solidFill>
-                      <a:prstDash val="solid"/>
-                      <a:round/>
-                      <a:headEnd type="none" w="med" len="med"/>
-                      <a:tailEnd type="none" w="med" len="med"/>
-                    </a:lnR>
-                    <a:lnT w="9525" cap="flat" cmpd="sng" algn="ctr">
-                      <a:solidFill>
-                        <a:srgbClr val="C9D3DE"/>
-                      </a:solidFill>
-                      <a:prstDash val="solid"/>
-                      <a:round/>
-                      <a:headEnd type="none" w="med" len="med"/>
-                      <a:tailEnd type="none" w="med" len="med"/>
-                    </a:lnT>
-                    <a:lnB w="9525" cap="flat" cmpd="sng" algn="ctr">
-                      <a:solidFill>
-                        <a:srgbClr val="C9D3DE"/>
-                      </a:solidFill>
-                      <a:prstDash val="solid"/>
-                      <a:round/>
-                      <a:headEnd type="none" w="med" len="med"/>
-                      <a:tailEnd type="none" w="med" len="med"/>
-                    </a:lnB>
-                    <a:solidFill>
-                      <a:srgbClr val="FFFFFF"/>
-                    </a:solidFill>
-                  </a:tcPr>
-                </a:tc>
-                <a:tc>
-                  <a:txBody>
-                    <a:bodyPr/>
-                    <a:lstStyle/>
-                    <a:p>
-                      <a:pPr marL="0" indent="0" algn="ctr">
-                        <a:buNone/>
-                      </a:pPr>
-                      <a:r>
-                        <a:rPr lang="en-US" sz="1300" b="1" dirty="0">
-                          <a:solidFill>
-                            <a:srgbClr val="C0392B"/>
-                          </a:solidFill>
-                          <a:latin typeface="Calibri" pitchFamily="34" charset="0"/>
-                          <a:ea typeface="Calibri" pitchFamily="34" charset="-122"/>
-                          <a:cs typeface="Calibri" pitchFamily="34" charset="-120"/>
-                        </a:rPr>
-                        <a:t>✗ not installable</a:t>
-                      </a:r>
-                      <a:endParaRPr lang="en-US" sz="1300" dirty="0">
-                        <a:latin typeface="Calibri" charset="0"/>
-                        <a:ea typeface="Calibri" charset="0"/>
-                        <a:cs typeface="Calibri" charset="0"/>
-                      </a:endParaRPr>
-                    </a:p>
-                  </a:txBody>
-                  <a:tcPr marL="54864" marR="54864" marT="54864" marB="54864" anchor="ctr">
-                    <a:lnL w="9525" cap="flat" cmpd="sng" algn="ctr">
-                      <a:solidFill>
-                        <a:srgbClr val="C9D3DE"/>
-                      </a:solidFill>
-                      <a:prstDash val="solid"/>
-                      <a:round/>
-                      <a:headEnd type="none" w="med" len="med"/>
-                      <a:tailEnd type="none" w="med" len="med"/>
-                    </a:lnL>
-                    <a:lnR w="9525" cap="flat" cmpd="sng" algn="ctr">
-                      <a:solidFill>
-                        <a:srgbClr val="C9D3DE"/>
-                      </a:solidFill>
-                      <a:prstDash val="solid"/>
-                      <a:round/>
-                      <a:headEnd type="none" w="med" len="med"/>
-                      <a:tailEnd type="none" w="med" len="med"/>
-                    </a:lnR>
-                    <a:lnT w="9525" cap="flat" cmpd="sng" algn="ctr">
-                      <a:solidFill>
-                        <a:srgbClr val="C9D3DE"/>
-                      </a:solidFill>
-                      <a:prstDash val="solid"/>
-                      <a:round/>
-                      <a:headEnd type="none" w="med" len="med"/>
-                      <a:tailEnd type="none" w="med" len="med"/>
-                    </a:lnT>
-                    <a:lnB w="9525" cap="flat" cmpd="sng" algn="ctr">
-                      <a:solidFill>
-                        <a:srgbClr val="C9D3DE"/>
-                      </a:solidFill>
-                      <a:prstDash val="solid"/>
-                      <a:round/>
-                      <a:headEnd type="none" w="med" len="med"/>
-                      <a:tailEnd type="none" w="med" len="med"/>
-                    </a:lnB>
-                    <a:solidFill>
-                      <a:srgbClr val="FFFFFF"/>
-                    </a:solidFill>
-                  </a:tcPr>
-                </a:tc>
-                <a:extLst>
-                  <a:ext uri="{0D108BD9-81ED-4DB2-BD59-A6C34878D82A}">
-                    <a16:rowId xmlns:a16="http://schemas.microsoft.com/office/drawing/2014/main" val="10002"/>
-                  </a:ext>
-                </a:extLst>
-              </a:tr>
-              <a:tr h="566928">
-                <a:tc>
-                  <a:txBody>
-                    <a:bodyPr/>
-                    <a:lstStyle/>
-                    <a:p>
-                      <a:pPr marL="0" indent="0">
-                        <a:buNone/>
-                      </a:pPr>
-                      <a:r>
-                        <a:rPr lang="en-US" sz="1250" b="1" dirty="0">
-                          <a:solidFill>
-                            <a:srgbClr val="16314E"/>
-                          </a:solidFill>
-                          <a:latin typeface="Calibri" pitchFamily="34" charset="0"/>
-                          <a:ea typeface="Calibri" pitchFamily="34" charset="-122"/>
-                          <a:cs typeface="Calibri" pitchFamily="34" charset="-120"/>
-                        </a:rPr>
-                        <a:t>GDELT</a:t>
-                      </a:r>
-                      <a:endParaRPr lang="en-US" sz="1200" dirty="0">
-                        <a:latin typeface="Calibri" charset="0"/>
-                        <a:ea typeface="Calibri" charset="0"/>
-                        <a:cs typeface="Calibri" charset="0"/>
-                      </a:endParaRPr>
-                    </a:p>
-                    <a:p>
-                      <a:pPr marL="0" indent="0">
-                        <a:buNone/>
-                      </a:pPr>
-                      <a:r>
-                        <a:rPr lang="en-US" sz="950" dirty="0">
-                          <a:solidFill>
-                            <a:srgbClr val="5A6675"/>
-                          </a:solidFill>
-                          <a:latin typeface="Calibri" pitchFamily="34" charset="0"/>
-                          <a:ea typeface="Calibri" pitchFamily="34" charset="-122"/>
-                          <a:cs typeface="Calibri" pitchFamily="34" charset="-120"/>
-                        </a:rPr>
-                        <a:t>automated, planetary</a:t>
-                      </a:r>
-                      <a:endParaRPr lang="en-US" sz="1200" dirty="0">
-                        <a:latin typeface="Calibri" charset="0"/>
-                        <a:ea typeface="Calibri" charset="0"/>
-                        <a:cs typeface="Calibri" charset="0"/>
-                      </a:endParaRPr>
-                    </a:p>
-                  </a:txBody>
-                  <a:tcPr marL="54864" marR="54864" marT="54864" marB="54864" anchor="ctr">
-                    <a:lnL w="9525" cap="flat" cmpd="sng" algn="ctr">
-                      <a:solidFill>
-                        <a:srgbClr val="C9D3DE"/>
-                      </a:solidFill>
-                      <a:prstDash val="solid"/>
-                      <a:round/>
-                      <a:headEnd type="none" w="med" len="med"/>
-                      <a:tailEnd type="none" w="med" len="med"/>
-                    </a:lnL>
-                    <a:lnR w="9525" cap="flat" cmpd="sng" algn="ctr">
-                      <a:solidFill>
-                        <a:srgbClr val="C9D3DE"/>
-                      </a:solidFill>
-                      <a:prstDash val="solid"/>
-                      <a:round/>
-                      <a:headEnd type="none" w="med" len="med"/>
-                      <a:tailEnd type="none" w="med" len="med"/>
-                    </a:lnR>
-                    <a:lnT w="9525" cap="flat" cmpd="sng" algn="ctr">
-                      <a:solidFill>
-                        <a:srgbClr val="C9D3DE"/>
-                      </a:solidFill>
-                      <a:prstDash val="solid"/>
-                      <a:round/>
-                      <a:headEnd type="none" w="med" len="med"/>
-                      <a:tailEnd type="none" w="med" len="med"/>
-                    </a:lnT>
-                    <a:lnB w="9525" cap="flat" cmpd="sng" algn="ctr">
-                      <a:solidFill>
-                        <a:srgbClr val="C9D3DE"/>
-                      </a:solidFill>
-                      <a:prstDash val="solid"/>
-                      <a:round/>
-                      <a:headEnd type="none" w="med" len="med"/>
-                      <a:tailEnd type="none" w="med" len="med"/>
-                    </a:lnB>
-                    <a:solidFill>
-                      <a:srgbClr val="FFFFFF"/>
-                    </a:solidFill>
-                  </a:tcPr>
-                </a:tc>
-                <a:tc>
-                  <a:txBody>
-                    <a:bodyPr/>
-                    <a:lstStyle/>
-                    <a:p>
-                      <a:pPr marL="0" indent="0" algn="ctr">
-                        <a:buNone/>
-                      </a:pPr>
-                      <a:r>
-                        <a:rPr lang="en-US" sz="1300" b="1" dirty="0">
-                          <a:solidFill>
-                            <a:srgbClr val="C0392B"/>
-                          </a:solidFill>
-                          <a:latin typeface="Calibri" pitchFamily="34" charset="0"/>
-                          <a:ea typeface="Calibri" pitchFamily="34" charset="-122"/>
-                          <a:cs typeface="Calibri" pitchFamily="34" charset="-120"/>
-                        </a:rPr>
-                        <a:t>✗ mentions, not incidents</a:t>
-                      </a:r>
-                      <a:endParaRPr lang="en-US" sz="1300" dirty="0">
-                        <a:latin typeface="Calibri" charset="0"/>
-                        <a:ea typeface="Calibri" charset="0"/>
-                        <a:cs typeface="Calibri" charset="0"/>
-                      </a:endParaRPr>
-                    </a:p>
-                  </a:txBody>
-                  <a:tcPr marL="54864" marR="54864" marT="54864" marB="54864" anchor="ctr">
-                    <a:lnL w="9525" cap="flat" cmpd="sng" algn="ctr">
-                      <a:solidFill>
-                        <a:srgbClr val="C9D3DE"/>
-                      </a:solidFill>
-                      <a:prstDash val="solid"/>
-                      <a:round/>
-                      <a:headEnd type="none" w="med" len="med"/>
-                      <a:tailEnd type="none" w="med" len="med"/>
-                    </a:lnL>
-                    <a:lnR w="9525" cap="flat" cmpd="sng" algn="ctr">
-                      <a:solidFill>
-                        <a:srgbClr val="C9D3DE"/>
-                      </a:solidFill>
-                      <a:prstDash val="solid"/>
-                      <a:round/>
-                      <a:headEnd type="none" w="med" len="med"/>
-                      <a:tailEnd type="none" w="med" len="med"/>
-                    </a:lnR>
-                    <a:lnT w="9525" cap="flat" cmpd="sng" algn="ctr">
-                      <a:solidFill>
-                        <a:srgbClr val="C9D3DE"/>
-                      </a:solidFill>
-                      <a:prstDash val="solid"/>
-                      <a:round/>
-                      <a:headEnd type="none" w="med" len="med"/>
-                      <a:tailEnd type="none" w="med" len="med"/>
-                    </a:lnT>
-                    <a:lnB w="9525" cap="flat" cmpd="sng" algn="ctr">
-                      <a:solidFill>
-                        <a:srgbClr val="C9D3DE"/>
-                      </a:solidFill>
-                      <a:prstDash val="solid"/>
-                      <a:round/>
-                      <a:headEnd type="none" w="med" len="med"/>
-                      <a:tailEnd type="none" w="med" len="med"/>
-                    </a:lnB>
-                    <a:solidFill>
-                      <a:srgbClr val="FFFFFF"/>
-                    </a:solidFill>
-                  </a:tcPr>
-                </a:tc>
-                <a:tc>
-                  <a:txBody>
-                    <a:bodyPr/>
-                    <a:lstStyle/>
-                    <a:p>
-                      <a:pPr marL="0" indent="0" algn="ctr">
-                        <a:buNone/>
-                      </a:pPr>
-                      <a:r>
-                        <a:rPr lang="en-US" sz="1300" b="1" dirty="0">
-                          <a:solidFill>
-                            <a:srgbClr val="C0392B"/>
-                          </a:solidFill>
-                          <a:latin typeface="Calibri" pitchFamily="34" charset="0"/>
-                          <a:ea typeface="Calibri" pitchFamily="34" charset="-122"/>
-                          <a:cs typeface="Calibri" pitchFamily="34" charset="-120"/>
-                        </a:rPr>
-                        <a:t>✗ detail lost in codes</a:t>
-                      </a:r>
-                      <a:endParaRPr lang="en-US" sz="1300" dirty="0">
-                        <a:latin typeface="Calibri" charset="0"/>
-                        <a:ea typeface="Calibri" charset="0"/>
-                        <a:cs typeface="Calibri" charset="0"/>
-                      </a:endParaRPr>
-                    </a:p>
-                  </a:txBody>
-                  <a:tcPr marL="54864" marR="54864" marT="54864" marB="54864" anchor="ctr">
-                    <a:lnL w="9525" cap="flat" cmpd="sng" algn="ctr">
-                      <a:solidFill>
-                        <a:srgbClr val="C9D3DE"/>
-                      </a:solidFill>
-                      <a:prstDash val="solid"/>
-                      <a:round/>
-                      <a:headEnd type="none" w="med" len="med"/>
-                      <a:tailEnd type="none" w="med" len="med"/>
-                    </a:lnL>
-                    <a:lnR w="9525" cap="flat" cmpd="sng" algn="ctr">
-                      <a:solidFill>
-                        <a:srgbClr val="C9D3DE"/>
-                      </a:solidFill>
-                      <a:prstDash val="solid"/>
-                      <a:round/>
-                      <a:headEnd type="none" w="med" len="med"/>
-                      <a:tailEnd type="none" w="med" len="med"/>
-                    </a:lnR>
-                    <a:lnT w="9525" cap="flat" cmpd="sng" algn="ctr">
-                      <a:solidFill>
-                        <a:srgbClr val="C9D3DE"/>
-                      </a:solidFill>
-                      <a:prstDash val="solid"/>
-                      <a:round/>
-                      <a:headEnd type="none" w="med" len="med"/>
-                      <a:tailEnd type="none" w="med" len="med"/>
-                    </a:lnT>
-                    <a:lnB w="9525" cap="flat" cmpd="sng" algn="ctr">
-                      <a:solidFill>
-                        <a:srgbClr val="C9D3DE"/>
-                      </a:solidFill>
-                      <a:prstDash val="solid"/>
-                      <a:round/>
-                      <a:headEnd type="none" w="med" len="med"/>
-                      <a:tailEnd type="none" w="med" len="med"/>
-                    </a:lnB>
-                    <a:solidFill>
-                      <a:srgbClr val="FFFFFF"/>
-                    </a:solidFill>
-                  </a:tcPr>
-                </a:tc>
-                <a:tc>
-                  <a:txBody>
-                    <a:bodyPr/>
-                    <a:lstStyle/>
-                    <a:p>
-                      <a:pPr marL="0" indent="0" algn="ctr">
-                        <a:buNone/>
-                      </a:pPr>
-                      <a:r>
-                        <a:rPr lang="en-US" sz="1300" b="1" dirty="0">
-                          <a:solidFill>
-                            <a:srgbClr val="C0392B"/>
-                          </a:solidFill>
-                          <a:latin typeface="Calibri" pitchFamily="34" charset="0"/>
-                          <a:ea typeface="Calibri" pitchFamily="34" charset="-122"/>
-                          <a:cs typeface="Calibri" pitchFamily="34" charset="-120"/>
-                        </a:rPr>
-                        <a:t>✗ raw surface noise</a:t>
-                      </a:r>
-                      <a:endParaRPr lang="en-US" sz="1300" dirty="0">
-                        <a:latin typeface="Calibri" charset="0"/>
-                        <a:ea typeface="Calibri" charset="0"/>
-                        <a:cs typeface="Calibri" charset="0"/>
-                      </a:endParaRPr>
-                    </a:p>
-                  </a:txBody>
-                  <a:tcPr marL="54864" marR="54864" marT="54864" marB="54864" anchor="ctr">
-                    <a:lnL w="9525" cap="flat" cmpd="sng" algn="ctr">
-                      <a:solidFill>
-                        <a:srgbClr val="C9D3DE"/>
-                      </a:solidFill>
-                      <a:prstDash val="solid"/>
-                      <a:round/>
-                      <a:headEnd type="none" w="med" len="med"/>
-                      <a:tailEnd type="none" w="med" len="med"/>
-                    </a:lnL>
-                    <a:lnR w="9525" cap="flat" cmpd="sng" algn="ctr">
-                      <a:solidFill>
-                        <a:srgbClr val="C9D3DE"/>
-                      </a:solidFill>
-                      <a:prstDash val="solid"/>
-                      <a:round/>
-                      <a:headEnd type="none" w="med" len="med"/>
-                      <a:tailEnd type="none" w="med" len="med"/>
-                    </a:lnR>
-                    <a:lnT w="9525" cap="flat" cmpd="sng" algn="ctr">
-                      <a:solidFill>
-                        <a:srgbClr val="C9D3DE"/>
-                      </a:solidFill>
-                      <a:prstDash val="solid"/>
-                      <a:round/>
-                      <a:headEnd type="none" w="med" len="med"/>
-                      <a:tailEnd type="none" w="med" len="med"/>
-                    </a:lnT>
-                    <a:lnB w="9525" cap="flat" cmpd="sng" algn="ctr">
-                      <a:solidFill>
-                        <a:srgbClr val="C9D3DE"/>
-                      </a:solidFill>
-                      <a:prstDash val="solid"/>
-                      <a:round/>
-                      <a:headEnd type="none" w="med" len="med"/>
-                      <a:tailEnd type="none" w="med" len="med"/>
-                    </a:lnB>
-                    <a:solidFill>
-                      <a:srgbClr val="FFFFFF"/>
-                    </a:solidFill>
-                  </a:tcPr>
-                </a:tc>
-                <a:tc>
-                  <a:txBody>
-                    <a:bodyPr/>
-                    <a:lstStyle/>
-                    <a:p>
-                      <a:pPr marL="0" indent="0" algn="ctr">
-                        <a:buNone/>
-                      </a:pPr>
-                      <a:r>
-                        <a:rPr lang="en-US" sz="1300" b="1" dirty="0">
-                          <a:solidFill>
-                            <a:srgbClr val="B98A1F"/>
-                          </a:solidFill>
-                          <a:latin typeface="Calibri" pitchFamily="34" charset="0"/>
-                          <a:ea typeface="Calibri" pitchFamily="34" charset="-122"/>
-                          <a:cs typeface="Calibri" pitchFamily="34" charset="-120"/>
-                        </a:rPr>
-                        <a:t>~ API only</a:t>
-                      </a:r>
-                      <a:endParaRPr lang="en-US" sz="1300" dirty="0">
-                        <a:latin typeface="Calibri" charset="0"/>
-                        <a:ea typeface="Calibri" charset="0"/>
-                        <a:cs typeface="Calibri" charset="0"/>
-                      </a:endParaRPr>
-                    </a:p>
-                  </a:txBody>
-                  <a:tcPr marL="54864" marR="54864" marT="54864" marB="54864" anchor="ctr">
-                    <a:lnL w="9525" cap="flat" cmpd="sng" algn="ctr">
-                      <a:solidFill>
-                        <a:srgbClr val="C9D3DE"/>
-                      </a:solidFill>
-                      <a:prstDash val="solid"/>
-                      <a:round/>
-                      <a:headEnd type="none" w="med" len="med"/>
-                      <a:tailEnd type="none" w="med" len="med"/>
-                    </a:lnL>
-                    <a:lnR w="9525" cap="flat" cmpd="sng" algn="ctr">
-                      <a:solidFill>
-                        <a:srgbClr val="C9D3DE"/>
-                      </a:solidFill>
-                      <a:prstDash val="solid"/>
-                      <a:round/>
-                      <a:headEnd type="none" w="med" len="med"/>
-                      <a:tailEnd type="none" w="med" len="med"/>
-                    </a:lnR>
-                    <a:lnT w="9525" cap="flat" cmpd="sng" algn="ctr">
-                      <a:solidFill>
-                        <a:srgbClr val="C9D3DE"/>
-                      </a:solidFill>
-                      <a:prstDash val="solid"/>
-                      <a:round/>
-                      <a:headEnd type="none" w="med" len="med"/>
-                      <a:tailEnd type="none" w="med" len="med"/>
-                    </a:lnT>
-                    <a:lnB w="9525" cap="flat" cmpd="sng" algn="ctr">
-                      <a:solidFill>
-                        <a:srgbClr val="C9D3DE"/>
-                      </a:solidFill>
-                      <a:prstDash val="solid"/>
-                      <a:round/>
-                      <a:headEnd type="none" w="med" len="med"/>
-                      <a:tailEnd type="none" w="med" len="med"/>
-                    </a:lnB>
-                    <a:solidFill>
-                      <a:srgbClr val="FFFFFF"/>
-                    </a:solidFill>
-                  </a:tcPr>
-                </a:tc>
-                <a:extLst>
-                  <a:ext uri="{0D108BD9-81ED-4DB2-BD59-A6C34878D82A}">
-                    <a16:rowId xmlns:a16="http://schemas.microsoft.com/office/drawing/2014/main" val="10003"/>
                   </a:ext>
                 </a:extLst>
               </a:tr>
@@ -21100,7 +21396,7 @@
                           <a:ea typeface="Calibri" pitchFamily="34" charset="-122"/>
                           <a:cs typeface="Calibri" pitchFamily="34" charset="-120"/>
                         </a:rPr>
-                        <a:t>GPT-4 / Claude prompting</a:t>
+                        <a:t>GPT-4 / Others</a:t>
                       </a:r>
                       <a:endParaRPr lang="en-US" sz="1200" dirty="0">
                         <a:latin typeface="Calibri" charset="0"/>
@@ -21767,374 +22063,6 @@
                   </a:ext>
                 </a:extLst>
               </a:tr>
-              <a:tr h="530352">
-                <a:tc>
-                  <a:txBody>
-                    <a:bodyPr/>
-                    <a:lstStyle/>
-                    <a:p>
-                      <a:pPr marL="0" indent="0">
-                        <a:buNone/>
-                      </a:pPr>
-                      <a:r>
-                        <a:rPr lang="en-US" sz="1250" b="1" dirty="0">
-                          <a:solidFill>
-                            <a:srgbClr val="16314E"/>
-                          </a:solidFill>
-                          <a:latin typeface="Calibri" pitchFamily="34" charset="0"/>
-                          <a:ea typeface="Calibri" pitchFamily="34" charset="-122"/>
-                          <a:cs typeface="Calibri" pitchFamily="34" charset="-120"/>
-                        </a:rPr>
-                        <a:t>VioNER</a:t>
-                      </a:r>
-                      <a:endParaRPr lang="en-US" sz="1200" dirty="0">
-                        <a:latin typeface="Calibri" charset="0"/>
-                        <a:ea typeface="Calibri" charset="0"/>
-                        <a:cs typeface="Calibri" charset="0"/>
-                      </a:endParaRPr>
-                    </a:p>
-                    <a:p>
-                      <a:pPr marL="0" indent="0">
-                        <a:buNone/>
-                      </a:pPr>
-                      <a:r>
-                        <a:rPr lang="en-US" sz="950" dirty="0">
-                          <a:solidFill>
-                            <a:srgbClr val="1F7A6F"/>
-                          </a:solidFill>
-                          <a:latin typeface="Calibri" pitchFamily="34" charset="0"/>
-                          <a:ea typeface="Calibri" pitchFamily="34" charset="-122"/>
-                          <a:cs typeface="Calibri" pitchFamily="34" charset="-120"/>
-                        </a:rPr>
-                        <a:t>this thesis</a:t>
-                      </a:r>
-                      <a:endParaRPr lang="en-US" sz="1200" dirty="0">
-                        <a:latin typeface="Calibri" charset="0"/>
-                        <a:ea typeface="Calibri" charset="0"/>
-                        <a:cs typeface="Calibri" charset="0"/>
-                      </a:endParaRPr>
-                    </a:p>
-                  </a:txBody>
-                  <a:tcPr marL="54864" marR="54864" marT="54864" marB="54864" anchor="ctr">
-                    <a:lnL w="9525" cap="flat" cmpd="sng" algn="ctr">
-                      <a:solidFill>
-                        <a:srgbClr val="C9D3DE"/>
-                      </a:solidFill>
-                      <a:prstDash val="solid"/>
-                      <a:round/>
-                      <a:headEnd type="none" w="med" len="med"/>
-                      <a:tailEnd type="none" w="med" len="med"/>
-                    </a:lnL>
-                    <a:lnR w="9525" cap="flat" cmpd="sng" algn="ctr">
-                      <a:solidFill>
-                        <a:srgbClr val="C9D3DE"/>
-                      </a:solidFill>
-                      <a:prstDash val="solid"/>
-                      <a:round/>
-                      <a:headEnd type="none" w="med" len="med"/>
-                      <a:tailEnd type="none" w="med" len="med"/>
-                    </a:lnR>
-                    <a:lnT w="9525" cap="flat" cmpd="sng" algn="ctr">
-                      <a:solidFill>
-                        <a:srgbClr val="C9D3DE"/>
-                      </a:solidFill>
-                      <a:prstDash val="solid"/>
-                      <a:round/>
-                      <a:headEnd type="none" w="med" len="med"/>
-                      <a:tailEnd type="none" w="med" len="med"/>
-                    </a:lnT>
-                    <a:lnB w="9525" cap="flat" cmpd="sng" algn="ctr">
-                      <a:solidFill>
-                        <a:srgbClr val="C9D3DE"/>
-                      </a:solidFill>
-                      <a:prstDash val="solid"/>
-                      <a:round/>
-                      <a:headEnd type="none" w="med" len="med"/>
-                      <a:tailEnd type="none" w="med" len="med"/>
-                    </a:lnB>
-                    <a:solidFill>
-                      <a:srgbClr val="EAF2F0"/>
-                    </a:solidFill>
-                  </a:tcPr>
-                </a:tc>
-                <a:tc>
-                  <a:txBody>
-                    <a:bodyPr/>
-                    <a:lstStyle/>
-                    <a:p>
-                      <a:pPr marL="0" indent="0" algn="ctr">
-                        <a:buNone/>
-                      </a:pPr>
-                      <a:r>
-                        <a:rPr lang="en-US" sz="1500" b="1" dirty="0">
-                          <a:solidFill>
-                            <a:srgbClr val="1F7A6F"/>
-                          </a:solidFill>
-                          <a:latin typeface="Calibri" pitchFamily="34" charset="0"/>
-                          <a:ea typeface="Calibri" pitchFamily="34" charset="-122"/>
-                          <a:cs typeface="Calibri" pitchFamily="34" charset="-120"/>
-                        </a:rPr>
-                        <a:t>✓</a:t>
-                      </a:r>
-                      <a:endParaRPr lang="en-US" sz="1500" dirty="0">
-                        <a:latin typeface="Calibri" charset="0"/>
-                        <a:ea typeface="Calibri" charset="0"/>
-                        <a:cs typeface="Calibri" charset="0"/>
-                      </a:endParaRPr>
-                    </a:p>
-                  </a:txBody>
-                  <a:tcPr marL="54864" marR="54864" marT="54864" marB="54864" anchor="ctr">
-                    <a:lnL w="9525" cap="flat" cmpd="sng" algn="ctr">
-                      <a:solidFill>
-                        <a:srgbClr val="C9D3DE"/>
-                      </a:solidFill>
-                      <a:prstDash val="solid"/>
-                      <a:round/>
-                      <a:headEnd type="none" w="med" len="med"/>
-                      <a:tailEnd type="none" w="med" len="med"/>
-                    </a:lnL>
-                    <a:lnR w="9525" cap="flat" cmpd="sng" algn="ctr">
-                      <a:solidFill>
-                        <a:srgbClr val="C9D3DE"/>
-                      </a:solidFill>
-                      <a:prstDash val="solid"/>
-                      <a:round/>
-                      <a:headEnd type="none" w="med" len="med"/>
-                      <a:tailEnd type="none" w="med" len="med"/>
-                    </a:lnR>
-                    <a:lnT w="9525" cap="flat" cmpd="sng" algn="ctr">
-                      <a:solidFill>
-                        <a:srgbClr val="C9D3DE"/>
-                      </a:solidFill>
-                      <a:prstDash val="solid"/>
-                      <a:round/>
-                      <a:headEnd type="none" w="med" len="med"/>
-                      <a:tailEnd type="none" w="med" len="med"/>
-                    </a:lnT>
-                    <a:lnB w="9525" cap="flat" cmpd="sng" algn="ctr">
-                      <a:solidFill>
-                        <a:srgbClr val="C9D3DE"/>
-                      </a:solidFill>
-                      <a:prstDash val="solid"/>
-                      <a:round/>
-                      <a:headEnd type="none" w="med" len="med"/>
-                      <a:tailEnd type="none" w="med" len="med"/>
-                    </a:lnB>
-                    <a:solidFill>
-                      <a:srgbClr val="EAF2F0"/>
-                    </a:solidFill>
-                  </a:tcPr>
-                </a:tc>
-                <a:tc>
-                  <a:txBody>
-                    <a:bodyPr/>
-                    <a:lstStyle/>
-                    <a:p>
-                      <a:pPr marL="0" indent="0" algn="ctr">
-                        <a:buNone/>
-                      </a:pPr>
-                      <a:r>
-                        <a:rPr lang="en-US" sz="1500" b="1" dirty="0">
-                          <a:solidFill>
-                            <a:srgbClr val="1F7A6F"/>
-                          </a:solidFill>
-                          <a:latin typeface="Calibri" pitchFamily="34" charset="0"/>
-                          <a:ea typeface="Calibri" pitchFamily="34" charset="-122"/>
-                          <a:cs typeface="Calibri" pitchFamily="34" charset="-120"/>
-                        </a:rPr>
-                        <a:t>✓</a:t>
-                      </a:r>
-                      <a:endParaRPr lang="en-US" sz="1500" dirty="0">
-                        <a:latin typeface="Calibri" charset="0"/>
-                        <a:ea typeface="Calibri" charset="0"/>
-                        <a:cs typeface="Calibri" charset="0"/>
-                      </a:endParaRPr>
-                    </a:p>
-                  </a:txBody>
-                  <a:tcPr marL="54864" marR="54864" marT="54864" marB="54864" anchor="ctr">
-                    <a:lnL w="9525" cap="flat" cmpd="sng" algn="ctr">
-                      <a:solidFill>
-                        <a:srgbClr val="C9D3DE"/>
-                      </a:solidFill>
-                      <a:prstDash val="solid"/>
-                      <a:round/>
-                      <a:headEnd type="none" w="med" len="med"/>
-                      <a:tailEnd type="none" w="med" len="med"/>
-                    </a:lnL>
-                    <a:lnR w="9525" cap="flat" cmpd="sng" algn="ctr">
-                      <a:solidFill>
-                        <a:srgbClr val="C9D3DE"/>
-                      </a:solidFill>
-                      <a:prstDash val="solid"/>
-                      <a:round/>
-                      <a:headEnd type="none" w="med" len="med"/>
-                      <a:tailEnd type="none" w="med" len="med"/>
-                    </a:lnR>
-                    <a:lnT w="9525" cap="flat" cmpd="sng" algn="ctr">
-                      <a:solidFill>
-                        <a:srgbClr val="C9D3DE"/>
-                      </a:solidFill>
-                      <a:prstDash val="solid"/>
-                      <a:round/>
-                      <a:headEnd type="none" w="med" len="med"/>
-                      <a:tailEnd type="none" w="med" len="med"/>
-                    </a:lnT>
-                    <a:lnB w="9525" cap="flat" cmpd="sng" algn="ctr">
-                      <a:solidFill>
-                        <a:srgbClr val="C9D3DE"/>
-                      </a:solidFill>
-                      <a:prstDash val="solid"/>
-                      <a:round/>
-                      <a:headEnd type="none" w="med" len="med"/>
-                      <a:tailEnd type="none" w="med" len="med"/>
-                    </a:lnB>
-                    <a:solidFill>
-                      <a:srgbClr val="EAF2F0"/>
-                    </a:solidFill>
-                  </a:tcPr>
-                </a:tc>
-                <a:tc>
-                  <a:txBody>
-                    <a:bodyPr/>
-                    <a:lstStyle/>
-                    <a:p>
-                      <a:pPr marL="0" indent="0" algn="ctr">
-                        <a:buNone/>
-                      </a:pPr>
-                      <a:r>
-                        <a:rPr lang="en-US" sz="1500" b="1" dirty="0">
-                          <a:solidFill>
-                            <a:srgbClr val="1F7A6F"/>
-                          </a:solidFill>
-                          <a:latin typeface="Calibri" pitchFamily="34" charset="0"/>
-                          <a:ea typeface="Calibri" pitchFamily="34" charset="-122"/>
-                          <a:cs typeface="Calibri" pitchFamily="34" charset="-120"/>
-                        </a:rPr>
-                        <a:t>✓</a:t>
-                      </a:r>
-                      <a:endParaRPr lang="en-US" sz="1500" dirty="0">
-                        <a:latin typeface="Calibri" charset="0"/>
-                        <a:ea typeface="Calibri" charset="0"/>
-                        <a:cs typeface="Calibri" charset="0"/>
-                      </a:endParaRPr>
-                    </a:p>
-                  </a:txBody>
-                  <a:tcPr marL="54864" marR="54864" marT="54864" marB="54864" anchor="ctr">
-                    <a:lnL w="9525" cap="flat" cmpd="sng" algn="ctr">
-                      <a:solidFill>
-                        <a:srgbClr val="C9D3DE"/>
-                      </a:solidFill>
-                      <a:prstDash val="solid"/>
-                      <a:round/>
-                      <a:headEnd type="none" w="med" len="med"/>
-                      <a:tailEnd type="none" w="med" len="med"/>
-                    </a:lnL>
-                    <a:lnR w="9525" cap="flat" cmpd="sng" algn="ctr">
-                      <a:solidFill>
-                        <a:srgbClr val="C9D3DE"/>
-                      </a:solidFill>
-                      <a:prstDash val="solid"/>
-                      <a:round/>
-                      <a:headEnd type="none" w="med" len="med"/>
-                      <a:tailEnd type="none" w="med" len="med"/>
-                    </a:lnR>
-                    <a:lnT w="9525" cap="flat" cmpd="sng" algn="ctr">
-                      <a:solidFill>
-                        <a:srgbClr val="C9D3DE"/>
-                      </a:solidFill>
-                      <a:prstDash val="solid"/>
-                      <a:round/>
-                      <a:headEnd type="none" w="med" len="med"/>
-                      <a:tailEnd type="none" w="med" len="med"/>
-                    </a:lnT>
-                    <a:lnB w="9525" cap="flat" cmpd="sng" algn="ctr">
-                      <a:solidFill>
-                        <a:srgbClr val="C9D3DE"/>
-                      </a:solidFill>
-                      <a:prstDash val="solid"/>
-                      <a:round/>
-                      <a:headEnd type="none" w="med" len="med"/>
-                      <a:tailEnd type="none" w="med" len="med"/>
-                    </a:lnB>
-                    <a:solidFill>
-                      <a:srgbClr val="EAF2F0"/>
-                    </a:solidFill>
-                  </a:tcPr>
-                </a:tc>
-                <a:tc>
-                  <a:txBody>
-                    <a:bodyPr/>
-                    <a:lstStyle/>
-                    <a:p>
-                      <a:pPr marL="0" indent="0" algn="ctr">
-                        <a:buNone/>
-                      </a:pPr>
-                      <a:r>
-                        <a:rPr lang="en-US" sz="1500" b="1" dirty="0">
-                          <a:solidFill>
-                            <a:srgbClr val="1F7A6F"/>
-                          </a:solidFill>
-                          <a:latin typeface="Calibri" pitchFamily="34" charset="0"/>
-                          <a:ea typeface="Calibri" pitchFamily="34" charset="-122"/>
-                          <a:cs typeface="Calibri" pitchFamily="34" charset="-120"/>
-                        </a:rPr>
-                        <a:t>✓</a:t>
-                      </a:r>
-                      <a:endParaRPr lang="en-US" sz="1500" dirty="0">
-                        <a:latin typeface="Calibri" charset="0"/>
-                        <a:ea typeface="Calibri" charset="0"/>
-                        <a:cs typeface="Calibri" charset="0"/>
-                      </a:endParaRPr>
-                    </a:p>
-                  </a:txBody>
-                  <a:tcPr marL="54864" marR="54864" marT="54864" marB="54864" anchor="ctr">
-                    <a:lnL w="9525" cap="flat" cmpd="sng" algn="ctr">
-                      <a:solidFill>
-                        <a:srgbClr val="C9D3DE"/>
-                      </a:solidFill>
-                      <a:prstDash val="solid"/>
-                      <a:round/>
-                      <a:headEnd type="none" w="med" len="med"/>
-                      <a:tailEnd type="none" w="med" len="med"/>
-                    </a:lnL>
-                    <a:lnR w="9525" cap="flat" cmpd="sng" algn="ctr">
-                      <a:solidFill>
-                        <a:srgbClr val="C9D3DE"/>
-                      </a:solidFill>
-                      <a:prstDash val="solid"/>
-                      <a:round/>
-                      <a:headEnd type="none" w="med" len="med"/>
-                      <a:tailEnd type="none" w="med" len="med"/>
-                    </a:lnR>
-                    <a:lnT w="9525" cap="flat" cmpd="sng" algn="ctr">
-                      <a:solidFill>
-                        <a:srgbClr val="C9D3DE"/>
-                      </a:solidFill>
-                      <a:prstDash val="solid"/>
-                      <a:round/>
-                      <a:headEnd type="none" w="med" len="med"/>
-                      <a:tailEnd type="none" w="med" len="med"/>
-                    </a:lnT>
-                    <a:lnB w="9525" cap="flat" cmpd="sng" algn="ctr">
-                      <a:solidFill>
-                        <a:srgbClr val="C9D3DE"/>
-                      </a:solidFill>
-                      <a:prstDash val="solid"/>
-                      <a:round/>
-                      <a:headEnd type="none" w="med" len="med"/>
-                      <a:tailEnd type="none" w="med" len="med"/>
-                    </a:lnB>
-                    <a:solidFill>
-                      <a:srgbClr val="EAF2F0"/>
-                    </a:solidFill>
-                  </a:tcPr>
-                </a:tc>
-                <a:extLst>
-                  <a:ext uri="{0D108BD9-81ED-4DB2-BD59-A6C34878D82A}">
-                    <a16:rowId xmlns:a16="http://schemas.microsoft.com/office/drawing/2014/main" val="10006"/>
-                  </a:ext>
-                </a:extLst>
-              </a:tr>
             </a:tbl>
           </a:graphicData>
         </a:graphic>
@@ -22152,7 +22080,7 @@
 </p:sld>
 </file>
 
-<file path=ppt/slides/slide7.xml><?xml version="1.0" encoding="utf-8"?>
+<file path=ppt/slides/slide8.xml><?xml version="1.0" encoding="utf-8"?>
 <p:sld xmlns:a="http://schemas.openxmlformats.org/drawingml/2006/main" xmlns:r="http://schemas.openxmlformats.org/officeDocument/2006/relationships" xmlns:p="http://schemas.openxmlformats.org/presentationml/2006/main">
   <p:cSld name="Slide 7">
     <p:bg>
@@ -22564,7 +22492,7 @@
                 <a:ea typeface="Calibri" pitchFamily="34" charset="-122"/>
                 <a:cs typeface="Calibri" pitchFamily="34" charset="-120"/>
               </a:rPr>
-              <a:t>ACLED has the right structure at human speed; automated tools give flat or wrong-schema output. The analyst can't get perpetrator-vs-victim records at usable speed.</a:t>
+              <a:t>Automated tools give flat or wrong-schema output. The analyst can't get perpetrator-vs-victim records at usable speed.</a:t>
             </a:r>
             <a:endParaRPr lang="en-US" sz="1150" dirty="0"/>
           </a:p>
@@ -23233,7 +23161,7 @@
                 <a:ea typeface="Calibri" pitchFamily="34" charset="-122"/>
                 <a:cs typeface="Calibri" pitchFamily="34" charset="-120"/>
               </a:rPr>
-              <a:t>A system analysts can actually run</a:t>
+              <a:t>A system analysts can run</a:t>
             </a:r>
             <a:endParaRPr lang="en-US" sz="1450" dirty="0"/>
           </a:p>
@@ -23275,7 +23203,7 @@
                 <a:ea typeface="Calibri" pitchFamily="34" charset="-122"/>
                 <a:cs typeface="Calibri" pitchFamily="34" charset="-120"/>
               </a:rPr>
-              <a:t>A checkpoint + Jupyter notebook + 47-package conda environment is not an operational capability. Published work stops at the model boundary.</a:t>
+              <a:t>A system that analysts run without ML expert</a:t>
             </a:r>
             <a:endParaRPr lang="en-US" sz="1150" dirty="0"/>
           </a:p>
@@ -23344,7 +23272,7 @@
 </p:sld>
 </file>
 
-<file path=ppt/slides/slide8.xml><?xml version="1.0" encoding="utf-8"?>
+<file path=ppt/slides/slide9.xml><?xml version="1.0" encoding="utf-8"?>
 <p:sld xmlns:a="http://schemas.openxmlformats.org/drawingml/2006/main" xmlns:r="http://schemas.openxmlformats.org/officeDocument/2006/relationships" xmlns:p="http://schemas.openxmlformats.org/presentationml/2006/main">
   <p:cSld name="Slide 8">
     <p:bg>
@@ -23875,7 +23803,7 @@
                 <a:ea typeface="Calibri" pitchFamily="34" charset="-122"/>
                 <a:cs typeface="Calibri" pitchFamily="34" charset="-120"/>
               </a:rPr>
-              <a:t>Fine-tuned BERT</a:t>
+              <a:t>Fine-tuned ML Model</a:t>
             </a:r>
             <a:endParaRPr lang="en-US" sz="1250" dirty="0"/>
           </a:p>
@@ -24578,1101 +24506,6 @@
     <p:extLst>
       <p:ext uri="{BB962C8B-B14F-4D97-AF65-F5344CB8AC3E}">
         <p14:creationId xmlns:p14="http://schemas.microsoft.com/office/powerpoint/2010/main" val="3043103041"/>
-      </p:ext>
-    </p:extLst>
-  </p:cSld>
-  <p:clrMapOvr>
-    <a:masterClrMapping/>
-  </p:clrMapOvr>
-</p:sld>
-</file>
-
-<file path=ppt/slides/slide9.xml><?xml version="1.0" encoding="utf-8"?>
-<p:sld xmlns:a="http://schemas.openxmlformats.org/drawingml/2006/main" xmlns:r="http://schemas.openxmlformats.org/officeDocument/2006/relationships" xmlns:p="http://schemas.openxmlformats.org/presentationml/2006/main">
-  <p:cSld name="Slide 9">
-    <p:bg>
-      <p:bgPr>
-        <a:solidFill>
-          <a:srgbClr val="FFFFFF"/>
-        </a:solidFill>
-        <a:effectLst/>
-      </p:bgPr>
-    </p:bg>
-    <p:spTree>
-      <p:nvGrpSpPr>
-        <p:cNvPr id="1" name=""/>
-        <p:cNvGrpSpPr/>
-        <p:nvPr/>
-      </p:nvGrpSpPr>
-      <p:grpSpPr>
-        <a:xfrm>
-          <a:off x="0" y="0"/>
-          <a:ext cx="0" cy="0"/>
-          <a:chOff x="0" y="0"/>
-          <a:chExt cx="0" cy="0"/>
-        </a:xfrm>
-      </p:grpSpPr>
-      <p:sp>
-        <p:nvSpPr>
-          <p:cNvPr id="2" name="Text 0"/>
-          <p:cNvSpPr/>
-          <p:nvPr/>
-        </p:nvSpPr>
-        <p:spPr>
-          <a:xfrm>
-            <a:off x="548640" y="6473952"/>
-            <a:ext cx="7315200" cy="274320"/>
-          </a:xfrm>
-          <a:prstGeom prst="rect">
-            <a:avLst/>
-          </a:prstGeom>
-          <a:noFill/>
-          <a:ln/>
-        </p:spPr>
-        <p:txBody>
-          <a:bodyPr wrap="square" lIns="0" tIns="0" rIns="0" bIns="0" rtlCol="0" anchor="ctr"/>
-          <a:lstStyle/>
-          <a:p>
-            <a:pPr marL="0" indent="0">
-              <a:buNone/>
-            </a:pPr>
-            <a:r>
-              <a:rPr lang="en-US" sz="900" dirty="0">
-                <a:solidFill>
-                  <a:srgbClr val="5A6675"/>
-                </a:solidFill>
-                <a:latin typeface="Calibri" pitchFamily="34" charset="0"/>
-                <a:ea typeface="Calibri" pitchFamily="34" charset="-122"/>
-                <a:cs typeface="Calibri" pitchFamily="34" charset="-120"/>
-              </a:rPr>
-              <a:t>VioNER · Extraction of Violent Events</a:t>
-            </a:r>
-            <a:endParaRPr lang="en-US" sz="900" dirty="0"/>
-          </a:p>
-        </p:txBody>
-      </p:sp>
-      <p:sp>
-        <p:nvSpPr>
-          <p:cNvPr id="3" name="Text 1"/>
-          <p:cNvSpPr/>
-          <p:nvPr/>
-        </p:nvSpPr>
-        <p:spPr>
-          <a:xfrm>
-            <a:off x="11185855" y="6473952"/>
-            <a:ext cx="502920" cy="274320"/>
-          </a:xfrm>
-          <a:prstGeom prst="rect">
-            <a:avLst/>
-          </a:prstGeom>
-          <a:noFill/>
-          <a:ln/>
-        </p:spPr>
-        <p:txBody>
-          <a:bodyPr wrap="square" lIns="0" tIns="0" rIns="0" bIns="0" rtlCol="0" anchor="ctr"/>
-          <a:lstStyle/>
-          <a:p>
-            <a:pPr marL="0" indent="0" algn="r">
-              <a:buNone/>
-            </a:pPr>
-            <a:r>
-              <a:rPr lang="en-US" sz="900" dirty="0">
-                <a:solidFill>
-                  <a:srgbClr val="5A6675"/>
-                </a:solidFill>
-                <a:latin typeface="Calibri" pitchFamily="34" charset="0"/>
-                <a:ea typeface="Calibri" pitchFamily="34" charset="-122"/>
-                <a:cs typeface="Calibri" pitchFamily="34" charset="-120"/>
-              </a:rPr>
-              <a:t>9</a:t>
-            </a:r>
-            <a:endParaRPr lang="en-US" sz="900" dirty="0"/>
-          </a:p>
-        </p:txBody>
-      </p:sp>
-      <p:sp>
-        <p:nvSpPr>
-          <p:cNvPr id="4" name="Text 2"/>
-          <p:cNvSpPr/>
-          <p:nvPr/>
-        </p:nvSpPr>
-        <p:spPr>
-          <a:xfrm>
-            <a:off x="548640" y="384048"/>
-            <a:ext cx="10972800" cy="274320"/>
-          </a:xfrm>
-          <a:prstGeom prst="rect">
-            <a:avLst/>
-          </a:prstGeom>
-          <a:noFill/>
-          <a:ln/>
-        </p:spPr>
-        <p:txBody>
-          <a:bodyPr wrap="square" lIns="0" tIns="0" rIns="0" bIns="0" rtlCol="0" anchor="ctr"/>
-          <a:lstStyle/>
-          <a:p>
-            <a:pPr marL="0" indent="0">
-              <a:buNone/>
-            </a:pPr>
-            <a:r>
-              <a:rPr lang="en-US" sz="1200" b="1" kern="0" spc="300" dirty="0">
-                <a:solidFill>
-                  <a:srgbClr val="E9C46A"/>
-                </a:solidFill>
-                <a:latin typeface="Calibri" pitchFamily="34" charset="0"/>
-                <a:ea typeface="Calibri" pitchFamily="34" charset="-122"/>
-                <a:cs typeface="Calibri" pitchFamily="34" charset="-120"/>
-              </a:rPr>
-              <a:t>ACT 2 · THE SOLUTION</a:t>
-            </a:r>
-            <a:endParaRPr lang="en-US" sz="1200" dirty="0"/>
-          </a:p>
-        </p:txBody>
-      </p:sp>
-      <p:sp>
-        <p:nvSpPr>
-          <p:cNvPr id="5" name="Text 3"/>
-          <p:cNvSpPr/>
-          <p:nvPr/>
-        </p:nvSpPr>
-        <p:spPr>
-          <a:xfrm>
-            <a:off x="548640" y="658368"/>
-            <a:ext cx="11109960" cy="731520"/>
-          </a:xfrm>
-          <a:prstGeom prst="rect">
-            <a:avLst/>
-          </a:prstGeom>
-          <a:noFill/>
-          <a:ln/>
-        </p:spPr>
-        <p:txBody>
-          <a:bodyPr wrap="square" lIns="0" tIns="0" rIns="0" bIns="0" rtlCol="0" anchor="ctr"/>
-          <a:lstStyle/>
-          <a:p>
-            <a:pPr marL="0" indent="0">
-              <a:buNone/>
-            </a:pPr>
-            <a:r>
-              <a:rPr lang="en-US" sz="2900" b="1" dirty="0">
-                <a:solidFill>
-                  <a:srgbClr val="16314E"/>
-                </a:solidFill>
-                <a:latin typeface="Georgia" pitchFamily="34" charset="0"/>
-                <a:ea typeface="Georgia" pitchFamily="34" charset="-122"/>
-                <a:cs typeface="Georgia" pitchFamily="34" charset="-120"/>
-              </a:rPr>
-              <a:t>Methodology: design science — build, evaluate, learn, refine</a:t>
-            </a:r>
-            <a:endParaRPr lang="en-US" sz="2900" dirty="0"/>
-          </a:p>
-        </p:txBody>
-      </p:sp>
-      <p:sp>
-        <p:nvSpPr>
-          <p:cNvPr id="6" name="Shape 4"/>
-          <p:cNvSpPr/>
-          <p:nvPr/>
-        </p:nvSpPr>
-        <p:spPr>
-          <a:xfrm>
-            <a:off x="1005840" y="2148840"/>
-            <a:ext cx="2468880" cy="2468880"/>
-          </a:xfrm>
-          <a:prstGeom prst="ellipse">
-            <a:avLst/>
-          </a:prstGeom>
-          <a:solidFill>
-            <a:srgbClr val="FFFFFF">
-              <a:alpha val="0"/>
-            </a:srgbClr>
-          </a:solidFill>
-          <a:ln w="31750">
-            <a:solidFill>
-              <a:srgbClr val="2A9D8F"/>
-            </a:solidFill>
-            <a:prstDash val="dash"/>
-          </a:ln>
-        </p:spPr>
-        <p:txBody>
-          <a:bodyPr/>
-          <a:lstStyle/>
-          <a:p>
-            <a:endParaRPr lang="en-ET"/>
-          </a:p>
-        </p:txBody>
-      </p:sp>
-      <p:sp>
-        <p:nvSpPr>
-          <p:cNvPr id="7" name="Shape 5"/>
-          <p:cNvSpPr/>
-          <p:nvPr/>
-        </p:nvSpPr>
-        <p:spPr>
-          <a:xfrm>
-            <a:off x="1673352" y="1819656"/>
-            <a:ext cx="1133856" cy="658368"/>
-          </a:xfrm>
-          <a:prstGeom prst="ellipse">
-            <a:avLst/>
-          </a:prstGeom>
-          <a:solidFill>
-            <a:srgbClr val="16314E"/>
-          </a:solidFill>
-          <a:ln/>
-          <a:effectLst>
-            <a:outerShdw blurRad="63500" dist="25400" dir="8100000" algn="bl" rotWithShape="0">
-              <a:srgbClr val="1B2A3A">
-                <a:alpha val="12000"/>
-              </a:srgbClr>
-            </a:outerShdw>
-          </a:effectLst>
-        </p:spPr>
-        <p:txBody>
-          <a:bodyPr/>
-          <a:lstStyle/>
-          <a:p>
-            <a:endParaRPr lang="en-ET"/>
-          </a:p>
-        </p:txBody>
-      </p:sp>
-      <p:sp>
-        <p:nvSpPr>
-          <p:cNvPr id="8" name="Text 6"/>
-          <p:cNvSpPr/>
-          <p:nvPr/>
-        </p:nvSpPr>
-        <p:spPr>
-          <a:xfrm>
-            <a:off x="1673352" y="1819656"/>
-            <a:ext cx="1133856" cy="658368"/>
-          </a:xfrm>
-          <a:prstGeom prst="rect">
-            <a:avLst/>
-          </a:prstGeom>
-          <a:noFill/>
-          <a:ln/>
-        </p:spPr>
-        <p:txBody>
-          <a:bodyPr wrap="square" lIns="0" tIns="0" rIns="0" bIns="0" rtlCol="0" anchor="ctr"/>
-          <a:lstStyle/>
-          <a:p>
-            <a:pPr marL="0" indent="0" algn="ctr">
-              <a:buNone/>
-            </a:pPr>
-            <a:r>
-              <a:rPr lang="en-US" sz="1150" b="1" dirty="0">
-                <a:solidFill>
-                  <a:srgbClr val="FFFFFF"/>
-                </a:solidFill>
-                <a:latin typeface="Calibri" pitchFamily="34" charset="0"/>
-                <a:ea typeface="Calibri" pitchFamily="34" charset="-122"/>
-                <a:cs typeface="Calibri" pitchFamily="34" charset="-120"/>
-              </a:rPr>
-              <a:t>BUILD</a:t>
-            </a:r>
-            <a:endParaRPr lang="en-US" sz="1150" dirty="0"/>
-          </a:p>
-        </p:txBody>
-      </p:sp>
-      <p:sp>
-        <p:nvSpPr>
-          <p:cNvPr id="9" name="Shape 7"/>
-          <p:cNvSpPr/>
-          <p:nvPr/>
-        </p:nvSpPr>
-        <p:spPr>
-          <a:xfrm>
-            <a:off x="2907792" y="3054096"/>
-            <a:ext cx="1133856" cy="658368"/>
-          </a:xfrm>
-          <a:prstGeom prst="ellipse">
-            <a:avLst/>
-          </a:prstGeom>
-          <a:solidFill>
-            <a:srgbClr val="16314E"/>
-          </a:solidFill>
-          <a:ln/>
-          <a:effectLst>
-            <a:outerShdw blurRad="63500" dist="25400" dir="8100000" algn="bl" rotWithShape="0">
-              <a:srgbClr val="1B2A3A">
-                <a:alpha val="12000"/>
-              </a:srgbClr>
-            </a:outerShdw>
-          </a:effectLst>
-        </p:spPr>
-        <p:txBody>
-          <a:bodyPr/>
-          <a:lstStyle/>
-          <a:p>
-            <a:endParaRPr lang="en-ET"/>
-          </a:p>
-        </p:txBody>
-      </p:sp>
-      <p:sp>
-        <p:nvSpPr>
-          <p:cNvPr id="10" name="Text 8"/>
-          <p:cNvSpPr/>
-          <p:nvPr/>
-        </p:nvSpPr>
-        <p:spPr>
-          <a:xfrm>
-            <a:off x="2907792" y="3054096"/>
-            <a:ext cx="1133856" cy="658368"/>
-          </a:xfrm>
-          <a:prstGeom prst="rect">
-            <a:avLst/>
-          </a:prstGeom>
-          <a:noFill/>
-          <a:ln/>
-        </p:spPr>
-        <p:txBody>
-          <a:bodyPr wrap="square" lIns="0" tIns="0" rIns="0" bIns="0" rtlCol="0" anchor="ctr"/>
-          <a:lstStyle/>
-          <a:p>
-            <a:pPr marL="0" indent="0" algn="ctr">
-              <a:buNone/>
-            </a:pPr>
-            <a:r>
-              <a:rPr lang="en-US" sz="1150" b="1" dirty="0">
-                <a:solidFill>
-                  <a:srgbClr val="FFFFFF"/>
-                </a:solidFill>
-                <a:latin typeface="Calibri" pitchFamily="34" charset="0"/>
-                <a:ea typeface="Calibri" pitchFamily="34" charset="-122"/>
-                <a:cs typeface="Calibri" pitchFamily="34" charset="-120"/>
-              </a:rPr>
-              <a:t>EVALUATE</a:t>
-            </a:r>
-            <a:endParaRPr lang="en-US" sz="1150" dirty="0"/>
-          </a:p>
-        </p:txBody>
-      </p:sp>
-      <p:sp>
-        <p:nvSpPr>
-          <p:cNvPr id="11" name="Shape 9"/>
-          <p:cNvSpPr/>
-          <p:nvPr/>
-        </p:nvSpPr>
-        <p:spPr>
-          <a:xfrm>
-            <a:off x="1673352" y="4288536"/>
-            <a:ext cx="1133856" cy="658368"/>
-          </a:xfrm>
-          <a:prstGeom prst="ellipse">
-            <a:avLst/>
-          </a:prstGeom>
-          <a:solidFill>
-            <a:srgbClr val="16314E"/>
-          </a:solidFill>
-          <a:ln/>
-          <a:effectLst>
-            <a:outerShdw blurRad="63500" dist="25400" dir="8100000" algn="bl" rotWithShape="0">
-              <a:srgbClr val="1B2A3A">
-                <a:alpha val="12000"/>
-              </a:srgbClr>
-            </a:outerShdw>
-          </a:effectLst>
-        </p:spPr>
-        <p:txBody>
-          <a:bodyPr/>
-          <a:lstStyle/>
-          <a:p>
-            <a:endParaRPr lang="en-ET"/>
-          </a:p>
-        </p:txBody>
-      </p:sp>
-      <p:sp>
-        <p:nvSpPr>
-          <p:cNvPr id="12" name="Text 10"/>
-          <p:cNvSpPr/>
-          <p:nvPr/>
-        </p:nvSpPr>
-        <p:spPr>
-          <a:xfrm>
-            <a:off x="1673352" y="4288536"/>
-            <a:ext cx="1133856" cy="658368"/>
-          </a:xfrm>
-          <a:prstGeom prst="rect">
-            <a:avLst/>
-          </a:prstGeom>
-          <a:noFill/>
-          <a:ln/>
-        </p:spPr>
-        <p:txBody>
-          <a:bodyPr wrap="square" lIns="0" tIns="0" rIns="0" bIns="0" rtlCol="0" anchor="ctr"/>
-          <a:lstStyle/>
-          <a:p>
-            <a:pPr marL="0" indent="0" algn="ctr">
-              <a:buNone/>
-            </a:pPr>
-            <a:r>
-              <a:rPr lang="en-US" sz="1150" b="1" dirty="0">
-                <a:solidFill>
-                  <a:srgbClr val="FFFFFF"/>
-                </a:solidFill>
-                <a:latin typeface="Calibri" pitchFamily="34" charset="0"/>
-                <a:ea typeface="Calibri" pitchFamily="34" charset="-122"/>
-                <a:cs typeface="Calibri" pitchFamily="34" charset="-120"/>
-              </a:rPr>
-              <a:t>LEARN</a:t>
-            </a:r>
-            <a:endParaRPr lang="en-US" sz="1150" dirty="0"/>
-          </a:p>
-        </p:txBody>
-      </p:sp>
-      <p:sp>
-        <p:nvSpPr>
-          <p:cNvPr id="13" name="Shape 11"/>
-          <p:cNvSpPr/>
-          <p:nvPr/>
-        </p:nvSpPr>
-        <p:spPr>
-          <a:xfrm>
-            <a:off x="438912" y="3054096"/>
-            <a:ext cx="1133856" cy="658368"/>
-          </a:xfrm>
-          <a:prstGeom prst="ellipse">
-            <a:avLst/>
-          </a:prstGeom>
-          <a:solidFill>
-            <a:srgbClr val="16314E"/>
-          </a:solidFill>
-          <a:ln/>
-          <a:effectLst>
-            <a:outerShdw blurRad="63500" dist="25400" dir="8100000" algn="bl" rotWithShape="0">
-              <a:srgbClr val="1B2A3A">
-                <a:alpha val="12000"/>
-              </a:srgbClr>
-            </a:outerShdw>
-          </a:effectLst>
-        </p:spPr>
-        <p:txBody>
-          <a:bodyPr/>
-          <a:lstStyle/>
-          <a:p>
-            <a:endParaRPr lang="en-ET"/>
-          </a:p>
-        </p:txBody>
-      </p:sp>
-      <p:sp>
-        <p:nvSpPr>
-          <p:cNvPr id="14" name="Text 12"/>
-          <p:cNvSpPr/>
-          <p:nvPr/>
-        </p:nvSpPr>
-        <p:spPr>
-          <a:xfrm>
-            <a:off x="438912" y="3054096"/>
-            <a:ext cx="1133856" cy="658368"/>
-          </a:xfrm>
-          <a:prstGeom prst="rect">
-            <a:avLst/>
-          </a:prstGeom>
-          <a:noFill/>
-          <a:ln/>
-        </p:spPr>
-        <p:txBody>
-          <a:bodyPr wrap="square" lIns="0" tIns="0" rIns="0" bIns="0" rtlCol="0" anchor="ctr"/>
-          <a:lstStyle/>
-          <a:p>
-            <a:pPr marL="0" indent="0" algn="ctr">
-              <a:buNone/>
-            </a:pPr>
-            <a:r>
-              <a:rPr lang="en-US" sz="1150" b="1" dirty="0">
-                <a:solidFill>
-                  <a:srgbClr val="FFFFFF"/>
-                </a:solidFill>
-                <a:latin typeface="Calibri" pitchFamily="34" charset="0"/>
-                <a:ea typeface="Calibri" pitchFamily="34" charset="-122"/>
-                <a:cs typeface="Calibri" pitchFamily="34" charset="-120"/>
-              </a:rPr>
-              <a:t>REFINE</a:t>
-            </a:r>
-            <a:endParaRPr lang="en-US" sz="1150" dirty="0"/>
-          </a:p>
-        </p:txBody>
-      </p:sp>
-      <p:sp>
-        <p:nvSpPr>
-          <p:cNvPr id="15" name="Text 13"/>
-          <p:cNvSpPr/>
-          <p:nvPr/>
-        </p:nvSpPr>
-        <p:spPr>
-          <a:xfrm>
-            <a:off x="548640" y="5349240"/>
-            <a:ext cx="3474720" cy="274320"/>
-          </a:xfrm>
-          <a:prstGeom prst="rect">
-            <a:avLst/>
-          </a:prstGeom>
-          <a:noFill/>
-          <a:ln/>
-        </p:spPr>
-        <p:txBody>
-          <a:bodyPr wrap="square" lIns="0" tIns="0" rIns="0" bIns="0" rtlCol="0" anchor="ctr"/>
-          <a:lstStyle/>
-          <a:p>
-            <a:pPr marL="0" indent="0" algn="ctr">
-              <a:buNone/>
-            </a:pPr>
-            <a:r>
-              <a:rPr lang="en-US" sz="1050" i="1" dirty="0">
-                <a:solidFill>
-                  <a:srgbClr val="5A6675"/>
-                </a:solidFill>
-                <a:latin typeface="Calibri" pitchFamily="34" charset="0"/>
-                <a:ea typeface="Calibri" pitchFamily="34" charset="-122"/>
-                <a:cs typeface="Calibri" pitchFamily="34" charset="-120"/>
-              </a:rPr>
-              <a:t>Hevner et al. 2004 · Peffers et al. 2007</a:t>
-            </a:r>
-            <a:endParaRPr lang="en-US" sz="1050" dirty="0"/>
-          </a:p>
-        </p:txBody>
-      </p:sp>
-      <p:sp>
-        <p:nvSpPr>
-          <p:cNvPr id="16" name="Text 14"/>
-          <p:cNvSpPr/>
-          <p:nvPr/>
-        </p:nvSpPr>
-        <p:spPr>
-          <a:xfrm>
-            <a:off x="548640" y="5669280"/>
-            <a:ext cx="3474720" cy="548640"/>
-          </a:xfrm>
-          <a:prstGeom prst="rect">
-            <a:avLst/>
-          </a:prstGeom>
-          <a:noFill/>
-          <a:ln/>
-        </p:spPr>
-        <p:txBody>
-          <a:bodyPr wrap="square" lIns="0" tIns="0" rIns="0" bIns="0" rtlCol="0" anchor="ctr"/>
-          <a:lstStyle/>
-          <a:p>
-            <a:pPr marL="0" indent="0" algn="ctr">
-              <a:buNone/>
-            </a:pPr>
-            <a:r>
-              <a:rPr lang="en-US" sz="1150" dirty="0">
-                <a:solidFill>
-                  <a:srgbClr val="1D242E"/>
-                </a:solidFill>
-                <a:latin typeface="Calibri" pitchFamily="34" charset="0"/>
-                <a:ea typeface="Calibri" pitchFamily="34" charset="-122"/>
-                <a:cs typeface="Calibri" pitchFamily="34" charset="-120"/>
-              </a:rPr>
-              <a:t>The contribution is an artefact —</a:t>
-            </a:r>
-            <a:endParaRPr lang="en-US" sz="1150" dirty="0"/>
-          </a:p>
-          <a:p>
-            <a:pPr marL="0" indent="0" algn="ctr">
-              <a:buNone/>
-            </a:pPr>
-            <a:r>
-              <a:rPr lang="en-US" sz="1150" dirty="0">
-                <a:solidFill>
-                  <a:srgbClr val="1D242E"/>
-                </a:solidFill>
-                <a:latin typeface="Calibri" pitchFamily="34" charset="0"/>
-                <a:ea typeface="Calibri" pitchFamily="34" charset="-122"/>
-                <a:cs typeface="Calibri" pitchFamily="34" charset="-120"/>
-              </a:rPr>
-              <a:t>evaluated empirically, iterated on evidence.</a:t>
-            </a:r>
-            <a:endParaRPr lang="en-US" sz="1150" dirty="0"/>
-          </a:p>
-        </p:txBody>
-      </p:sp>
-      <p:sp>
-        <p:nvSpPr>
-          <p:cNvPr id="17" name="Text 15"/>
-          <p:cNvSpPr/>
-          <p:nvPr/>
-        </p:nvSpPr>
-        <p:spPr>
-          <a:xfrm>
-            <a:off x="4434840" y="1627632"/>
-            <a:ext cx="7223760" cy="274320"/>
-          </a:xfrm>
-          <a:prstGeom prst="rect">
-            <a:avLst/>
-          </a:prstGeom>
-          <a:noFill/>
-          <a:ln/>
-        </p:spPr>
-        <p:txBody>
-          <a:bodyPr wrap="square" lIns="0" tIns="0" rIns="0" bIns="0" rtlCol="0" anchor="ctr"/>
-          <a:lstStyle/>
-          <a:p>
-            <a:pPr marL="0" indent="0">
-              <a:buNone/>
-            </a:pPr>
-            <a:r>
-              <a:rPr lang="en-US" sz="1100" b="1" kern="0" spc="150" dirty="0">
-                <a:solidFill>
-                  <a:srgbClr val="1F7A6F"/>
-                </a:solidFill>
-                <a:latin typeface="Calibri" pitchFamily="34" charset="0"/>
-                <a:ea typeface="Calibri" pitchFamily="34" charset="-122"/>
-                <a:cs typeface="Calibri" pitchFamily="34" charset="-120"/>
-              </a:rPr>
-              <a:t>THREE DOCUMENTED ITERATION LOOPS — EACH CLOSED BY MEASUREMENT, NOT PREFERENCE</a:t>
-            </a:r>
-            <a:endParaRPr lang="en-US" sz="1100" dirty="0"/>
-          </a:p>
-        </p:txBody>
-      </p:sp>
-      <p:sp>
-        <p:nvSpPr>
-          <p:cNvPr id="18" name="Shape 16"/>
-          <p:cNvSpPr/>
-          <p:nvPr/>
-        </p:nvSpPr>
-        <p:spPr>
-          <a:xfrm>
-            <a:off x="4434840" y="2011680"/>
-            <a:ext cx="7205472" cy="1298448"/>
-          </a:xfrm>
-          <a:prstGeom prst="rect">
-            <a:avLst/>
-          </a:prstGeom>
-          <a:solidFill>
-            <a:srgbClr val="FFFFFF"/>
-          </a:solidFill>
-          <a:ln w="12700">
-            <a:solidFill>
-              <a:srgbClr val="C9D3DE"/>
-            </a:solidFill>
-            <a:prstDash val="solid"/>
-          </a:ln>
-          <a:effectLst>
-            <a:outerShdw blurRad="63500" dist="25400" dir="8100000" algn="bl" rotWithShape="0">
-              <a:srgbClr val="1B2A3A">
-                <a:alpha val="12000"/>
-              </a:srgbClr>
-            </a:outerShdw>
-          </a:effectLst>
-        </p:spPr>
-        <p:txBody>
-          <a:bodyPr/>
-          <a:lstStyle/>
-          <a:p>
-            <a:endParaRPr lang="en-ET"/>
-          </a:p>
-        </p:txBody>
-      </p:sp>
-      <p:sp>
-        <p:nvSpPr>
-          <p:cNvPr id="19" name="Shape 17"/>
-          <p:cNvSpPr/>
-          <p:nvPr/>
-        </p:nvSpPr>
-        <p:spPr>
-          <a:xfrm>
-            <a:off x="4434840" y="2011680"/>
-            <a:ext cx="82296" cy="1298448"/>
-          </a:xfrm>
-          <a:prstGeom prst="rect">
-            <a:avLst/>
-          </a:prstGeom>
-          <a:solidFill>
-            <a:srgbClr val="16314E"/>
-          </a:solidFill>
-          <a:ln/>
-        </p:spPr>
-        <p:txBody>
-          <a:bodyPr/>
-          <a:lstStyle/>
-          <a:p>
-            <a:endParaRPr lang="en-ET"/>
-          </a:p>
-        </p:txBody>
-      </p:sp>
-      <p:sp>
-        <p:nvSpPr>
-          <p:cNvPr id="20" name="Text 18"/>
-          <p:cNvSpPr/>
-          <p:nvPr/>
-        </p:nvSpPr>
-        <p:spPr>
-          <a:xfrm>
-            <a:off x="4663440" y="2121408"/>
-            <a:ext cx="6766560" cy="310896"/>
-          </a:xfrm>
-          <a:prstGeom prst="rect">
-            <a:avLst/>
-          </a:prstGeom>
-          <a:noFill/>
-          <a:ln/>
-        </p:spPr>
-        <p:txBody>
-          <a:bodyPr wrap="square" lIns="0" tIns="0" rIns="0" bIns="0" rtlCol="0" anchor="ctr"/>
-          <a:lstStyle/>
-          <a:p>
-            <a:pPr marL="0" indent="0">
-              <a:buNone/>
-            </a:pPr>
-            <a:r>
-              <a:rPr lang="en-US" sz="1350" b="1" dirty="0">
-                <a:solidFill>
-                  <a:srgbClr val="16314E"/>
-                </a:solidFill>
-                <a:latin typeface="Calibri" pitchFamily="34" charset="0"/>
-                <a:ea typeface="Calibri" pitchFamily="34" charset="-122"/>
-                <a:cs typeface="Calibri" pitchFamily="34" charset="-120"/>
-              </a:rPr>
-              <a:t>Corpus loop</a:t>
-            </a:r>
-            <a:endParaRPr lang="en-US" sz="1350" dirty="0"/>
-          </a:p>
-        </p:txBody>
-      </p:sp>
-      <p:sp>
-        <p:nvSpPr>
-          <p:cNvPr id="21" name="Text 19"/>
-          <p:cNvSpPr/>
-          <p:nvPr/>
-        </p:nvSpPr>
-        <p:spPr>
-          <a:xfrm>
-            <a:off x="4663440" y="2450592"/>
-            <a:ext cx="6812280" cy="822960"/>
-          </a:xfrm>
-          <a:prstGeom prst="rect">
-            <a:avLst/>
-          </a:prstGeom>
-          <a:noFill/>
-          <a:ln/>
-        </p:spPr>
-        <p:txBody>
-          <a:bodyPr wrap="square" lIns="0" tIns="0" rIns="0" bIns="0" rtlCol="0" anchor="ctr"/>
-          <a:lstStyle/>
-          <a:p>
-            <a:pPr marL="0" indent="0">
-              <a:lnSpc>
-                <a:spcPct val="106000"/>
-              </a:lnSpc>
-              <a:buNone/>
-            </a:pPr>
-            <a:r>
-              <a:rPr lang="en-US" sz="1150" dirty="0">
-                <a:solidFill>
-                  <a:srgbClr val="5A6675"/>
-                </a:solidFill>
-                <a:latin typeface="Calibri" pitchFamily="34" charset="0"/>
-                <a:ea typeface="Calibri" pitchFamily="34" charset="-122"/>
-                <a:cs typeface="Calibri" pitchFamily="34" charset="-120"/>
-              </a:rPr>
-              <a:t>Refined the training corpus from a raw event dump into a curated, diversity-balanced subset — so the model learns from varied phrasing rather than a handful of over-represented common events.</a:t>
-            </a:r>
-            <a:endParaRPr lang="en-US" sz="1150" dirty="0"/>
-          </a:p>
-        </p:txBody>
-      </p:sp>
-      <p:sp>
-        <p:nvSpPr>
-          <p:cNvPr id="22" name="Shape 20"/>
-          <p:cNvSpPr/>
-          <p:nvPr/>
-        </p:nvSpPr>
-        <p:spPr>
-          <a:xfrm>
-            <a:off x="4434840" y="3438144"/>
-            <a:ext cx="7205472" cy="1298448"/>
-          </a:xfrm>
-          <a:prstGeom prst="rect">
-            <a:avLst/>
-          </a:prstGeom>
-          <a:solidFill>
-            <a:srgbClr val="FFFFFF"/>
-          </a:solidFill>
-          <a:ln w="12700">
-            <a:solidFill>
-              <a:srgbClr val="C9D3DE"/>
-            </a:solidFill>
-            <a:prstDash val="solid"/>
-          </a:ln>
-          <a:effectLst>
-            <a:outerShdw blurRad="63500" dist="25400" dir="8100000" algn="bl" rotWithShape="0">
-              <a:srgbClr val="1B2A3A">
-                <a:alpha val="12000"/>
-              </a:srgbClr>
-            </a:outerShdw>
-          </a:effectLst>
-        </p:spPr>
-        <p:txBody>
-          <a:bodyPr/>
-          <a:lstStyle/>
-          <a:p>
-            <a:endParaRPr lang="en-ET"/>
-          </a:p>
-        </p:txBody>
-      </p:sp>
-      <p:sp>
-        <p:nvSpPr>
-          <p:cNvPr id="23" name="Shape 21"/>
-          <p:cNvSpPr/>
-          <p:nvPr/>
-        </p:nvSpPr>
-        <p:spPr>
-          <a:xfrm>
-            <a:off x="4434840" y="3438144"/>
-            <a:ext cx="82296" cy="1298448"/>
-          </a:xfrm>
-          <a:prstGeom prst="rect">
-            <a:avLst/>
-          </a:prstGeom>
-          <a:solidFill>
-            <a:srgbClr val="2A9D8F"/>
-          </a:solidFill>
-          <a:ln/>
-        </p:spPr>
-        <p:txBody>
-          <a:bodyPr/>
-          <a:lstStyle/>
-          <a:p>
-            <a:endParaRPr lang="en-ET"/>
-          </a:p>
-        </p:txBody>
-      </p:sp>
-      <p:sp>
-        <p:nvSpPr>
-          <p:cNvPr id="24" name="Text 22"/>
-          <p:cNvSpPr/>
-          <p:nvPr/>
-        </p:nvSpPr>
-        <p:spPr>
-          <a:xfrm>
-            <a:off x="4663440" y="3547872"/>
-            <a:ext cx="6766560" cy="310896"/>
-          </a:xfrm>
-          <a:prstGeom prst="rect">
-            <a:avLst/>
-          </a:prstGeom>
-          <a:noFill/>
-          <a:ln/>
-        </p:spPr>
-        <p:txBody>
-          <a:bodyPr wrap="square" lIns="0" tIns="0" rIns="0" bIns="0" rtlCol="0" anchor="ctr"/>
-          <a:lstStyle/>
-          <a:p>
-            <a:pPr marL="0" indent="0">
-              <a:buNone/>
-            </a:pPr>
-            <a:r>
-              <a:rPr lang="en-US" sz="1350" b="1" dirty="0">
-                <a:solidFill>
-                  <a:srgbClr val="16314E"/>
-                </a:solidFill>
-                <a:latin typeface="Calibri" pitchFamily="34" charset="0"/>
-                <a:ea typeface="Calibri" pitchFamily="34" charset="-122"/>
-                <a:cs typeface="Calibri" pitchFamily="34" charset="-120"/>
-              </a:rPr>
-              <a:t>Schema loop</a:t>
-            </a:r>
-            <a:endParaRPr lang="en-US" sz="1350" dirty="0"/>
-          </a:p>
-        </p:txBody>
-      </p:sp>
-      <p:sp>
-        <p:nvSpPr>
-          <p:cNvPr id="25" name="Text 23"/>
-          <p:cNvSpPr/>
-          <p:nvPr/>
-        </p:nvSpPr>
-        <p:spPr>
-          <a:xfrm>
-            <a:off x="4663440" y="3877056"/>
-            <a:ext cx="6812280" cy="822960"/>
-          </a:xfrm>
-          <a:prstGeom prst="rect">
-            <a:avLst/>
-          </a:prstGeom>
-          <a:noFill/>
-          <a:ln/>
-        </p:spPr>
-        <p:txBody>
-          <a:bodyPr wrap="square" lIns="0" tIns="0" rIns="0" bIns="0" rtlCol="0" anchor="ctr"/>
-          <a:lstStyle/>
-          <a:p>
-            <a:pPr marL="0" indent="0">
-              <a:lnSpc>
-                <a:spcPct val="106000"/>
-              </a:lnSpc>
-              <a:buNone/>
-            </a:pPr>
-            <a:r>
-              <a:rPr lang="en-US" sz="1150" dirty="0">
-                <a:solidFill>
-                  <a:srgbClr val="5A6675"/>
-                </a:solidFill>
-                <a:latin typeface="Calibri" pitchFamily="34" charset="0"/>
-                <a:ea typeface="Calibri" pitchFamily="34" charset="-122"/>
-                <a:cs typeface="Calibri" pitchFamily="34" charset="-120"/>
-              </a:rPr>
-              <a:t>Narrowed the entity set to only those an annotator can locate word-for-word in the source text — giving the model clean, auditable labels and the analyst output they can trust.</a:t>
-            </a:r>
-            <a:endParaRPr lang="en-US" sz="1150" dirty="0"/>
-          </a:p>
-        </p:txBody>
-      </p:sp>
-      <p:sp>
-        <p:nvSpPr>
-          <p:cNvPr id="26" name="Shape 24"/>
-          <p:cNvSpPr/>
-          <p:nvPr/>
-        </p:nvSpPr>
-        <p:spPr>
-          <a:xfrm>
-            <a:off x="4434840" y="4864608"/>
-            <a:ext cx="7205472" cy="1298448"/>
-          </a:xfrm>
-          <a:prstGeom prst="rect">
-            <a:avLst/>
-          </a:prstGeom>
-          <a:solidFill>
-            <a:srgbClr val="FFFFFF"/>
-          </a:solidFill>
-          <a:ln w="12700">
-            <a:solidFill>
-              <a:srgbClr val="C9D3DE"/>
-            </a:solidFill>
-            <a:prstDash val="solid"/>
-          </a:ln>
-          <a:effectLst>
-            <a:outerShdw blurRad="63500" dist="25400" dir="8100000" algn="bl" rotWithShape="0">
-              <a:srgbClr val="1B2A3A">
-                <a:alpha val="12000"/>
-              </a:srgbClr>
-            </a:outerShdw>
-          </a:effectLst>
-        </p:spPr>
-        <p:txBody>
-          <a:bodyPr/>
-          <a:lstStyle/>
-          <a:p>
-            <a:endParaRPr lang="en-ET"/>
-          </a:p>
-        </p:txBody>
-      </p:sp>
-      <p:sp>
-        <p:nvSpPr>
-          <p:cNvPr id="27" name="Shape 25"/>
-          <p:cNvSpPr/>
-          <p:nvPr/>
-        </p:nvSpPr>
-        <p:spPr>
-          <a:xfrm>
-            <a:off x="4434840" y="4864608"/>
-            <a:ext cx="82296" cy="1298448"/>
-          </a:xfrm>
-          <a:prstGeom prst="rect">
-            <a:avLst/>
-          </a:prstGeom>
-          <a:solidFill>
-            <a:srgbClr val="E76F51"/>
-          </a:solidFill>
-          <a:ln/>
-        </p:spPr>
-        <p:txBody>
-          <a:bodyPr/>
-          <a:lstStyle/>
-          <a:p>
-            <a:endParaRPr lang="en-ET"/>
-          </a:p>
-        </p:txBody>
-      </p:sp>
-      <p:sp>
-        <p:nvSpPr>
-          <p:cNvPr id="28" name="Text 26"/>
-          <p:cNvSpPr/>
-          <p:nvPr/>
-        </p:nvSpPr>
-        <p:spPr>
-          <a:xfrm>
-            <a:off x="4663440" y="4974336"/>
-            <a:ext cx="6766560" cy="310896"/>
-          </a:xfrm>
-          <a:prstGeom prst="rect">
-            <a:avLst/>
-          </a:prstGeom>
-          <a:noFill/>
-          <a:ln/>
-        </p:spPr>
-        <p:txBody>
-          <a:bodyPr wrap="square" lIns="0" tIns="0" rIns="0" bIns="0" rtlCol="0" anchor="ctr"/>
-          <a:lstStyle/>
-          <a:p>
-            <a:pPr marL="0" indent="0">
-              <a:buNone/>
-            </a:pPr>
-            <a:r>
-              <a:rPr lang="en-US" sz="1350" b="1" dirty="0">
-                <a:solidFill>
-                  <a:srgbClr val="16314E"/>
-                </a:solidFill>
-                <a:latin typeface="Calibri" pitchFamily="34" charset="0"/>
-                <a:ea typeface="Calibri" pitchFamily="34" charset="-122"/>
-                <a:cs typeface="Calibri" pitchFamily="34" charset="-120"/>
-              </a:rPr>
-              <a:t>Loss loop</a:t>
-            </a:r>
-            <a:endParaRPr lang="en-US" sz="1350" dirty="0"/>
-          </a:p>
-        </p:txBody>
-      </p:sp>
-      <p:sp>
-        <p:nvSpPr>
-          <p:cNvPr id="29" name="Text 27"/>
-          <p:cNvSpPr/>
-          <p:nvPr/>
-        </p:nvSpPr>
-        <p:spPr>
-          <a:xfrm>
-            <a:off x="4663440" y="5303520"/>
-            <a:ext cx="6812280" cy="822960"/>
-          </a:xfrm>
-          <a:prstGeom prst="rect">
-            <a:avLst/>
-          </a:prstGeom>
-          <a:noFill/>
-          <a:ln/>
-        </p:spPr>
-        <p:txBody>
-          <a:bodyPr wrap="square" lIns="0" tIns="0" rIns="0" bIns="0" rtlCol="0" anchor="ctr"/>
-          <a:lstStyle/>
-          <a:p>
-            <a:pPr marL="0" indent="0">
-              <a:lnSpc>
-                <a:spcPct val="106000"/>
-              </a:lnSpc>
-              <a:buNone/>
-            </a:pPr>
-            <a:r>
-              <a:rPr lang="en-US" sz="1150" dirty="0">
-                <a:solidFill>
-                  <a:srgbClr val="5A6675"/>
-                </a:solidFill>
-                <a:latin typeface="Calibri" pitchFamily="34" charset="0"/>
-                <a:ea typeface="Calibri" pitchFamily="34" charset="-122"/>
-                <a:cs typeface="Calibri" pitchFamily="34" charset="-120"/>
-              </a:rPr>
-              <a:t>Reshaped the training objective to concentrate on the rare, operationally critical entities — victim, action, casualties — rather than the easy majority of non-entity tokens.</a:t>
-            </a:r>
-            <a:endParaRPr lang="en-US" sz="1150" dirty="0"/>
-          </a:p>
-        </p:txBody>
-      </p:sp>
-    </p:spTree>
-    <p:extLst>
-      <p:ext uri="{BB962C8B-B14F-4D97-AF65-F5344CB8AC3E}">
-        <p14:creationId xmlns:p14="http://schemas.microsoft.com/office/powerpoint/2010/main" val="1514232302"/>
       </p:ext>
     </p:extLst>
   </p:cSld>
